--- a/presentation/fake_news_checker_presentation_20260411_integrated.pptx
+++ b/presentation/fake_news_checker_presentation_20260411_integrated.pptx
@@ -22,6 +22,8 @@
     <p:sldId id="270" r:id="rId21"/>
     <p:sldId id="271" r:id="rId22"/>
     <p:sldId id="272" r:id="rId23"/>
+    <p:sldId id="273" r:id="rId24"/>
+    <p:sldId id="274" r:id="rId25"/>
   </p:sldIdLst>
   <p:sldSz cx="12191695" cy="6858000" type="screen4x3"/>
   <p:notesSz cx="6858000" cy="9144000"/>
@@ -3638,7 +3640,7 @@
                 </a:solidFill>
                 <a:latin typeface="Yu Gothic"/>
               </a:rPr>
-              <a:t>図の説明: summary_metrics.png</a:t>
+              <a:t>6. 工夫点</a:t>
             </a:r>
           </a:p>
         </p:txBody>
@@ -3673,7 +3675,7 @@
                 </a:solidFill>
                 <a:latin typeface="Yu Gothic"/>
               </a:rPr>
-              <a:t>全体指標はかなり改善したが、誤り recall にはまだ伸びしろがある</a:t>
+              <a:t>評価可能な形に落とし込み、レビューしやすい運用まで整えた</a:t>
             </a:r>
           </a:p>
         </p:txBody>
@@ -3721,9 +3723,356 @@
           </a:p>
         </p:txBody>
       </p:sp>
+      <p:sp>
+        <p:nvSpPr>
+          <p:cNvPr id="5" name="Rounded Rectangle 4"/>
+          <p:cNvSpPr/>
+          <p:nvPr/>
+        </p:nvSpPr>
+        <p:spPr>
+          <a:xfrm>
+            <a:off x="676656" y="1481328"/>
+            <a:ext cx="5394960" cy="4526280"/>
+          </a:xfrm>
+          <a:prstGeom prst="roundRect">
+            <a:avLst/>
+          </a:prstGeom>
+          <a:solidFill>
+            <a:srgbClr val="FFFFFF"/>
+          </a:solidFill>
+          <a:ln w="14604">
+            <a:solidFill>
+              <a:srgbClr val="D9D3CA"/>
+            </a:solidFill>
+          </a:ln>
+        </p:spPr>
+        <p:style>
+          <a:lnRef idx="1">
+            <a:schemeClr val="accent1"/>
+          </a:lnRef>
+          <a:fillRef idx="3">
+            <a:schemeClr val="accent1"/>
+          </a:fillRef>
+          <a:effectRef idx="2">
+            <a:schemeClr val="accent1"/>
+          </a:effectRef>
+          <a:fontRef idx="minor">
+            <a:schemeClr val="lt1"/>
+          </a:fontRef>
+        </p:style>
+        <p:txBody>
+          <a:bodyPr rtlCol="0" anchor="ctr"/>
+          <a:lstStyle/>
+          <a:p>
+            <a:pPr algn="ctr"/>
+          </a:p>
+        </p:txBody>
+      </p:sp>
+      <p:sp>
+        <p:nvSpPr>
+          <p:cNvPr id="6" name="Rounded Rectangle 5"/>
+          <p:cNvSpPr/>
+          <p:nvPr/>
+        </p:nvSpPr>
+        <p:spPr>
+          <a:xfrm>
+            <a:off x="6272784" y="1481328"/>
+            <a:ext cx="5212080" cy="4526280"/>
+          </a:xfrm>
+          <a:prstGeom prst="roundRect">
+            <a:avLst/>
+          </a:prstGeom>
+          <a:solidFill>
+            <a:srgbClr val="EAF3F1"/>
+          </a:solidFill>
+          <a:ln w="14604">
+            <a:solidFill>
+              <a:srgbClr val="D9D3CA"/>
+            </a:solidFill>
+          </a:ln>
+        </p:spPr>
+        <p:style>
+          <a:lnRef idx="1">
+            <a:schemeClr val="accent1"/>
+          </a:lnRef>
+          <a:fillRef idx="3">
+            <a:schemeClr val="accent1"/>
+          </a:fillRef>
+          <a:effectRef idx="2">
+            <a:schemeClr val="accent1"/>
+          </a:effectRef>
+          <a:fontRef idx="minor">
+            <a:schemeClr val="lt1"/>
+          </a:fontRef>
+        </p:style>
+        <p:txBody>
+          <a:bodyPr rtlCol="0" anchor="ctr"/>
+          <a:lstStyle/>
+          <a:p>
+            <a:pPr algn="ctr"/>
+          </a:p>
+        </p:txBody>
+      </p:sp>
+      <p:sp>
+        <p:nvSpPr>
+          <p:cNvPr id="7" name="TextBox 6"/>
+          <p:cNvSpPr txBox="1"/>
+          <p:nvPr/>
+        </p:nvSpPr>
+        <p:spPr>
+          <a:xfrm>
+            <a:off x="914400" y="1755648"/>
+            <a:ext cx="2011680" cy="274320"/>
+          </a:xfrm>
+          <a:prstGeom prst="rect">
+            <a:avLst/>
+          </a:prstGeom>
+          <a:noFill/>
+        </p:spPr>
+        <p:txBody>
+          <a:bodyPr wrap="square" lIns="25400" rIns="25400" tIns="12700" bIns="12700">
+            <a:spAutoFit/>
+          </a:bodyPr>
+          <a:lstStyle/>
+          <a:p>
+            <a:pPr algn="l"/>
+            <a:r>
+              <a:rPr sz="2000" b="1">
+                <a:solidFill>
+                  <a:srgbClr val="13767A"/>
+                </a:solidFill>
+                <a:latin typeface="Yu Gothic"/>
+              </a:rPr>
+              <a:t>設計面の工夫</a:t>
+            </a:r>
+          </a:p>
+        </p:txBody>
+      </p:sp>
+      <p:sp>
+        <p:nvSpPr>
+          <p:cNvPr id="8" name="TextBox 7"/>
+          <p:cNvSpPr txBox="1"/>
+          <p:nvPr/>
+        </p:nvSpPr>
+        <p:spPr>
+          <a:xfrm>
+            <a:off x="896112" y="2066543"/>
+            <a:ext cx="4663440" cy="1965960"/>
+          </a:xfrm>
+          <a:prstGeom prst="rect">
+            <a:avLst/>
+          </a:prstGeom>
+          <a:noFill/>
+        </p:spPr>
+        <p:txBody>
+          <a:bodyPr wrap="square" lIns="50800" rIns="50800">
+            <a:spAutoFit/>
+          </a:bodyPr>
+          <a:lstStyle/>
+          <a:p>
+            <a:pPr algn="l">
+              <a:spcAft>
+                <a:spcPts val="700"/>
+              </a:spcAft>
+            </a:pPr>
+            <a:r>
+              <a:rPr sz="1700">
+                <a:solidFill>
+                  <a:srgbClr val="1F2A34"/>
+                </a:solidFill>
+                <a:latin typeface="Yu Gothic"/>
+              </a:rPr>
+              <a:t>真偽判定と書き振り評価を分離し、煽り表現だけで真偽を決めない設計にした</a:t>
+            </a:r>
+          </a:p>
+          <a:p>
+            <a:pPr algn="l">
+              <a:spcAft>
+                <a:spcPts val="700"/>
+              </a:spcAft>
+            </a:pPr>
+            <a:r>
+              <a:rPr sz="1700">
+                <a:solidFill>
+                  <a:srgbClr val="1F2A34"/>
+                </a:solidFill>
+                <a:latin typeface="Yu Gothic"/>
+              </a:rPr>
+              <a:t>dataset_runner / evaluation / plot をつなぎ、同じ dataset で改善前後を比較できるようにした</a:t>
+            </a:r>
+          </a:p>
+          <a:p>
+            <a:pPr algn="l">
+              <a:spcAft>
+                <a:spcPts val="700"/>
+              </a:spcAft>
+            </a:pPr>
+            <a:r>
+              <a:rPr sz="1700">
+                <a:solidFill>
+                  <a:srgbClr val="1F2A34"/>
+                </a:solidFill>
+                <a:latin typeface="Yu Gothic"/>
+              </a:rPr>
+              <a:t>shared testdata を repo root に集約し、Ver2 / Ver3 / Ver4 で同じデータを参照できるようにした</a:t>
+            </a:r>
+          </a:p>
+        </p:txBody>
+      </p:sp>
+      <p:sp>
+        <p:nvSpPr>
+          <p:cNvPr id="9" name="TextBox 8"/>
+          <p:cNvSpPr txBox="1"/>
+          <p:nvPr/>
+        </p:nvSpPr>
+        <p:spPr>
+          <a:xfrm>
+            <a:off x="914400" y="4370832"/>
+            <a:ext cx="2560320" cy="274320"/>
+          </a:xfrm>
+          <a:prstGeom prst="rect">
+            <a:avLst/>
+          </a:prstGeom>
+          <a:noFill/>
+        </p:spPr>
+        <p:txBody>
+          <a:bodyPr wrap="square" lIns="25400" rIns="25400" tIns="12700" bIns="12700">
+            <a:spAutoFit/>
+          </a:bodyPr>
+          <a:lstStyle/>
+          <a:p>
+            <a:pPr algn="l"/>
+            <a:r>
+              <a:rPr sz="2000" b="1">
+                <a:solidFill>
+                  <a:srgbClr val="C96D31"/>
+                </a:solidFill>
+                <a:latin typeface="Yu Gothic"/>
+              </a:rPr>
+              <a:t>運用面の工夫</a:t>
+            </a:r>
+          </a:p>
+        </p:txBody>
+      </p:sp>
+      <p:sp>
+        <p:nvSpPr>
+          <p:cNvPr id="10" name="TextBox 9"/>
+          <p:cNvSpPr txBox="1"/>
+          <p:nvPr/>
+        </p:nvSpPr>
+        <p:spPr>
+          <a:xfrm>
+            <a:off x="896112" y="4663440"/>
+            <a:ext cx="4617720" cy="914400"/>
+          </a:xfrm>
+          <a:prstGeom prst="rect">
+            <a:avLst/>
+          </a:prstGeom>
+          <a:noFill/>
+        </p:spPr>
+        <p:txBody>
+          <a:bodyPr wrap="square" lIns="50800" rIns="50800">
+            <a:spAutoFit/>
+          </a:bodyPr>
+          <a:lstStyle/>
+          <a:p>
+            <a:pPr algn="l">
+              <a:spcAft>
+                <a:spcPts val="700"/>
+              </a:spcAft>
+            </a:pPr>
+            <a:r>
+              <a:rPr sz="1700">
+                <a:solidFill>
+                  <a:srgbClr val="1F2A34"/>
+                </a:solidFill>
+                <a:latin typeface="Yu Gothic"/>
+              </a:rPr>
+              <a:t>evaluation_outputs では 5 plots を必須で出す運用にした</a:t>
+            </a:r>
+          </a:p>
+          <a:p>
+            <a:pPr algn="l">
+              <a:spcAft>
+                <a:spcPts val="700"/>
+              </a:spcAft>
+            </a:pPr>
+            <a:r>
+              <a:rPr sz="1700">
+                <a:solidFill>
+                  <a:srgbClr val="1F2A34"/>
+                </a:solidFill>
+                <a:latin typeface="Yu Gothic"/>
+              </a:rPr>
+              <a:t>predictions JSON / eval JSON / plots / CSV / XLSX を同じ timestamp フォルダへまとめた</a:t>
+            </a:r>
+          </a:p>
+          <a:p>
+            <a:pPr algn="l">
+              <a:spcAft>
+                <a:spcPts val="700"/>
+              </a:spcAft>
+            </a:pPr>
+            <a:r>
+              <a:rPr sz="1700">
+                <a:solidFill>
+                  <a:srgbClr val="1F2A34"/>
+                </a:solidFill>
+                <a:latin typeface="Yu Gothic"/>
+              </a:rPr>
+              <a:t>プレゼン資料もスクリプトで再生成し、最新 rerun をすぐ反映できるようにした</a:t>
+            </a:r>
+          </a:p>
+        </p:txBody>
+      </p:sp>
+      <p:sp>
+        <p:nvSpPr>
+          <p:cNvPr id="11" name="Rounded Rectangle 10"/>
+          <p:cNvSpPr/>
+          <p:nvPr/>
+        </p:nvSpPr>
+        <p:spPr>
+          <a:xfrm>
+            <a:off x="6473952" y="1783080"/>
+            <a:ext cx="2011680" cy="1417320"/>
+          </a:xfrm>
+          <a:prstGeom prst="roundRect">
+            <a:avLst/>
+          </a:prstGeom>
+          <a:solidFill>
+            <a:srgbClr val="FFFFFF"/>
+          </a:solidFill>
+          <a:ln w="14604">
+            <a:solidFill>
+              <a:srgbClr val="D9D3CA"/>
+            </a:solidFill>
+          </a:ln>
+        </p:spPr>
+        <p:style>
+          <a:lnRef idx="1">
+            <a:schemeClr val="accent1"/>
+          </a:lnRef>
+          <a:fillRef idx="3">
+            <a:schemeClr val="accent1"/>
+          </a:fillRef>
+          <a:effectRef idx="2">
+            <a:schemeClr val="accent1"/>
+          </a:effectRef>
+          <a:fontRef idx="minor">
+            <a:schemeClr val="lt1"/>
+          </a:fontRef>
+        </p:style>
+        <p:txBody>
+          <a:bodyPr rtlCol="0" anchor="ctr"/>
+          <a:lstStyle/>
+          <a:p>
+            <a:pPr algn="ctr"/>
+          </a:p>
+        </p:txBody>
+      </p:sp>
       <p:pic>
         <p:nvPicPr>
-          <p:cNvPr id="5" name="Picture 4" descr="summary_metrics.png"/>
+          <p:cNvPr id="12" name="Picture 11" descr="evaluation_dashboard.png"/>
           <p:cNvPicPr>
             <a:picLocks noChangeAspect="1"/>
           </p:cNvPicPr>
@@ -3737,8 +4086,8 @@
         </p:blipFill>
         <p:spPr>
           <a:xfrm>
-            <a:off x="713232" y="1706026"/>
-            <a:ext cx="6400800" cy="4232332"/>
+            <a:off x="6547104" y="1856232"/>
+            <a:ext cx="1865376" cy="1033272"/>
           </a:xfrm>
           <a:prstGeom prst="rect">
             <a:avLst/>
@@ -3747,20 +4096,55 @@
       </p:pic>
       <p:sp>
         <p:nvSpPr>
-          <p:cNvPr id="6" name="Rounded Rectangle 5"/>
+          <p:cNvPr id="13" name="TextBox 12"/>
+          <p:cNvSpPr txBox="1"/>
+          <p:nvPr/>
+        </p:nvSpPr>
+        <p:spPr>
+          <a:xfrm>
+            <a:off x="6565392" y="2953512"/>
+            <a:ext cx="1828800" cy="137160"/>
+          </a:xfrm>
+          <a:prstGeom prst="rect">
+            <a:avLst/>
+          </a:prstGeom>
+          <a:noFill/>
+        </p:spPr>
+        <p:txBody>
+          <a:bodyPr wrap="square" lIns="25400" rIns="25400" tIns="12700" bIns="12700">
+            <a:spAutoFit/>
+          </a:bodyPr>
+          <a:lstStyle/>
+          <a:p>
+            <a:pPr algn="ctr"/>
+            <a:r>
+              <a:rPr sz="1000" b="1">
+                <a:solidFill>
+                  <a:srgbClr val="626B76"/>
+                </a:solidFill>
+                <a:latin typeface="Yu Gothic"/>
+              </a:rPr>
+              <a:t>evaluation_dashboard.png</a:t>
+            </a:r>
+          </a:p>
+        </p:txBody>
+      </p:sp>
+      <p:sp>
+        <p:nvSpPr>
+          <p:cNvPr id="14" name="Rounded Rectangle 13"/>
           <p:cNvSpPr/>
           <p:nvPr/>
         </p:nvSpPr>
         <p:spPr>
           <a:xfrm>
-            <a:off x="7333488" y="1572768"/>
-            <a:ext cx="3913632" cy="4480560"/>
+            <a:off x="8650224" y="1783080"/>
+            <a:ext cx="2011680" cy="1417320"/>
           </a:xfrm>
           <a:prstGeom prst="roundRect">
             <a:avLst/>
           </a:prstGeom>
           <a:solidFill>
-            <a:srgbClr val="F3EEE5"/>
+            <a:srgbClr val="FFFFFF"/>
           </a:solidFill>
           <a:ln w="14604">
             <a:solidFill>
@@ -3790,16 +4174,40 @@
           </a:p>
         </p:txBody>
       </p:sp>
-      <p:sp>
-        <p:nvSpPr>
-          <p:cNvPr id="7" name="TextBox 6"/>
+      <p:pic>
+        <p:nvPicPr>
+          <p:cNvPr id="15" name="Picture 14" descr="confusion_matrix.png"/>
+          <p:cNvPicPr>
+            <a:picLocks noChangeAspect="1"/>
+          </p:cNvPicPr>
+          <p:nvPr/>
+        </p:nvPicPr>
+        <p:blipFill>
+          <a:blip r:embed="rId3"/>
+          <a:stretch>
+            <a:fillRect/>
+          </a:stretch>
+        </p:blipFill>
+        <p:spPr>
+          <a:xfrm>
+            <a:off x="8723376" y="1856232"/>
+            <a:ext cx="1865376" cy="1033272"/>
+          </a:xfrm>
+          <a:prstGeom prst="rect">
+            <a:avLst/>
+          </a:prstGeom>
+        </p:spPr>
+      </p:pic>
+      <p:sp>
+        <p:nvSpPr>
+          <p:cNvPr id="16" name="TextBox 15"/>
           <p:cNvSpPr txBox="1"/>
           <p:nvPr/>
         </p:nvSpPr>
         <p:spPr>
           <a:xfrm>
-            <a:off x="7571231" y="1828800"/>
-            <a:ext cx="2560320" cy="274320"/>
+            <a:off x="8741664" y="2953512"/>
+            <a:ext cx="1828800" cy="137160"/>
           </a:xfrm>
           <a:prstGeom prst="rect">
             <a:avLst/>
@@ -3812,109 +4220,265 @@
           </a:bodyPr>
           <a:lstStyle/>
           <a:p>
+            <a:pPr algn="ctr"/>
+            <a:r>
+              <a:rPr sz="1000" b="1">
+                <a:solidFill>
+                  <a:srgbClr val="626B76"/>
+                </a:solidFill>
+                <a:latin typeface="Yu Gothic"/>
+              </a:rPr>
+              <a:t>confusion_matrix.png</a:t>
+            </a:r>
+          </a:p>
+        </p:txBody>
+      </p:sp>
+      <p:sp>
+        <p:nvSpPr>
+          <p:cNvPr id="17" name="Rounded Rectangle 16"/>
+          <p:cNvSpPr/>
+          <p:nvPr/>
+        </p:nvSpPr>
+        <p:spPr>
+          <a:xfrm>
+            <a:off x="6473952" y="3401568"/>
+            <a:ext cx="2011680" cy="1417320"/>
+          </a:xfrm>
+          <a:prstGeom prst="roundRect">
+            <a:avLst/>
+          </a:prstGeom>
+          <a:solidFill>
+            <a:srgbClr val="FFFFFF"/>
+          </a:solidFill>
+          <a:ln w="14604">
+            <a:solidFill>
+              <a:srgbClr val="D9D3CA"/>
+            </a:solidFill>
+          </a:ln>
+        </p:spPr>
+        <p:style>
+          <a:lnRef idx="1">
+            <a:schemeClr val="accent1"/>
+          </a:lnRef>
+          <a:fillRef idx="3">
+            <a:schemeClr val="accent1"/>
+          </a:fillRef>
+          <a:effectRef idx="2">
+            <a:schemeClr val="accent1"/>
+          </a:effectRef>
+          <a:fontRef idx="minor">
+            <a:schemeClr val="lt1"/>
+          </a:fontRef>
+        </p:style>
+        <p:txBody>
+          <a:bodyPr rtlCol="0" anchor="ctr"/>
+          <a:lstStyle/>
+          <a:p>
+            <a:pPr algn="ctr"/>
+          </a:p>
+        </p:txBody>
+      </p:sp>
+      <p:pic>
+        <p:nvPicPr>
+          <p:cNvPr id="18" name="Picture 17" descr="summary_metrics.png"/>
+          <p:cNvPicPr>
+            <a:picLocks noChangeAspect="1"/>
+          </p:cNvPicPr>
+          <p:nvPr/>
+        </p:nvPicPr>
+        <p:blipFill>
+          <a:blip r:embed="rId4"/>
+          <a:stretch>
+            <a:fillRect/>
+          </a:stretch>
+        </p:blipFill>
+        <p:spPr>
+          <a:xfrm>
+            <a:off x="6547104" y="3474720"/>
+            <a:ext cx="1865376" cy="1033272"/>
+          </a:xfrm>
+          <a:prstGeom prst="rect">
+            <a:avLst/>
+          </a:prstGeom>
+        </p:spPr>
+      </p:pic>
+      <p:sp>
+        <p:nvSpPr>
+          <p:cNvPr id="19" name="TextBox 18"/>
+          <p:cNvSpPr txBox="1"/>
+          <p:nvPr/>
+        </p:nvSpPr>
+        <p:spPr>
+          <a:xfrm>
+            <a:off x="6565392" y="4572000"/>
+            <a:ext cx="1828800" cy="137160"/>
+          </a:xfrm>
+          <a:prstGeom prst="rect">
+            <a:avLst/>
+          </a:prstGeom>
+          <a:noFill/>
+        </p:spPr>
+        <p:txBody>
+          <a:bodyPr wrap="square" lIns="25400" rIns="25400" tIns="12700" bIns="12700">
+            <a:spAutoFit/>
+          </a:bodyPr>
+          <a:lstStyle/>
+          <a:p>
+            <a:pPr algn="ctr"/>
+            <a:r>
+              <a:rPr sz="1000" b="1">
+                <a:solidFill>
+                  <a:srgbClr val="626B76"/>
+                </a:solidFill>
+                <a:latin typeface="Yu Gothic"/>
+              </a:rPr>
+              <a:t>summary_metrics.png</a:t>
+            </a:r>
+          </a:p>
+        </p:txBody>
+      </p:sp>
+      <p:sp>
+        <p:nvSpPr>
+          <p:cNvPr id="20" name="Rounded Rectangle 19"/>
+          <p:cNvSpPr/>
+          <p:nvPr/>
+        </p:nvSpPr>
+        <p:spPr>
+          <a:xfrm>
+            <a:off x="8650224" y="3401568"/>
+            <a:ext cx="2011680" cy="1417320"/>
+          </a:xfrm>
+          <a:prstGeom prst="roundRect">
+            <a:avLst/>
+          </a:prstGeom>
+          <a:solidFill>
+            <a:srgbClr val="FFFFFF"/>
+          </a:solidFill>
+          <a:ln w="14604">
+            <a:solidFill>
+              <a:srgbClr val="D9D3CA"/>
+            </a:solidFill>
+          </a:ln>
+        </p:spPr>
+        <p:style>
+          <a:lnRef idx="1">
+            <a:schemeClr val="accent1"/>
+          </a:lnRef>
+          <a:fillRef idx="3">
+            <a:schemeClr val="accent1"/>
+          </a:fillRef>
+          <a:effectRef idx="2">
+            <a:schemeClr val="accent1"/>
+          </a:effectRef>
+          <a:fontRef idx="minor">
+            <a:schemeClr val="lt1"/>
+          </a:fontRef>
+        </p:style>
+        <p:txBody>
+          <a:bodyPr rtlCol="0" anchor="ctr"/>
+          <a:lstStyle/>
+          <a:p>
+            <a:pPr algn="ctr"/>
+          </a:p>
+        </p:txBody>
+      </p:sp>
+      <p:pic>
+        <p:nvPicPr>
+          <p:cNvPr id="21" name="Picture 20" descr="per_class_metrics.png"/>
+          <p:cNvPicPr>
+            <a:picLocks noChangeAspect="1"/>
+          </p:cNvPicPr>
+          <p:nvPr/>
+        </p:nvPicPr>
+        <p:blipFill>
+          <a:blip r:embed="rId5"/>
+          <a:stretch>
+            <a:fillRect/>
+          </a:stretch>
+        </p:blipFill>
+        <p:spPr>
+          <a:xfrm>
+            <a:off x="8723376" y="3474720"/>
+            <a:ext cx="1865376" cy="1033272"/>
+          </a:xfrm>
+          <a:prstGeom prst="rect">
+            <a:avLst/>
+          </a:prstGeom>
+        </p:spPr>
+      </p:pic>
+      <p:sp>
+        <p:nvSpPr>
+          <p:cNvPr id="22" name="TextBox 21"/>
+          <p:cNvSpPr txBox="1"/>
+          <p:nvPr/>
+        </p:nvSpPr>
+        <p:spPr>
+          <a:xfrm>
+            <a:off x="8741664" y="4572000"/>
+            <a:ext cx="1828800" cy="137160"/>
+          </a:xfrm>
+          <a:prstGeom prst="rect">
+            <a:avLst/>
+          </a:prstGeom>
+          <a:noFill/>
+        </p:spPr>
+        <p:txBody>
+          <a:bodyPr wrap="square" lIns="25400" rIns="25400" tIns="12700" bIns="12700">
+            <a:spAutoFit/>
+          </a:bodyPr>
+          <a:lstStyle/>
+          <a:p>
+            <a:pPr algn="ctr"/>
+            <a:r>
+              <a:rPr sz="1000" b="1">
+                <a:solidFill>
+                  <a:srgbClr val="626B76"/>
+                </a:solidFill>
+                <a:latin typeface="Yu Gothic"/>
+              </a:rPr>
+              <a:t>per_class_metrics.png</a:t>
+            </a:r>
+          </a:p>
+        </p:txBody>
+      </p:sp>
+      <p:sp>
+        <p:nvSpPr>
+          <p:cNvPr id="23" name="TextBox 22"/>
+          <p:cNvSpPr txBox="1"/>
+          <p:nvPr/>
+        </p:nvSpPr>
+        <p:spPr>
+          <a:xfrm>
+            <a:off x="6492240" y="5029200"/>
+            <a:ext cx="3840480" cy="237744"/>
+          </a:xfrm>
+          <a:prstGeom prst="rect">
+            <a:avLst/>
+          </a:prstGeom>
+          <a:noFill/>
+        </p:spPr>
+        <p:txBody>
+          <a:bodyPr wrap="square" lIns="25400" rIns="25400" tIns="12700" bIns="12700">
+            <a:spAutoFit/>
+          </a:bodyPr>
+          <a:lstStyle/>
+          <a:p>
             <a:pPr algn="l"/>
             <a:r>
-              <a:rPr sz="1900" b="1">
-                <a:solidFill>
-                  <a:srgbClr val="13767A"/>
-                </a:solidFill>
-                <a:latin typeface="Yu Gothic"/>
-              </a:rPr>
-              <a:t>読み取りポイント</a:t>
-            </a:r>
-          </a:p>
-        </p:txBody>
-      </p:sp>
-      <p:sp>
-        <p:nvSpPr>
-          <p:cNvPr id="8" name="TextBox 7"/>
-          <p:cNvSpPr txBox="1"/>
-          <p:nvPr/>
-        </p:nvSpPr>
-        <p:spPr>
-          <a:xfrm>
-            <a:off x="7516368" y="2139696"/>
-            <a:ext cx="3291840" cy="2560320"/>
-          </a:xfrm>
-          <a:prstGeom prst="rect">
-            <a:avLst/>
-          </a:prstGeom>
-          <a:noFill/>
-        </p:spPr>
-        <p:txBody>
-          <a:bodyPr wrap="square" lIns="50800" rIns="50800">
-            <a:spAutoFit/>
-          </a:bodyPr>
-          <a:lstStyle/>
-          <a:p>
-            <a:pPr algn="l">
-              <a:spcAft>
-                <a:spcPts val="700"/>
-              </a:spcAft>
-            </a:pPr>
-            <a:r>
-              <a:rPr sz="1700">
-                <a:solidFill>
-                  <a:srgbClr val="1F2A34"/>
-                </a:solidFill>
-                <a:latin typeface="Yu Gothic"/>
-              </a:rPr>
-              <a:t>Accuracy は 0.840、Macro F1 は 0.837 まで改善</a:t>
-            </a:r>
-          </a:p>
-          <a:p>
-            <a:pPr algn="l">
-              <a:spcAft>
-                <a:spcPts val="700"/>
-              </a:spcAft>
-            </a:pPr>
-            <a:r>
-              <a:rPr sz="1700">
-                <a:solidFill>
-                  <a:srgbClr val="1F2A34"/>
-                </a:solidFill>
-                <a:latin typeface="Yu Gothic"/>
-              </a:rPr>
-              <a:t>Weighted F1 も 0.837 で、全体として安定してきた</a:t>
-            </a:r>
-          </a:p>
-          <a:p>
-            <a:pPr algn="l">
-              <a:spcAft>
-                <a:spcPts val="700"/>
-              </a:spcAft>
-            </a:pPr>
-            <a:r>
-              <a:rPr sz="1700">
-                <a:solidFill>
-                  <a:srgbClr val="1F2A34"/>
-                </a:solidFill>
-                <a:latin typeface="Yu Gothic"/>
-              </a:rPr>
-              <a:t>Binary Precision 1.000 に対し、Binary Recall は 0.800</a:t>
-            </a:r>
-          </a:p>
-          <a:p>
-            <a:pPr algn="l">
-              <a:spcAft>
-                <a:spcPts val="700"/>
-              </a:spcAft>
-            </a:pPr>
-            <a:r>
-              <a:rPr sz="1700">
-                <a:solidFill>
-                  <a:srgbClr val="1F2A34"/>
-                </a:solidFill>
-                <a:latin typeface="Yu Gothic"/>
-              </a:rPr>
-              <a:t>つまり『誤り』を出したときの精度は高いが、まだ 20% ほど取りこぼしがある</a:t>
-            </a:r>
-          </a:p>
-        </p:txBody>
-      </p:sp>
-      <p:sp>
-        <p:nvSpPr>
-          <p:cNvPr id="9" name="TextBox 8"/>
+              <a:rPr sz="1200" b="1">
+                <a:solidFill>
+                  <a:srgbClr val="626B76"/>
+                </a:solidFill>
+                <a:latin typeface="Yu Gothic"/>
+              </a:rPr>
+              <a:t>evaluation_overview.png も同じ bundle に保存</a:t>
+            </a:r>
+          </a:p>
+        </p:txBody>
+      </p:sp>
+      <p:sp>
+        <p:nvSpPr>
+          <p:cNvPr id="24" name="TextBox 23"/>
           <p:cNvSpPr txBox="1"/>
           <p:nvPr/>
         </p:nvSpPr>
@@ -4003,7 +4567,7 @@
                 </a:solidFill>
                 <a:latin typeface="Yu Gothic"/>
               </a:rPr>
-              <a:t>図の説明: per_class_metrics.png</a:t>
+              <a:t>6. 今後さらに実施してみたいこと</a:t>
             </a:r>
           </a:p>
         </p:txBody>
@@ -4038,7 +4602,7 @@
                 </a:solidFill>
                 <a:latin typeface="Yu Gothic"/>
               </a:rPr>
-              <a:t>クラスごとに見ると、保留と不正確は強く、ほぼ正確の回収が弱い</a:t>
+              <a:t>最新評価を踏まえると、次の焦点はかなり明確になった</a:t>
             </a:r>
           </a:p>
         </p:txBody>
@@ -4086,40 +4650,16 @@
           </a:p>
         </p:txBody>
       </p:sp>
-      <p:pic>
-        <p:nvPicPr>
-          <p:cNvPr id="5" name="Picture 4" descr="per_class_metrics.png"/>
-          <p:cNvPicPr>
-            <a:picLocks noChangeAspect="1"/>
-          </p:cNvPicPr>
-          <p:nvPr/>
-        </p:nvPicPr>
-        <p:blipFill>
-          <a:blip r:embed="rId2"/>
-          <a:stretch>
-            <a:fillRect/>
-          </a:stretch>
-        </p:blipFill>
-        <p:spPr>
-          <a:xfrm>
-            <a:off x="658368" y="1997261"/>
-            <a:ext cx="6812280" cy="3668150"/>
-          </a:xfrm>
-          <a:prstGeom prst="rect">
-            <a:avLst/>
-          </a:prstGeom>
-        </p:spPr>
-      </p:pic>
-      <p:sp>
-        <p:nvSpPr>
-          <p:cNvPr id="6" name="Rounded Rectangle 5"/>
+      <p:sp>
+        <p:nvSpPr>
+          <p:cNvPr id="5" name="Rounded Rectangle 4"/>
           <p:cNvSpPr/>
           <p:nvPr/>
         </p:nvSpPr>
         <p:spPr>
           <a:xfrm>
-            <a:off x="7635240" y="1572768"/>
-            <a:ext cx="3611880" cy="4480560"/>
+            <a:off x="694944" y="1572768"/>
+            <a:ext cx="5321808" cy="4498848"/>
           </a:xfrm>
           <a:prstGeom prst="roundRect">
             <a:avLst/>
@@ -4157,13 +4697,58 @@
       </p:sp>
       <p:sp>
         <p:nvSpPr>
+          <p:cNvPr id="6" name="Rounded Rectangle 5"/>
+          <p:cNvSpPr/>
+          <p:nvPr/>
+        </p:nvSpPr>
+        <p:spPr>
+          <a:xfrm>
+            <a:off x="6236208" y="1572768"/>
+            <a:ext cx="5321808" cy="4498848"/>
+          </a:xfrm>
+          <a:prstGeom prst="roundRect">
+            <a:avLst/>
+          </a:prstGeom>
+          <a:solidFill>
+            <a:srgbClr val="EAF3F1"/>
+          </a:solidFill>
+          <a:ln w="14604">
+            <a:solidFill>
+              <a:srgbClr val="D9D3CA"/>
+            </a:solidFill>
+          </a:ln>
+        </p:spPr>
+        <p:style>
+          <a:lnRef idx="1">
+            <a:schemeClr val="accent1"/>
+          </a:lnRef>
+          <a:fillRef idx="3">
+            <a:schemeClr val="accent1"/>
+          </a:fillRef>
+          <a:effectRef idx="2">
+            <a:schemeClr val="accent1"/>
+          </a:effectRef>
+          <a:fontRef idx="minor">
+            <a:schemeClr val="lt1"/>
+          </a:fontRef>
+        </p:style>
+        <p:txBody>
+          <a:bodyPr rtlCol="0" anchor="ctr"/>
+          <a:lstStyle/>
+          <a:p>
+            <a:pPr algn="ctr"/>
+          </a:p>
+        </p:txBody>
+      </p:sp>
+      <p:sp>
+        <p:nvSpPr>
           <p:cNvPr id="7" name="TextBox 6"/>
           <p:cNvSpPr txBox="1"/>
           <p:nvPr/>
         </p:nvSpPr>
         <p:spPr>
           <a:xfrm>
-            <a:off x="7882127" y="1828800"/>
+            <a:off x="932688" y="1847088"/>
             <a:ext cx="2560320" cy="274320"/>
           </a:xfrm>
           <a:prstGeom prst="rect">
@@ -4179,13 +4764,13 @@
           <a:p>
             <a:pPr algn="l"/>
             <a:r>
-              <a:rPr sz="1900" b="1">
+              <a:rPr sz="2000" b="1">
                 <a:solidFill>
                   <a:srgbClr val="13767A"/>
                 </a:solidFill>
                 <a:latin typeface="Yu Gothic"/>
               </a:rPr>
-              <a:t>読み取りポイント</a:t>
+              <a:t>モデル改善</a:t>
             </a:r>
           </a:p>
         </p:txBody>
@@ -4198,8 +4783,8 @@
         </p:nvSpPr>
         <p:spPr>
           <a:xfrm>
-            <a:off x="7845552" y="2139696"/>
-            <a:ext cx="2926080" cy="2606040"/>
+            <a:off x="914400" y="2139696"/>
+            <a:ext cx="4617720" cy="3108960"/>
           </a:xfrm>
           <a:prstGeom prst="rect">
             <a:avLst/>
@@ -4224,7 +4809,7 @@
                 </a:solidFill>
                 <a:latin typeface="Yu Gothic"/>
               </a:rPr>
-              <a:t>判断保留は precision / recall / F1 がすべて 1.000</a:t>
+              <a:t>誤り -&gt; 不正確 の 4 件を優先して潰し、誤り recall をもう一段引き上げる</a:t>
             </a:r>
           </a:p>
           <a:p>
@@ -4240,7 +4825,7 @@
                 </a:solidFill>
                 <a:latin typeface="Yu Gothic"/>
               </a:rPr>
-              <a:t>不正確は recall 1.000 で安定している</a:t>
+              <a:t>ほぼ正確 -&gt; 正確 6 件、ほぼ正確 -&gt; 不正確 2 件を材料に、境界ルールを整理する</a:t>
             </a:r>
           </a:p>
           <a:p>
@@ -4256,9 +4841,67 @@
                 </a:solidFill>
                 <a:latin typeface="Yu Gothic"/>
               </a:rPr>
-              <a:t>ほぼ正確は recall 0.600 で、ここが現在の弱点</a:t>
-            </a:r>
-          </a:p>
+              <a:t>Ver4 を主軸に改善しつつ、安全な修正は Ver2 / Ver3 に追従させる</a:t>
+            </a:r>
+          </a:p>
+        </p:txBody>
+      </p:sp>
+      <p:sp>
+        <p:nvSpPr>
+          <p:cNvPr id="9" name="TextBox 8"/>
+          <p:cNvSpPr txBox="1"/>
+          <p:nvPr/>
+        </p:nvSpPr>
+        <p:spPr>
+          <a:xfrm>
+            <a:off x="6473952" y="1847088"/>
+            <a:ext cx="3291840" cy="274320"/>
+          </a:xfrm>
+          <a:prstGeom prst="rect">
+            <a:avLst/>
+          </a:prstGeom>
+          <a:noFill/>
+        </p:spPr>
+        <p:txBody>
+          <a:bodyPr wrap="square" lIns="25400" rIns="25400" tIns="12700" bIns="12700">
+            <a:spAutoFit/>
+          </a:bodyPr>
+          <a:lstStyle/>
+          <a:p>
+            <a:pPr algn="l"/>
+            <a:r>
+              <a:rPr sz="2000" b="1">
+                <a:solidFill>
+                  <a:srgbClr val="C96D31"/>
+                </a:solidFill>
+                <a:latin typeface="Yu Gothic"/>
+              </a:rPr>
+              <a:t>データと運用の拡張</a:t>
+            </a:r>
+          </a:p>
+        </p:txBody>
+      </p:sp>
+      <p:sp>
+        <p:nvSpPr>
+          <p:cNvPr id="10" name="TextBox 9"/>
+          <p:cNvSpPr txBox="1"/>
+          <p:nvPr/>
+        </p:nvSpPr>
+        <p:spPr>
+          <a:xfrm>
+            <a:off x="6446520" y="2139696"/>
+            <a:ext cx="4617720" cy="3108960"/>
+          </a:xfrm>
+          <a:prstGeom prst="rect">
+            <a:avLst/>
+          </a:prstGeom>
+          <a:noFill/>
+        </p:spPr>
+        <p:txBody>
+          <a:bodyPr wrap="square" lIns="50800" rIns="50800">
+            <a:spAutoFit/>
+          </a:bodyPr>
+          <a:lstStyle/>
           <a:p>
             <a:pPr algn="l">
               <a:spcAft>
@@ -4272,14 +4915,46 @@
                 </a:solidFill>
                 <a:latin typeface="Yu Gothic"/>
               </a:rPr>
-              <a:t>誤りは recall 0.800 まで改善したが、まだ上げたい</a:t>
-            </a:r>
-          </a:p>
-        </p:txBody>
-      </p:sp>
-      <p:sp>
-        <p:nvSpPr>
-          <p:cNvPr id="9" name="TextBox 8"/>
+              <a:t>CSV / XLSX を使って誤判定をケース単位で見直し、ルール修正の根拠を増やす</a:t>
+            </a:r>
+          </a:p>
+          <a:p>
+            <a:pPr algn="l">
+              <a:spcAft>
+                <a:spcPts val="700"/>
+              </a:spcAft>
+            </a:pPr>
+            <a:r>
+              <a:rPr sz="1700">
+                <a:solidFill>
+                  <a:srgbClr val="1F2A34"/>
+                </a:solidFill>
+                <a:latin typeface="Yu Gothic"/>
+              </a:rPr>
+              <a:t>時事性の高いケースや SNS 投稿に近いデータを追加し、実運用に近い評価へ広げる</a:t>
+            </a:r>
+          </a:p>
+          <a:p>
+            <a:pPr algn="l">
+              <a:spcAft>
+                <a:spcPts val="700"/>
+              </a:spcAft>
+            </a:pPr>
+            <a:r>
+              <a:rPr sz="1700">
+                <a:solidFill>
+                  <a:srgbClr val="1F2A34"/>
+                </a:solidFill>
+                <a:latin typeface="Yu Gothic"/>
+              </a:rPr>
+              <a:t>発表では『今できていること』と『まだできていないこと』を分けて伝える</a:t>
+            </a:r>
+          </a:p>
+        </p:txBody>
+      </p:sp>
+      <p:sp>
+        <p:nvSpPr>
+          <p:cNvPr id="11" name="TextBox 10"/>
           <p:cNvSpPr txBox="1"/>
           <p:nvPr/>
         </p:nvSpPr>
@@ -4368,7 +5043,7 @@
                 </a:solidFill>
                 <a:latin typeface="Yu Gothic"/>
               </a:rPr>
-              <a:t>図の説明: confusion_matrix.png</a:t>
+              <a:t>図の説明: summary_metrics.png</a:t>
             </a:r>
           </a:p>
         </p:txBody>
@@ -4403,7 +5078,7 @@
                 </a:solidFill>
                 <a:latin typeface="Yu Gothic"/>
               </a:rPr>
-              <a:t>どのラベルへ流れているかを見ると、今の残課題がはっきり見える</a:t>
+              <a:t>全体指標はかなり改善したが、誤り recall にはまだ伸びしろがある</a:t>
             </a:r>
           </a:p>
         </p:txBody>
@@ -4453,7 +5128,7 @@
       </p:sp>
       <p:pic>
         <p:nvPicPr>
-          <p:cNvPr id="5" name="Picture 4" descr="confusion_matrix.png"/>
+          <p:cNvPr id="5" name="Picture 4" descr="summary_metrics.png"/>
           <p:cNvPicPr>
             <a:picLocks noChangeAspect="1"/>
           </p:cNvPicPr>
@@ -4467,8 +5142,8 @@
         </p:blipFill>
         <p:spPr>
           <a:xfrm>
-            <a:off x="857083" y="1536192"/>
-            <a:ext cx="5820490" cy="4572000"/>
+            <a:off x="713232" y="1706026"/>
+            <a:ext cx="6400800" cy="4232332"/>
           </a:xfrm>
           <a:prstGeom prst="rect">
             <a:avLst/>
@@ -4483,14 +5158,14 @@
         </p:nvSpPr>
         <p:spPr>
           <a:xfrm>
-            <a:off x="7132320" y="1572768"/>
-            <a:ext cx="4114800" cy="4480560"/>
+            <a:off x="7333488" y="1572768"/>
+            <a:ext cx="3913632" cy="4480560"/>
           </a:xfrm>
           <a:prstGeom prst="roundRect">
             <a:avLst/>
           </a:prstGeom>
           <a:solidFill>
-            <a:srgbClr val="EAF3F1"/>
+            <a:srgbClr val="F3EEE5"/>
           </a:solidFill>
           <a:ln w="14604">
             <a:solidFill>
@@ -4528,8 +5203,8 @@
         </p:nvSpPr>
         <p:spPr>
           <a:xfrm>
-            <a:off x="7360920" y="1828800"/>
-            <a:ext cx="2834640" cy="274320"/>
+            <a:off x="7571231" y="1828800"/>
+            <a:ext cx="2560320" cy="274320"/>
           </a:xfrm>
           <a:prstGeom prst="rect">
             <a:avLst/>
@@ -4563,8 +5238,8 @@
         </p:nvSpPr>
         <p:spPr>
           <a:xfrm>
-            <a:off x="7315200" y="2139696"/>
-            <a:ext cx="3429000" cy="2606040"/>
+            <a:off x="7516368" y="2139696"/>
+            <a:ext cx="3291840" cy="2560320"/>
           </a:xfrm>
           <a:prstGeom prst="rect">
             <a:avLst/>
@@ -4589,7 +5264,7 @@
                 </a:solidFill>
                 <a:latin typeface="Yu Gothic"/>
               </a:rPr>
-              <a:t>正確 20 件のうち 16 件は正解、4 件は ほぼ正確 に落ちた</a:t>
+              <a:t>Accuracy は 0.840、Macro F1 は 0.837 まで改善</a:t>
             </a:r>
           </a:p>
           <a:p>
@@ -4605,7 +5280,7 @@
                 </a:solidFill>
                 <a:latin typeface="Yu Gothic"/>
               </a:rPr>
-              <a:t>ほぼ正確 20 件のうち 6 件が 正確、2 件が 不正確 に流れた</a:t>
+              <a:t>Weighted F1 も 0.837 で、全体として安定してきた</a:t>
             </a:r>
           </a:p>
           <a:p>
@@ -4621,7 +5296,7 @@
                 </a:solidFill>
                 <a:latin typeface="Yu Gothic"/>
               </a:rPr>
-              <a:t>誤り 20 件のうち 16 件は正解、4 件は 不正確 に落ちた</a:t>
+              <a:t>Binary Precision 1.000 に対し、Binary Recall は 0.800</a:t>
             </a:r>
           </a:p>
           <a:p>
@@ -4637,7 +5312,7 @@
                 </a:solidFill>
                 <a:latin typeface="Yu Gothic"/>
               </a:rPr>
-              <a:t>改善の中心は『ほぼ正確』境界と『誤り』の押し切りであることが分かる</a:t>
+              <a:t>つまり『誤り』を出したときの精度は高いが、まだ 20% ほど取りこぼしがある</a:t>
             </a:r>
           </a:p>
         </p:txBody>
@@ -4733,7 +5408,7 @@
                 </a:solidFill>
                 <a:latin typeface="Yu Gothic"/>
               </a:rPr>
-              <a:t>図の説明: evaluation_overview.png</a:t>
+              <a:t>図の説明: per_class_metrics.png</a:t>
             </a:r>
           </a:p>
         </p:txBody>
@@ -4768,7 +5443,7 @@
                 </a:solidFill>
                 <a:latin typeface="Yu Gothic"/>
               </a:rPr>
-              <a:t>集計サマリーからも、かなり改善したことと残課題が同時に確認できる</a:t>
+              <a:t>クラスごとに見ると、保留と不正確は強く、ほぼ正確の回収が弱い</a:t>
             </a:r>
           </a:p>
         </p:txBody>
@@ -4818,7 +5493,7 @@
       </p:sp>
       <p:pic>
         <p:nvPicPr>
-          <p:cNvPr id="5" name="Picture 4" descr="evaluation_overview.png"/>
+          <p:cNvPr id="5" name="Picture 4" descr="per_class_metrics.png"/>
           <p:cNvPicPr>
             <a:picLocks noChangeAspect="1"/>
           </p:cNvPicPr>
@@ -4832,8 +5507,8 @@
         </p:blipFill>
         <p:spPr>
           <a:xfrm>
-            <a:off x="1452597" y="1508760"/>
-            <a:ext cx="3678485" cy="4526280"/>
+            <a:off x="658368" y="1997261"/>
+            <a:ext cx="6812280" cy="3668150"/>
           </a:xfrm>
           <a:prstGeom prst="rect">
             <a:avLst/>
@@ -4848,14 +5523,14 @@
         </p:nvSpPr>
         <p:spPr>
           <a:xfrm>
-            <a:off x="5806440" y="1572768"/>
-            <a:ext cx="5440680" cy="4480560"/>
+            <a:off x="7635240" y="1572768"/>
+            <a:ext cx="3611880" cy="4480560"/>
           </a:xfrm>
           <a:prstGeom prst="roundRect">
             <a:avLst/>
           </a:prstGeom>
           <a:solidFill>
-            <a:srgbClr val="F3EEE5"/>
+            <a:srgbClr val="FFFFFF"/>
           </a:solidFill>
           <a:ln w="14604">
             <a:solidFill>
@@ -4893,8 +5568,8 @@
         </p:nvSpPr>
         <p:spPr>
           <a:xfrm>
-            <a:off x="6080760" y="1828800"/>
-            <a:ext cx="2743200" cy="274320"/>
+            <a:off x="7882127" y="1828800"/>
+            <a:ext cx="2560320" cy="274320"/>
           </a:xfrm>
           <a:prstGeom prst="rect">
             <a:avLst/>
@@ -4928,8 +5603,8 @@
         </p:nvSpPr>
         <p:spPr>
           <a:xfrm>
-            <a:off x="6035040" y="2139696"/>
-            <a:ext cx="4709160" cy="2514600"/>
+            <a:off x="7845552" y="2139696"/>
+            <a:ext cx="2926080" cy="2606040"/>
           </a:xfrm>
           <a:prstGeom prst="rect">
             <a:avLst/>
@@ -4954,7 +5629,7 @@
                 </a:solidFill>
                 <a:latin typeface="Yu Gothic"/>
               </a:rPr>
-              <a:t>sample_count は 100、全件処理できており skipped は 0</a:t>
+              <a:t>判断保留は precision / recall / F1 がすべて 1.000</a:t>
             </a:r>
           </a:p>
           <a:p>
@@ -4970,7 +5645,7 @@
                 </a:solidFill>
                 <a:latin typeface="Yu Gothic"/>
               </a:rPr>
-              <a:t>mismatches は 16 件で、初期版 63 件から大幅に減少した</a:t>
+              <a:t>不正確は recall 1.000 で安定している</a:t>
             </a:r>
           </a:p>
           <a:p>
@@ -4986,7 +5661,7 @@
                 </a:solidFill>
                 <a:latin typeface="Yu Gothic"/>
               </a:rPr>
-              <a:t>Macro Avg precision 0.849 / recall 0.840 / f1 0.837</a:t>
+              <a:t>ほぼ正確は recall 0.600 で、ここが現在の弱点</a:t>
             </a:r>
           </a:p>
           <a:p>
@@ -5002,7 +5677,7 @@
                 </a:solidFill>
                 <a:latin typeface="Yu Gothic"/>
               </a:rPr>
-              <a:t>総合性能はかなり伸びたが、mismatch 16 件をどう詰めるかが次のテーマになる</a:t>
+              <a:t>誤りは recall 0.800 まで改善したが、まだ上げたい</a:t>
             </a:r>
           </a:p>
         </p:txBody>
@@ -5098,7 +5773,7 @@
                 </a:solidFill>
                 <a:latin typeface="Yu Gothic"/>
               </a:rPr>
-              <a:t>参考資料: confusion_matrix.png</a:t>
+              <a:t>図の説明: confusion_matrix.png</a:t>
             </a:r>
           </a:p>
         </p:txBody>
@@ -5133,7 +5808,7 @@
                 </a:solidFill>
                 <a:latin typeface="Yu Gothic"/>
               </a:rPr>
-              <a:t>Ver2 / evaluation_outputs/20260411-0509/plots</a:t>
+              <a:t>どのラベルへ流れているかを見ると、今の残課題がはっきり見える</a:t>
             </a:r>
           </a:p>
         </p:txBody>
@@ -5197,8 +5872,8 @@
         </p:blipFill>
         <p:spPr>
           <a:xfrm>
-            <a:off x="2950180" y="1371600"/>
-            <a:ext cx="6169720" cy="4846320"/>
+            <a:off x="857083" y="1536192"/>
+            <a:ext cx="5820490" cy="4572000"/>
           </a:xfrm>
           <a:prstGeom prst="rect">
             <a:avLst/>
@@ -5207,7 +5882,174 @@
       </p:pic>
       <p:sp>
         <p:nvSpPr>
-          <p:cNvPr id="6" name="TextBox 5"/>
+          <p:cNvPr id="6" name="Rounded Rectangle 5"/>
+          <p:cNvSpPr/>
+          <p:nvPr/>
+        </p:nvSpPr>
+        <p:spPr>
+          <a:xfrm>
+            <a:off x="7132320" y="1572768"/>
+            <a:ext cx="4114800" cy="4480560"/>
+          </a:xfrm>
+          <a:prstGeom prst="roundRect">
+            <a:avLst/>
+          </a:prstGeom>
+          <a:solidFill>
+            <a:srgbClr val="EAF3F1"/>
+          </a:solidFill>
+          <a:ln w="14604">
+            <a:solidFill>
+              <a:srgbClr val="D9D3CA"/>
+            </a:solidFill>
+          </a:ln>
+        </p:spPr>
+        <p:style>
+          <a:lnRef idx="1">
+            <a:schemeClr val="accent1"/>
+          </a:lnRef>
+          <a:fillRef idx="3">
+            <a:schemeClr val="accent1"/>
+          </a:fillRef>
+          <a:effectRef idx="2">
+            <a:schemeClr val="accent1"/>
+          </a:effectRef>
+          <a:fontRef idx="minor">
+            <a:schemeClr val="lt1"/>
+          </a:fontRef>
+        </p:style>
+        <p:txBody>
+          <a:bodyPr rtlCol="0" anchor="ctr"/>
+          <a:lstStyle/>
+          <a:p>
+            <a:pPr algn="ctr"/>
+          </a:p>
+        </p:txBody>
+      </p:sp>
+      <p:sp>
+        <p:nvSpPr>
+          <p:cNvPr id="7" name="TextBox 6"/>
+          <p:cNvSpPr txBox="1"/>
+          <p:nvPr/>
+        </p:nvSpPr>
+        <p:spPr>
+          <a:xfrm>
+            <a:off x="7360920" y="1828800"/>
+            <a:ext cx="2834640" cy="274320"/>
+          </a:xfrm>
+          <a:prstGeom prst="rect">
+            <a:avLst/>
+          </a:prstGeom>
+          <a:noFill/>
+        </p:spPr>
+        <p:txBody>
+          <a:bodyPr wrap="square" lIns="25400" rIns="25400" tIns="12700" bIns="12700">
+            <a:spAutoFit/>
+          </a:bodyPr>
+          <a:lstStyle/>
+          <a:p>
+            <a:pPr algn="l"/>
+            <a:r>
+              <a:rPr sz="1900" b="1">
+                <a:solidFill>
+                  <a:srgbClr val="13767A"/>
+                </a:solidFill>
+                <a:latin typeface="Yu Gothic"/>
+              </a:rPr>
+              <a:t>読み取りポイント</a:t>
+            </a:r>
+          </a:p>
+        </p:txBody>
+      </p:sp>
+      <p:sp>
+        <p:nvSpPr>
+          <p:cNvPr id="8" name="TextBox 7"/>
+          <p:cNvSpPr txBox="1"/>
+          <p:nvPr/>
+        </p:nvSpPr>
+        <p:spPr>
+          <a:xfrm>
+            <a:off x="7315200" y="2139696"/>
+            <a:ext cx="3429000" cy="2606040"/>
+          </a:xfrm>
+          <a:prstGeom prst="rect">
+            <a:avLst/>
+          </a:prstGeom>
+          <a:noFill/>
+        </p:spPr>
+        <p:txBody>
+          <a:bodyPr wrap="square" lIns="50800" rIns="50800">
+            <a:spAutoFit/>
+          </a:bodyPr>
+          <a:lstStyle/>
+          <a:p>
+            <a:pPr algn="l">
+              <a:spcAft>
+                <a:spcPts val="700"/>
+              </a:spcAft>
+            </a:pPr>
+            <a:r>
+              <a:rPr sz="1700">
+                <a:solidFill>
+                  <a:srgbClr val="1F2A34"/>
+                </a:solidFill>
+                <a:latin typeface="Yu Gothic"/>
+              </a:rPr>
+              <a:t>正確 20 件のうち 16 件は正解、4 件は ほぼ正確 に落ちた</a:t>
+            </a:r>
+          </a:p>
+          <a:p>
+            <a:pPr algn="l">
+              <a:spcAft>
+                <a:spcPts val="700"/>
+              </a:spcAft>
+            </a:pPr>
+            <a:r>
+              <a:rPr sz="1700">
+                <a:solidFill>
+                  <a:srgbClr val="1F2A34"/>
+                </a:solidFill>
+                <a:latin typeface="Yu Gothic"/>
+              </a:rPr>
+              <a:t>ほぼ正確 20 件のうち 6 件が 正確、2 件が 不正確 に流れた</a:t>
+            </a:r>
+          </a:p>
+          <a:p>
+            <a:pPr algn="l">
+              <a:spcAft>
+                <a:spcPts val="700"/>
+              </a:spcAft>
+            </a:pPr>
+            <a:r>
+              <a:rPr sz="1700">
+                <a:solidFill>
+                  <a:srgbClr val="1F2A34"/>
+                </a:solidFill>
+                <a:latin typeface="Yu Gothic"/>
+              </a:rPr>
+              <a:t>誤り 20 件のうち 16 件は正解、4 件は 不正確 に落ちた</a:t>
+            </a:r>
+          </a:p>
+          <a:p>
+            <a:pPr algn="l">
+              <a:spcAft>
+                <a:spcPts val="700"/>
+              </a:spcAft>
+            </a:pPr>
+            <a:r>
+              <a:rPr sz="1700">
+                <a:solidFill>
+                  <a:srgbClr val="1F2A34"/>
+                </a:solidFill>
+                <a:latin typeface="Yu Gothic"/>
+              </a:rPr>
+              <a:t>改善の中心は『ほぼ正確』境界と『誤り』の押し切りであることが分かる</a:t>
+            </a:r>
+          </a:p>
+        </p:txBody>
+      </p:sp>
+      <p:sp>
+        <p:nvSpPr>
+          <p:cNvPr id="9" name="TextBox 8"/>
           <p:cNvSpPr txBox="1"/>
           <p:nvPr/>
         </p:nvSpPr>
@@ -5296,7 +6138,7 @@
                 </a:solidFill>
                 <a:latin typeface="Yu Gothic"/>
               </a:rPr>
-              <a:t>参考資料: evaluation_overview.png</a:t>
+              <a:t>図の説明: evaluation_overview.png</a:t>
             </a:r>
           </a:p>
         </p:txBody>
@@ -5331,7 +6173,7 @@
                 </a:solidFill>
                 <a:latin typeface="Yu Gothic"/>
               </a:rPr>
-              <a:t>Ver2 / evaluation_outputs/20260411-0509/plots</a:t>
+              <a:t>集計サマリーからも、かなり改善したことと残課題が同時に確認できる</a:t>
             </a:r>
           </a:p>
         </p:txBody>
@@ -5395,8 +6237,8 @@
         </p:blipFill>
         <p:spPr>
           <a:xfrm>
-            <a:off x="4010015" y="1325880"/>
-            <a:ext cx="4050049" cy="4983480"/>
+            <a:off x="1452597" y="1508760"/>
+            <a:ext cx="3678485" cy="4526280"/>
           </a:xfrm>
           <a:prstGeom prst="rect">
             <a:avLst/>
@@ -5405,7 +6247,174 @@
       </p:pic>
       <p:sp>
         <p:nvSpPr>
-          <p:cNvPr id="6" name="TextBox 5"/>
+          <p:cNvPr id="6" name="Rounded Rectangle 5"/>
+          <p:cNvSpPr/>
+          <p:nvPr/>
+        </p:nvSpPr>
+        <p:spPr>
+          <a:xfrm>
+            <a:off x="5806440" y="1572768"/>
+            <a:ext cx="5440680" cy="4480560"/>
+          </a:xfrm>
+          <a:prstGeom prst="roundRect">
+            <a:avLst/>
+          </a:prstGeom>
+          <a:solidFill>
+            <a:srgbClr val="F3EEE5"/>
+          </a:solidFill>
+          <a:ln w="14604">
+            <a:solidFill>
+              <a:srgbClr val="D9D3CA"/>
+            </a:solidFill>
+          </a:ln>
+        </p:spPr>
+        <p:style>
+          <a:lnRef idx="1">
+            <a:schemeClr val="accent1"/>
+          </a:lnRef>
+          <a:fillRef idx="3">
+            <a:schemeClr val="accent1"/>
+          </a:fillRef>
+          <a:effectRef idx="2">
+            <a:schemeClr val="accent1"/>
+          </a:effectRef>
+          <a:fontRef idx="minor">
+            <a:schemeClr val="lt1"/>
+          </a:fontRef>
+        </p:style>
+        <p:txBody>
+          <a:bodyPr rtlCol="0" anchor="ctr"/>
+          <a:lstStyle/>
+          <a:p>
+            <a:pPr algn="ctr"/>
+          </a:p>
+        </p:txBody>
+      </p:sp>
+      <p:sp>
+        <p:nvSpPr>
+          <p:cNvPr id="7" name="TextBox 6"/>
+          <p:cNvSpPr txBox="1"/>
+          <p:nvPr/>
+        </p:nvSpPr>
+        <p:spPr>
+          <a:xfrm>
+            <a:off x="6080760" y="1828800"/>
+            <a:ext cx="2743200" cy="274320"/>
+          </a:xfrm>
+          <a:prstGeom prst="rect">
+            <a:avLst/>
+          </a:prstGeom>
+          <a:noFill/>
+        </p:spPr>
+        <p:txBody>
+          <a:bodyPr wrap="square" lIns="25400" rIns="25400" tIns="12700" bIns="12700">
+            <a:spAutoFit/>
+          </a:bodyPr>
+          <a:lstStyle/>
+          <a:p>
+            <a:pPr algn="l"/>
+            <a:r>
+              <a:rPr sz="1900" b="1">
+                <a:solidFill>
+                  <a:srgbClr val="13767A"/>
+                </a:solidFill>
+                <a:latin typeface="Yu Gothic"/>
+              </a:rPr>
+              <a:t>読み取りポイント</a:t>
+            </a:r>
+          </a:p>
+        </p:txBody>
+      </p:sp>
+      <p:sp>
+        <p:nvSpPr>
+          <p:cNvPr id="8" name="TextBox 7"/>
+          <p:cNvSpPr txBox="1"/>
+          <p:nvPr/>
+        </p:nvSpPr>
+        <p:spPr>
+          <a:xfrm>
+            <a:off x="6035040" y="2139696"/>
+            <a:ext cx="4709160" cy="2514600"/>
+          </a:xfrm>
+          <a:prstGeom prst="rect">
+            <a:avLst/>
+          </a:prstGeom>
+          <a:noFill/>
+        </p:spPr>
+        <p:txBody>
+          <a:bodyPr wrap="square" lIns="50800" rIns="50800">
+            <a:spAutoFit/>
+          </a:bodyPr>
+          <a:lstStyle/>
+          <a:p>
+            <a:pPr algn="l">
+              <a:spcAft>
+                <a:spcPts val="700"/>
+              </a:spcAft>
+            </a:pPr>
+            <a:r>
+              <a:rPr sz="1700">
+                <a:solidFill>
+                  <a:srgbClr val="1F2A34"/>
+                </a:solidFill>
+                <a:latin typeface="Yu Gothic"/>
+              </a:rPr>
+              <a:t>sample_count は 100、全件処理できており skipped は 0</a:t>
+            </a:r>
+          </a:p>
+          <a:p>
+            <a:pPr algn="l">
+              <a:spcAft>
+                <a:spcPts val="700"/>
+              </a:spcAft>
+            </a:pPr>
+            <a:r>
+              <a:rPr sz="1700">
+                <a:solidFill>
+                  <a:srgbClr val="1F2A34"/>
+                </a:solidFill>
+                <a:latin typeface="Yu Gothic"/>
+              </a:rPr>
+              <a:t>mismatches は 16 件で、初期版 63 件から大幅に減少した</a:t>
+            </a:r>
+          </a:p>
+          <a:p>
+            <a:pPr algn="l">
+              <a:spcAft>
+                <a:spcPts val="700"/>
+              </a:spcAft>
+            </a:pPr>
+            <a:r>
+              <a:rPr sz="1700">
+                <a:solidFill>
+                  <a:srgbClr val="1F2A34"/>
+                </a:solidFill>
+                <a:latin typeface="Yu Gothic"/>
+              </a:rPr>
+              <a:t>Macro Avg precision 0.849 / recall 0.840 / f1 0.837</a:t>
+            </a:r>
+          </a:p>
+          <a:p>
+            <a:pPr algn="l">
+              <a:spcAft>
+                <a:spcPts val="700"/>
+              </a:spcAft>
+            </a:pPr>
+            <a:r>
+              <a:rPr sz="1700">
+                <a:solidFill>
+                  <a:srgbClr val="1F2A34"/>
+                </a:solidFill>
+                <a:latin typeface="Yu Gothic"/>
+              </a:rPr>
+              <a:t>総合性能はかなり伸びたが、mismatch 16 件をどう詰めるかが次のテーマになる</a:t>
+            </a:r>
+          </a:p>
+        </p:txBody>
+      </p:sp>
+      <p:sp>
+        <p:nvSpPr>
+          <p:cNvPr id="9" name="TextBox 8"/>
           <p:cNvSpPr txBox="1"/>
           <p:nvPr/>
         </p:nvSpPr>
@@ -5494,7 +6503,7 @@
                 </a:solidFill>
                 <a:latin typeface="Yu Gothic"/>
               </a:rPr>
-              <a:t>参考資料: per_class_metrics.png</a:t>
+              <a:t>参考資料: confusion_matrix.png</a:t>
             </a:r>
           </a:p>
         </p:txBody>
@@ -5579,7 +6588,7 @@
       </p:sp>
       <p:pic>
         <p:nvPicPr>
-          <p:cNvPr id="5" name="Picture 4" descr="per_class_metrics.png"/>
+          <p:cNvPr id="5" name="Picture 4" descr="confusion_matrix.png"/>
           <p:cNvPicPr>
             <a:picLocks noChangeAspect="1"/>
           </p:cNvPicPr>
@@ -5593,8 +6602,8 @@
         </p:blipFill>
         <p:spPr>
           <a:xfrm>
-            <a:off x="1570155" y="1408176"/>
-            <a:ext cx="9085217" cy="4892040"/>
+            <a:off x="2950180" y="1371600"/>
+            <a:ext cx="6169720" cy="4846320"/>
           </a:xfrm>
           <a:prstGeom prst="rect">
             <a:avLst/>
@@ -5692,6 +6701,402 @@
                 </a:solidFill>
                 <a:latin typeface="Yu Gothic"/>
               </a:rPr>
+              <a:t>参考資料: evaluation_overview.png</a:t>
+            </a:r>
+          </a:p>
+        </p:txBody>
+      </p:sp>
+      <p:sp>
+        <p:nvSpPr>
+          <p:cNvPr id="3" name="TextBox 2"/>
+          <p:cNvSpPr txBox="1"/>
+          <p:nvPr/>
+        </p:nvSpPr>
+        <p:spPr>
+          <a:xfrm>
+            <a:off x="585216" y="795528"/>
+            <a:ext cx="8961120" cy="292608"/>
+          </a:xfrm>
+          <a:prstGeom prst="rect">
+            <a:avLst/>
+          </a:prstGeom>
+          <a:noFill/>
+        </p:spPr>
+        <p:txBody>
+          <a:bodyPr wrap="square" lIns="25400" rIns="25400" tIns="12700" bIns="12700">
+            <a:spAutoFit/>
+          </a:bodyPr>
+          <a:lstStyle/>
+          <a:p>
+            <a:pPr algn="l"/>
+            <a:r>
+              <a:rPr sz="1100" b="0">
+                <a:solidFill>
+                  <a:srgbClr val="626B76"/>
+                </a:solidFill>
+                <a:latin typeface="Yu Gothic"/>
+              </a:rPr>
+              <a:t>Ver2 / evaluation_outputs/20260411-0509/plots</a:t>
+            </a:r>
+          </a:p>
+        </p:txBody>
+      </p:sp>
+      <p:sp>
+        <p:nvSpPr>
+          <p:cNvPr id="4" name="Rectangle 3"/>
+          <p:cNvSpPr/>
+          <p:nvPr/>
+        </p:nvSpPr>
+        <p:spPr>
+          <a:xfrm>
+            <a:off x="576072" y="1051560"/>
+            <a:ext cx="1463040" cy="64008"/>
+          </a:xfrm>
+          <a:prstGeom prst="rect">
+            <a:avLst/>
+          </a:prstGeom>
+          <a:solidFill>
+            <a:srgbClr val="13767A"/>
+          </a:solidFill>
+          <a:ln>
+            <a:noFill/>
+          </a:ln>
+        </p:spPr>
+        <p:style>
+          <a:lnRef idx="1">
+            <a:schemeClr val="accent1"/>
+          </a:lnRef>
+          <a:fillRef idx="3">
+            <a:schemeClr val="accent1"/>
+          </a:fillRef>
+          <a:effectRef idx="2">
+            <a:schemeClr val="accent1"/>
+          </a:effectRef>
+          <a:fontRef idx="minor">
+            <a:schemeClr val="lt1"/>
+          </a:fontRef>
+        </p:style>
+        <p:txBody>
+          <a:bodyPr rtlCol="0" anchor="ctr"/>
+          <a:lstStyle/>
+          <a:p>
+            <a:pPr algn="ctr"/>
+          </a:p>
+        </p:txBody>
+      </p:sp>
+      <p:pic>
+        <p:nvPicPr>
+          <p:cNvPr id="5" name="Picture 4" descr="evaluation_overview.png"/>
+          <p:cNvPicPr>
+            <a:picLocks noChangeAspect="1"/>
+          </p:cNvPicPr>
+          <p:nvPr/>
+        </p:nvPicPr>
+        <p:blipFill>
+          <a:blip r:embed="rId2"/>
+          <a:stretch>
+            <a:fillRect/>
+          </a:stretch>
+        </p:blipFill>
+        <p:spPr>
+          <a:xfrm>
+            <a:off x="4010015" y="1325880"/>
+            <a:ext cx="4050049" cy="4983480"/>
+          </a:xfrm>
+          <a:prstGeom prst="rect">
+            <a:avLst/>
+          </a:prstGeom>
+        </p:spPr>
+      </p:pic>
+      <p:sp>
+        <p:nvSpPr>
+          <p:cNvPr id="6" name="TextBox 5"/>
+          <p:cNvSpPr txBox="1"/>
+          <p:nvPr/>
+        </p:nvSpPr>
+        <p:spPr>
+          <a:xfrm>
+            <a:off x="594360" y="6428232"/>
+            <a:ext cx="10972800" cy="182880"/>
+          </a:xfrm>
+          <a:prstGeom prst="rect">
+            <a:avLst/>
+          </a:prstGeom>
+          <a:noFill/>
+        </p:spPr>
+        <p:txBody>
+          <a:bodyPr wrap="square" lIns="25400" rIns="25400" tIns="12700" bIns="12700">
+            <a:spAutoFit/>
+          </a:bodyPr>
+          <a:lstStyle/>
+          <a:p>
+            <a:pPr algn="r"/>
+            <a:r>
+              <a:rPr sz="900" b="0">
+                <a:solidFill>
+                  <a:srgbClr val="626B76"/>
+                </a:solidFill>
+                <a:latin typeface="Yu Gothic"/>
+              </a:rPr>
+              <a:t>Fake News Checker | 2026-04-11 最新評価を本編へ統合</a:t>
+            </a:r>
+          </a:p>
+        </p:txBody>
+      </p:sp>
+    </p:spTree>
+  </p:cSld>
+  <p:clrMapOvr>
+    <a:masterClrMapping/>
+  </p:clrMapOvr>
+</p:sld>
+</file>
+
+<file path=ppt/slides/slide18.xml><?xml version="1.0" encoding="utf-8"?>
+<p:sld xmlns:a="http://schemas.openxmlformats.org/drawingml/2006/main" xmlns:p="http://schemas.openxmlformats.org/presentationml/2006/main" xmlns:r="http://schemas.openxmlformats.org/officeDocument/2006/relationships">
+  <p:cSld>
+    <p:bg>
+      <p:bgPr>
+        <a:solidFill>
+          <a:srgbClr val="F7F4EE"/>
+        </a:solidFill>
+        <a:effectLst/>
+      </p:bgPr>
+    </p:bg>
+    <p:spTree>
+      <p:nvGrpSpPr>
+        <p:cNvPr id="1" name=""/>
+        <p:cNvGrpSpPr/>
+        <p:nvPr/>
+      </p:nvGrpSpPr>
+      <p:grpSpPr/>
+      <p:sp>
+        <p:nvSpPr>
+          <p:cNvPr id="2" name="TextBox 1"/>
+          <p:cNvSpPr txBox="1"/>
+          <p:nvPr/>
+        </p:nvSpPr>
+        <p:spPr>
+          <a:xfrm>
+            <a:off x="566928" y="320040"/>
+            <a:ext cx="8412480" cy="438912"/>
+          </a:xfrm>
+          <a:prstGeom prst="rect">
+            <a:avLst/>
+          </a:prstGeom>
+          <a:noFill/>
+        </p:spPr>
+        <p:txBody>
+          <a:bodyPr wrap="square" lIns="25400" rIns="25400" tIns="12700" bIns="12700">
+            <a:spAutoFit/>
+          </a:bodyPr>
+          <a:lstStyle/>
+          <a:p>
+            <a:pPr algn="l"/>
+            <a:r>
+              <a:rPr sz="2600" b="1">
+                <a:solidFill>
+                  <a:srgbClr val="1F2A34"/>
+                </a:solidFill>
+                <a:latin typeface="Yu Gothic"/>
+              </a:rPr>
+              <a:t>参考資料: per_class_metrics.png</a:t>
+            </a:r>
+          </a:p>
+        </p:txBody>
+      </p:sp>
+      <p:sp>
+        <p:nvSpPr>
+          <p:cNvPr id="3" name="TextBox 2"/>
+          <p:cNvSpPr txBox="1"/>
+          <p:nvPr/>
+        </p:nvSpPr>
+        <p:spPr>
+          <a:xfrm>
+            <a:off x="585216" y="795528"/>
+            <a:ext cx="8961120" cy="292608"/>
+          </a:xfrm>
+          <a:prstGeom prst="rect">
+            <a:avLst/>
+          </a:prstGeom>
+          <a:noFill/>
+        </p:spPr>
+        <p:txBody>
+          <a:bodyPr wrap="square" lIns="25400" rIns="25400" tIns="12700" bIns="12700">
+            <a:spAutoFit/>
+          </a:bodyPr>
+          <a:lstStyle/>
+          <a:p>
+            <a:pPr algn="l"/>
+            <a:r>
+              <a:rPr sz="1100" b="0">
+                <a:solidFill>
+                  <a:srgbClr val="626B76"/>
+                </a:solidFill>
+                <a:latin typeface="Yu Gothic"/>
+              </a:rPr>
+              <a:t>Ver2 / evaluation_outputs/20260411-0509/plots</a:t>
+            </a:r>
+          </a:p>
+        </p:txBody>
+      </p:sp>
+      <p:sp>
+        <p:nvSpPr>
+          <p:cNvPr id="4" name="Rectangle 3"/>
+          <p:cNvSpPr/>
+          <p:nvPr/>
+        </p:nvSpPr>
+        <p:spPr>
+          <a:xfrm>
+            <a:off x="576072" y="1051560"/>
+            <a:ext cx="1463040" cy="64008"/>
+          </a:xfrm>
+          <a:prstGeom prst="rect">
+            <a:avLst/>
+          </a:prstGeom>
+          <a:solidFill>
+            <a:srgbClr val="13767A"/>
+          </a:solidFill>
+          <a:ln>
+            <a:noFill/>
+          </a:ln>
+        </p:spPr>
+        <p:style>
+          <a:lnRef idx="1">
+            <a:schemeClr val="accent1"/>
+          </a:lnRef>
+          <a:fillRef idx="3">
+            <a:schemeClr val="accent1"/>
+          </a:fillRef>
+          <a:effectRef idx="2">
+            <a:schemeClr val="accent1"/>
+          </a:effectRef>
+          <a:fontRef idx="minor">
+            <a:schemeClr val="lt1"/>
+          </a:fontRef>
+        </p:style>
+        <p:txBody>
+          <a:bodyPr rtlCol="0" anchor="ctr"/>
+          <a:lstStyle/>
+          <a:p>
+            <a:pPr algn="ctr"/>
+          </a:p>
+        </p:txBody>
+      </p:sp>
+      <p:pic>
+        <p:nvPicPr>
+          <p:cNvPr id="5" name="Picture 4" descr="per_class_metrics.png"/>
+          <p:cNvPicPr>
+            <a:picLocks noChangeAspect="1"/>
+          </p:cNvPicPr>
+          <p:nvPr/>
+        </p:nvPicPr>
+        <p:blipFill>
+          <a:blip r:embed="rId2"/>
+          <a:stretch>
+            <a:fillRect/>
+          </a:stretch>
+        </p:blipFill>
+        <p:spPr>
+          <a:xfrm>
+            <a:off x="1570155" y="1408176"/>
+            <a:ext cx="9085217" cy="4892040"/>
+          </a:xfrm>
+          <a:prstGeom prst="rect">
+            <a:avLst/>
+          </a:prstGeom>
+        </p:spPr>
+      </p:pic>
+      <p:sp>
+        <p:nvSpPr>
+          <p:cNvPr id="6" name="TextBox 5"/>
+          <p:cNvSpPr txBox="1"/>
+          <p:nvPr/>
+        </p:nvSpPr>
+        <p:spPr>
+          <a:xfrm>
+            <a:off x="594360" y="6428232"/>
+            <a:ext cx="10972800" cy="182880"/>
+          </a:xfrm>
+          <a:prstGeom prst="rect">
+            <a:avLst/>
+          </a:prstGeom>
+          <a:noFill/>
+        </p:spPr>
+        <p:txBody>
+          <a:bodyPr wrap="square" lIns="25400" rIns="25400" tIns="12700" bIns="12700">
+            <a:spAutoFit/>
+          </a:bodyPr>
+          <a:lstStyle/>
+          <a:p>
+            <a:pPr algn="r"/>
+            <a:r>
+              <a:rPr sz="900" b="0">
+                <a:solidFill>
+                  <a:srgbClr val="626B76"/>
+                </a:solidFill>
+                <a:latin typeface="Yu Gothic"/>
+              </a:rPr>
+              <a:t>Fake News Checker | 2026-04-11 最新評価を本編へ統合</a:t>
+            </a:r>
+          </a:p>
+        </p:txBody>
+      </p:sp>
+    </p:spTree>
+  </p:cSld>
+  <p:clrMapOvr>
+    <a:masterClrMapping/>
+  </p:clrMapOvr>
+</p:sld>
+</file>
+
+<file path=ppt/slides/slide19.xml><?xml version="1.0" encoding="utf-8"?>
+<p:sld xmlns:a="http://schemas.openxmlformats.org/drawingml/2006/main" xmlns:p="http://schemas.openxmlformats.org/presentationml/2006/main" xmlns:r="http://schemas.openxmlformats.org/officeDocument/2006/relationships">
+  <p:cSld>
+    <p:bg>
+      <p:bgPr>
+        <a:solidFill>
+          <a:srgbClr val="F7F4EE"/>
+        </a:solidFill>
+        <a:effectLst/>
+      </p:bgPr>
+    </p:bg>
+    <p:spTree>
+      <p:nvGrpSpPr>
+        <p:cNvPr id="1" name=""/>
+        <p:cNvGrpSpPr/>
+        <p:nvPr/>
+      </p:nvGrpSpPr>
+      <p:grpSpPr/>
+      <p:sp>
+        <p:nvSpPr>
+          <p:cNvPr id="2" name="TextBox 1"/>
+          <p:cNvSpPr txBox="1"/>
+          <p:nvPr/>
+        </p:nvSpPr>
+        <p:spPr>
+          <a:xfrm>
+            <a:off x="566928" y="320040"/>
+            <a:ext cx="8412480" cy="438912"/>
+          </a:xfrm>
+          <a:prstGeom prst="rect">
+            <a:avLst/>
+          </a:prstGeom>
+          <a:noFill/>
+        </p:spPr>
+        <p:txBody>
+          <a:bodyPr wrap="square" lIns="25400" rIns="25400" tIns="12700" bIns="12700">
+            <a:spAutoFit/>
+          </a:bodyPr>
+          <a:lstStyle/>
+          <a:p>
+            <a:pPr algn="l"/>
+            <a:r>
+              <a:rPr sz="2600" b="1">
+                <a:solidFill>
+                  <a:srgbClr val="1F2A34"/>
+                </a:solidFill>
+                <a:latin typeface="Yu Gothic"/>
+              </a:rPr>
               <a:t>参考資料: summary_metrics.png</a:t>
             </a:r>
           </a:p>
@@ -8732,7 +10137,7 @@
                 </a:solidFill>
                 <a:latin typeface="Yu Gothic"/>
               </a:rPr>
-              <a:t>4. 分析結果</a:t>
+              <a:t>3. プログラムの実行例</a:t>
             </a:r>
           </a:p>
         </p:txBody>
@@ -8767,7 +10172,7 @@
                 </a:solidFill>
                 <a:latin typeface="Yu Gothic"/>
               </a:rPr>
-              <a:t>2026-04-01 の初期版から、2026-04-11 の最新 rerun で大幅に改善した</a:t>
+              <a:t>入力から判定結果の表示までを、実際の画面で確認する</a:t>
             </a:r>
           </a:p>
         </p:txBody>
@@ -8815,9 +10220,97 @@
           </a:p>
         </p:txBody>
       </p:sp>
+      <p:sp>
+        <p:nvSpPr>
+          <p:cNvPr id="5" name="Rounded Rectangle 4"/>
+          <p:cNvSpPr/>
+          <p:nvPr/>
+        </p:nvSpPr>
+        <p:spPr>
+          <a:xfrm>
+            <a:off x="530352" y="1481328"/>
+            <a:ext cx="3703320" cy="4206240"/>
+          </a:xfrm>
+          <a:prstGeom prst="roundRect">
+            <a:avLst/>
+          </a:prstGeom>
+          <a:solidFill>
+            <a:srgbClr val="FFFFFF"/>
+          </a:solidFill>
+          <a:ln w="14604">
+            <a:solidFill>
+              <a:srgbClr val="D9D3CA"/>
+            </a:solidFill>
+          </a:ln>
+        </p:spPr>
+        <p:style>
+          <a:lnRef idx="1">
+            <a:schemeClr val="accent1"/>
+          </a:lnRef>
+          <a:fillRef idx="3">
+            <a:schemeClr val="accent1"/>
+          </a:fillRef>
+          <a:effectRef idx="2">
+            <a:schemeClr val="accent1"/>
+          </a:effectRef>
+          <a:fontRef idx="minor">
+            <a:schemeClr val="lt1"/>
+          </a:fontRef>
+        </p:style>
+        <p:txBody>
+          <a:bodyPr rtlCol="0" anchor="ctr"/>
+          <a:lstStyle/>
+          <a:p>
+            <a:pPr algn="ctr"/>
+          </a:p>
+        </p:txBody>
+      </p:sp>
+      <p:sp>
+        <p:nvSpPr>
+          <p:cNvPr id="6" name="Rectangle 5"/>
+          <p:cNvSpPr/>
+          <p:nvPr/>
+        </p:nvSpPr>
+        <p:spPr>
+          <a:xfrm>
+            <a:off x="530352" y="1481328"/>
+            <a:ext cx="3703320" cy="82296"/>
+          </a:xfrm>
+          <a:prstGeom prst="rect">
+            <a:avLst/>
+          </a:prstGeom>
+          <a:solidFill>
+            <a:srgbClr val="13767A"/>
+          </a:solidFill>
+          <a:ln>
+            <a:noFill/>
+          </a:ln>
+        </p:spPr>
+        <p:style>
+          <a:lnRef idx="1">
+            <a:schemeClr val="accent1"/>
+          </a:lnRef>
+          <a:fillRef idx="3">
+            <a:schemeClr val="accent1"/>
+          </a:fillRef>
+          <a:effectRef idx="2">
+            <a:schemeClr val="accent1"/>
+          </a:effectRef>
+          <a:fontRef idx="minor">
+            <a:schemeClr val="lt1"/>
+          </a:fontRef>
+        </p:style>
+        <p:txBody>
+          <a:bodyPr rtlCol="0" anchor="ctr"/>
+          <a:lstStyle/>
+          <a:p>
+            <a:pPr algn="ctr"/>
+          </a:p>
+        </p:txBody>
+      </p:sp>
       <p:pic>
         <p:nvPicPr>
-          <p:cNvPr id="5" name="Picture 4" descr="evaluation_dashboard.png"/>
+          <p:cNvPr id="7" name="Picture 6" descr="スクリーンショット (439).png"/>
           <p:cNvPicPr>
             <a:picLocks noChangeAspect="1"/>
           </p:cNvPicPr>
@@ -8831,8 +10324,8 @@
         </p:blipFill>
         <p:spPr>
           <a:xfrm>
-            <a:off x="658368" y="1772107"/>
-            <a:ext cx="6583680" cy="4081881"/>
+            <a:off x="640080" y="2485739"/>
+            <a:ext cx="3483864" cy="1959673"/>
           </a:xfrm>
           <a:prstGeom prst="rect">
             <a:avLst/>
@@ -8841,20 +10334,55 @@
       </p:pic>
       <p:sp>
         <p:nvSpPr>
-          <p:cNvPr id="6" name="Rounded Rectangle 5"/>
+          <p:cNvPr id="8" name="TextBox 7"/>
+          <p:cNvSpPr txBox="1"/>
+          <p:nvPr/>
+        </p:nvSpPr>
+        <p:spPr>
+          <a:xfrm>
+            <a:off x="640080" y="5413248"/>
+            <a:ext cx="3483864" cy="164592"/>
+          </a:xfrm>
+          <a:prstGeom prst="rect">
+            <a:avLst/>
+          </a:prstGeom>
+          <a:noFill/>
+        </p:spPr>
+        <p:txBody>
+          <a:bodyPr wrap="square" lIns="25400" rIns="25400" tIns="12700" bIns="12700">
+            <a:spAutoFit/>
+          </a:bodyPr>
+          <a:lstStyle/>
+          <a:p>
+            <a:pPr algn="ctr"/>
+            <a:r>
+              <a:rPr sz="1200" b="1">
+                <a:solidFill>
+                  <a:srgbClr val="626B76"/>
+                </a:solidFill>
+                <a:latin typeface="Yu Gothic"/>
+              </a:rPr>
+              <a:t>1. 入力画面</a:t>
+            </a:r>
+          </a:p>
+        </p:txBody>
+      </p:sp>
+      <p:sp>
+        <p:nvSpPr>
+          <p:cNvPr id="9" name="Rounded Rectangle 8"/>
           <p:cNvSpPr/>
           <p:nvPr/>
         </p:nvSpPr>
         <p:spPr>
           <a:xfrm>
-            <a:off x="7406640" y="1481328"/>
-            <a:ext cx="3886200" cy="4617720"/>
+            <a:off x="4242816" y="1481328"/>
+            <a:ext cx="3703320" cy="4206240"/>
           </a:xfrm>
           <a:prstGeom prst="roundRect">
             <a:avLst/>
           </a:prstGeom>
           <a:solidFill>
-            <a:srgbClr val="F3EEE5"/>
+            <a:srgbClr val="FFFFFF"/>
           </a:solidFill>
           <a:ln w="14604">
             <a:solidFill>
@@ -8886,217 +10414,14 @@
       </p:sp>
       <p:sp>
         <p:nvSpPr>
-          <p:cNvPr id="7" name="Rounded Rectangle 6"/>
+          <p:cNvPr id="10" name="Rectangle 9"/>
           <p:cNvSpPr/>
           <p:nvPr/>
         </p:nvSpPr>
         <p:spPr>
           <a:xfrm>
-            <a:off x="7626096" y="1792224"/>
-            <a:ext cx="1508760" cy="749808"/>
-          </a:xfrm>
-          <a:prstGeom prst="roundRect">
-            <a:avLst/>
-          </a:prstGeom>
-          <a:solidFill>
-            <a:srgbClr val="FFFFFF"/>
-          </a:solidFill>
-          <a:ln w="14604">
-            <a:solidFill>
-              <a:srgbClr val="13767A"/>
-            </a:solidFill>
-          </a:ln>
-        </p:spPr>
-        <p:style>
-          <a:lnRef idx="1">
-            <a:schemeClr val="accent1"/>
-          </a:lnRef>
-          <a:fillRef idx="3">
-            <a:schemeClr val="accent1"/>
-          </a:fillRef>
-          <a:effectRef idx="2">
-            <a:schemeClr val="accent1"/>
-          </a:effectRef>
-          <a:fontRef idx="minor">
-            <a:schemeClr val="lt1"/>
-          </a:fontRef>
-        </p:style>
-        <p:txBody>
-          <a:bodyPr rtlCol="0" anchor="ctr"/>
-          <a:lstStyle/>
-          <a:p>
-            <a:pPr algn="ctr"/>
-          </a:p>
-        </p:txBody>
-      </p:sp>
-      <p:sp>
-        <p:nvSpPr>
-          <p:cNvPr id="8" name="Rectangle 7"/>
-          <p:cNvSpPr/>
-          <p:nvPr/>
-        </p:nvSpPr>
-        <p:spPr>
-          <a:xfrm>
-            <a:off x="7626096" y="1792224"/>
-            <a:ext cx="1508760" cy="73152"/>
-          </a:xfrm>
-          <a:prstGeom prst="rect">
-            <a:avLst/>
-          </a:prstGeom>
-          <a:solidFill>
-            <a:srgbClr val="13767A"/>
-          </a:solidFill>
-          <a:ln>
-            <a:noFill/>
-          </a:ln>
-        </p:spPr>
-        <p:style>
-          <a:lnRef idx="1">
-            <a:schemeClr val="accent1"/>
-          </a:lnRef>
-          <a:fillRef idx="3">
-            <a:schemeClr val="accent1"/>
-          </a:fillRef>
-          <a:effectRef idx="2">
-            <a:schemeClr val="accent1"/>
-          </a:effectRef>
-          <a:fontRef idx="minor">
-            <a:schemeClr val="lt1"/>
-          </a:fontRef>
-        </p:style>
-        <p:txBody>
-          <a:bodyPr rtlCol="0" anchor="ctr"/>
-          <a:lstStyle/>
-          <a:p>
-            <a:pPr algn="ctr"/>
-          </a:p>
-        </p:txBody>
-      </p:sp>
-      <p:sp>
-        <p:nvSpPr>
-          <p:cNvPr id="9" name="TextBox 8"/>
-          <p:cNvSpPr txBox="1"/>
-          <p:nvPr/>
-        </p:nvSpPr>
-        <p:spPr>
-          <a:xfrm>
-            <a:off x="7763256" y="1956816"/>
-            <a:ext cx="1234440" cy="201168"/>
-          </a:xfrm>
-          <a:prstGeom prst="rect">
-            <a:avLst/>
-          </a:prstGeom>
-          <a:noFill/>
-        </p:spPr>
-        <p:txBody>
-          <a:bodyPr wrap="square" lIns="25400" rIns="25400" tIns="12700" bIns="12700">
-            <a:spAutoFit/>
-          </a:bodyPr>
-          <a:lstStyle/>
-          <a:p>
-            <a:pPr algn="l"/>
-            <a:r>
-              <a:rPr sz="1200" b="0">
-                <a:solidFill>
-                  <a:srgbClr val="626B76"/>
-                </a:solidFill>
-                <a:latin typeface="Yu Gothic"/>
-              </a:rPr>
-              <a:t>Accuracy</a:t>
-            </a:r>
-          </a:p>
-        </p:txBody>
-      </p:sp>
-      <p:sp>
-        <p:nvSpPr>
-          <p:cNvPr id="10" name="TextBox 9"/>
-          <p:cNvSpPr txBox="1"/>
-          <p:nvPr/>
-        </p:nvSpPr>
-        <p:spPr>
-          <a:xfrm>
-            <a:off x="7763256" y="2176272"/>
-            <a:ext cx="1234440" cy="320040"/>
-          </a:xfrm>
-          <a:prstGeom prst="rect">
-            <a:avLst/>
-          </a:prstGeom>
-          <a:noFill/>
-        </p:spPr>
-        <p:txBody>
-          <a:bodyPr wrap="square" lIns="25400" rIns="25400" tIns="12700" bIns="12700">
-            <a:spAutoFit/>
-          </a:bodyPr>
-          <a:lstStyle/>
-          <a:p>
-            <a:pPr algn="l"/>
-            <a:r>
-              <a:rPr sz="2200" b="1">
-                <a:solidFill>
-                  <a:srgbClr val="1F2A34"/>
-                </a:solidFill>
-                <a:latin typeface="Yu Gothic"/>
-              </a:rPr>
-              <a:t>0.370 -&gt; 0.840</a:t>
-            </a:r>
-          </a:p>
-        </p:txBody>
-      </p:sp>
-      <p:sp>
-        <p:nvSpPr>
-          <p:cNvPr id="11" name="Rounded Rectangle 10"/>
-          <p:cNvSpPr/>
-          <p:nvPr/>
-        </p:nvSpPr>
-        <p:spPr>
-          <a:xfrm>
-            <a:off x="9235440" y="1792224"/>
-            <a:ext cx="1508760" cy="749808"/>
-          </a:xfrm>
-          <a:prstGeom prst="roundRect">
-            <a:avLst/>
-          </a:prstGeom>
-          <a:solidFill>
-            <a:srgbClr val="FFFFFF"/>
-          </a:solidFill>
-          <a:ln w="14604">
-            <a:solidFill>
-              <a:srgbClr val="C96D31"/>
-            </a:solidFill>
-          </a:ln>
-        </p:spPr>
-        <p:style>
-          <a:lnRef idx="1">
-            <a:schemeClr val="accent1"/>
-          </a:lnRef>
-          <a:fillRef idx="3">
-            <a:schemeClr val="accent1"/>
-          </a:fillRef>
-          <a:effectRef idx="2">
-            <a:schemeClr val="accent1"/>
-          </a:effectRef>
-          <a:fontRef idx="minor">
-            <a:schemeClr val="lt1"/>
-          </a:fontRef>
-        </p:style>
-        <p:txBody>
-          <a:bodyPr rtlCol="0" anchor="ctr"/>
-          <a:lstStyle/>
-          <a:p>
-            <a:pPr algn="ctr"/>
-          </a:p>
-        </p:txBody>
-      </p:sp>
-      <p:sp>
-        <p:nvSpPr>
-          <p:cNvPr id="12" name="Rectangle 11"/>
-          <p:cNvSpPr/>
-          <p:nvPr/>
-        </p:nvSpPr>
-        <p:spPr>
-          <a:xfrm>
-            <a:off x="9235440" y="1792224"/>
-            <a:ext cx="1508760" cy="73152"/>
+            <a:off x="4242816" y="1481328"/>
+            <a:ext cx="3703320" cy="82296"/>
           </a:xfrm>
           <a:prstGeom prst="rect">
             <a:avLst/>
@@ -9130,16 +10455,40 @@
           </a:p>
         </p:txBody>
       </p:sp>
-      <p:sp>
-        <p:nvSpPr>
-          <p:cNvPr id="13" name="TextBox 12"/>
+      <p:pic>
+        <p:nvPicPr>
+          <p:cNvPr id="11" name="Picture 10" descr="スクリーンショット (464).png"/>
+          <p:cNvPicPr>
+            <a:picLocks noChangeAspect="1"/>
+          </p:cNvPicPr>
+          <p:nvPr/>
+        </p:nvPicPr>
+        <p:blipFill>
+          <a:blip r:embed="rId3"/>
+          <a:stretch>
+            <a:fillRect/>
+          </a:stretch>
+        </p:blipFill>
+        <p:spPr>
+          <a:xfrm>
+            <a:off x="4352544" y="2485739"/>
+            <a:ext cx="3483864" cy="1959673"/>
+          </a:xfrm>
+          <a:prstGeom prst="rect">
+            <a:avLst/>
+          </a:prstGeom>
+        </p:spPr>
+      </p:pic>
+      <p:sp>
+        <p:nvSpPr>
+          <p:cNvPr id="12" name="TextBox 11"/>
           <p:cNvSpPr txBox="1"/>
           <p:nvPr/>
         </p:nvSpPr>
         <p:spPr>
           <a:xfrm>
-            <a:off x="9372600" y="1956816"/>
-            <a:ext cx="1234440" cy="201168"/>
+            <a:off x="4352544" y="5413248"/>
+            <a:ext cx="3483864" cy="164592"/>
           </a:xfrm>
           <a:prstGeom prst="rect">
             <a:avLst/>
@@ -9152,64 +10501,29 @@
           </a:bodyPr>
           <a:lstStyle/>
           <a:p>
-            <a:pPr algn="l"/>
-            <a:r>
-              <a:rPr sz="1200" b="0">
+            <a:pPr algn="ctr"/>
+            <a:r>
+              <a:rPr sz="1200" b="1">
                 <a:solidFill>
                   <a:srgbClr val="626B76"/>
                 </a:solidFill>
                 <a:latin typeface="Yu Gothic"/>
               </a:rPr>
-              <a:t>Macro F1</a:t>
-            </a:r>
-          </a:p>
-        </p:txBody>
-      </p:sp>
-      <p:sp>
-        <p:nvSpPr>
-          <p:cNvPr id="14" name="TextBox 13"/>
-          <p:cNvSpPr txBox="1"/>
-          <p:nvPr/>
-        </p:nvSpPr>
-        <p:spPr>
-          <a:xfrm>
-            <a:off x="9372600" y="2176272"/>
-            <a:ext cx="1234440" cy="320040"/>
-          </a:xfrm>
-          <a:prstGeom prst="rect">
-            <a:avLst/>
-          </a:prstGeom>
-          <a:noFill/>
-        </p:spPr>
-        <p:txBody>
-          <a:bodyPr wrap="square" lIns="25400" rIns="25400" tIns="12700" bIns="12700">
-            <a:spAutoFit/>
-          </a:bodyPr>
-          <a:lstStyle/>
-          <a:p>
-            <a:pPr algn="l"/>
-            <a:r>
-              <a:rPr sz="2200" b="1">
-                <a:solidFill>
-                  <a:srgbClr val="1F2A34"/>
-                </a:solidFill>
-                <a:latin typeface="Yu Gothic"/>
-              </a:rPr>
-              <a:t>0.266 -&gt; 0.837</a:t>
-            </a:r>
-          </a:p>
-        </p:txBody>
-      </p:sp>
-      <p:sp>
-        <p:nvSpPr>
-          <p:cNvPr id="15" name="Rounded Rectangle 14"/>
+              <a:t>2. 判定中</a:t>
+            </a:r>
+          </a:p>
+        </p:txBody>
+      </p:sp>
+      <p:sp>
+        <p:nvSpPr>
+          <p:cNvPr id="13" name="Rounded Rectangle 12"/>
           <p:cNvSpPr/>
           <p:nvPr/>
         </p:nvSpPr>
         <p:spPr>
           <a:xfrm>
-            <a:off x="7626096" y="2743200"/>
-            <a:ext cx="1508760" cy="749808"/>
+            <a:off x="7955279" y="1481328"/>
+            <a:ext cx="3703320" cy="4206240"/>
           </a:xfrm>
           <a:prstGeom prst="roundRect">
             <a:avLst/>
@@ -9219,7 +10533,7 @@
           </a:solidFill>
           <a:ln w="14604">
             <a:solidFill>
-              <a:srgbClr val="B53D3D"/>
+              <a:srgbClr val="D9D3CA"/>
             </a:solidFill>
           </a:ln>
         </p:spPr>
@@ -9247,172 +10561,14 @@
       </p:sp>
       <p:sp>
         <p:nvSpPr>
-          <p:cNvPr id="16" name="Rectangle 15"/>
+          <p:cNvPr id="14" name="Rectangle 13"/>
           <p:cNvSpPr/>
           <p:nvPr/>
         </p:nvSpPr>
         <p:spPr>
           <a:xfrm>
-            <a:off x="7626096" y="2743200"/>
-            <a:ext cx="1508760" cy="73152"/>
-          </a:xfrm>
-          <a:prstGeom prst="rect">
-            <a:avLst/>
-          </a:prstGeom>
-          <a:solidFill>
-            <a:srgbClr val="B53D3D"/>
-          </a:solidFill>
-          <a:ln>
-            <a:noFill/>
-          </a:ln>
-        </p:spPr>
-        <p:style>
-          <a:lnRef idx="1">
-            <a:schemeClr val="accent1"/>
-          </a:lnRef>
-          <a:fillRef idx="3">
-            <a:schemeClr val="accent1"/>
-          </a:fillRef>
-          <a:effectRef idx="2">
-            <a:schemeClr val="accent1"/>
-          </a:effectRef>
-          <a:fontRef idx="minor">
-            <a:schemeClr val="lt1"/>
-          </a:fontRef>
-        </p:style>
-        <p:txBody>
-          <a:bodyPr rtlCol="0" anchor="ctr"/>
-          <a:lstStyle/>
-          <a:p>
-            <a:pPr algn="ctr"/>
-          </a:p>
-        </p:txBody>
-      </p:sp>
-      <p:sp>
-        <p:nvSpPr>
-          <p:cNvPr id="17" name="TextBox 16"/>
-          <p:cNvSpPr txBox="1"/>
-          <p:nvPr/>
-        </p:nvSpPr>
-        <p:spPr>
-          <a:xfrm>
-            <a:off x="7763256" y="2907792"/>
-            <a:ext cx="1234440" cy="201168"/>
-          </a:xfrm>
-          <a:prstGeom prst="rect">
-            <a:avLst/>
-          </a:prstGeom>
-          <a:noFill/>
-        </p:spPr>
-        <p:txBody>
-          <a:bodyPr wrap="square" lIns="25400" rIns="25400" tIns="12700" bIns="12700">
-            <a:spAutoFit/>
-          </a:bodyPr>
-          <a:lstStyle/>
-          <a:p>
-            <a:pPr algn="l"/>
-            <a:r>
-              <a:rPr sz="1200" b="0">
-                <a:solidFill>
-                  <a:srgbClr val="626B76"/>
-                </a:solidFill>
-                <a:latin typeface="Yu Gothic"/>
-              </a:rPr>
-              <a:t>誤り Recall</a:t>
-            </a:r>
-          </a:p>
-        </p:txBody>
-      </p:sp>
-      <p:sp>
-        <p:nvSpPr>
-          <p:cNvPr id="18" name="TextBox 17"/>
-          <p:cNvSpPr txBox="1"/>
-          <p:nvPr/>
-        </p:nvSpPr>
-        <p:spPr>
-          <a:xfrm>
-            <a:off x="7763256" y="3127248"/>
-            <a:ext cx="1234440" cy="320040"/>
-          </a:xfrm>
-          <a:prstGeom prst="rect">
-            <a:avLst/>
-          </a:prstGeom>
-          <a:noFill/>
-        </p:spPr>
-        <p:txBody>
-          <a:bodyPr wrap="square" lIns="25400" rIns="25400" tIns="12700" bIns="12700">
-            <a:spAutoFit/>
-          </a:bodyPr>
-          <a:lstStyle/>
-          <a:p>
-            <a:pPr algn="l"/>
-            <a:r>
-              <a:rPr sz="2200" b="1">
-                <a:solidFill>
-                  <a:srgbClr val="1F2A34"/>
-                </a:solidFill>
-                <a:latin typeface="Yu Gothic"/>
-              </a:rPr>
-              <a:t>0.000 -&gt; 0.800</a:t>
-            </a:r>
-          </a:p>
-        </p:txBody>
-      </p:sp>
-      <p:sp>
-        <p:nvSpPr>
-          <p:cNvPr id="19" name="Rounded Rectangle 18"/>
-          <p:cNvSpPr/>
-          <p:nvPr/>
-        </p:nvSpPr>
-        <p:spPr>
-          <a:xfrm>
-            <a:off x="9235440" y="2743200"/>
-            <a:ext cx="1508760" cy="749808"/>
-          </a:xfrm>
-          <a:prstGeom prst="roundRect">
-            <a:avLst/>
-          </a:prstGeom>
-          <a:solidFill>
-            <a:srgbClr val="FFFFFF"/>
-          </a:solidFill>
-          <a:ln w="14604">
-            <a:solidFill>
-              <a:srgbClr val="458E5F"/>
-            </a:solidFill>
-          </a:ln>
-        </p:spPr>
-        <p:style>
-          <a:lnRef idx="1">
-            <a:schemeClr val="accent1"/>
-          </a:lnRef>
-          <a:fillRef idx="3">
-            <a:schemeClr val="accent1"/>
-          </a:fillRef>
-          <a:effectRef idx="2">
-            <a:schemeClr val="accent1"/>
-          </a:effectRef>
-          <a:fontRef idx="minor">
-            <a:schemeClr val="lt1"/>
-          </a:fontRef>
-        </p:style>
-        <p:txBody>
-          <a:bodyPr rtlCol="0" anchor="ctr"/>
-          <a:lstStyle/>
-          <a:p>
-            <a:pPr algn="ctr"/>
-          </a:p>
-        </p:txBody>
-      </p:sp>
-      <p:sp>
-        <p:nvSpPr>
-          <p:cNvPr id="20" name="Rectangle 19"/>
-          <p:cNvSpPr/>
-          <p:nvPr/>
-        </p:nvSpPr>
-        <p:spPr>
-          <a:xfrm>
-            <a:off x="9235440" y="2743200"/>
-            <a:ext cx="1508760" cy="73152"/>
+            <a:off x="7955279" y="1481328"/>
+            <a:ext cx="3703320" cy="82296"/>
           </a:xfrm>
           <a:prstGeom prst="rect">
             <a:avLst/>
@@ -9446,16 +10602,40 @@
           </a:p>
         </p:txBody>
       </p:sp>
-      <p:sp>
-        <p:nvSpPr>
-          <p:cNvPr id="21" name="TextBox 20"/>
+      <p:pic>
+        <p:nvPicPr>
+          <p:cNvPr id="15" name="Picture 14" descr="スクリーンショット (465).png"/>
+          <p:cNvPicPr>
+            <a:picLocks noChangeAspect="1"/>
+          </p:cNvPicPr>
+          <p:nvPr/>
+        </p:nvPicPr>
+        <p:blipFill>
+          <a:blip r:embed="rId4"/>
+          <a:stretch>
+            <a:fillRect/>
+          </a:stretch>
+        </p:blipFill>
+        <p:spPr>
+          <a:xfrm>
+            <a:off x="8065007" y="2485739"/>
+            <a:ext cx="3483864" cy="1959673"/>
+          </a:xfrm>
+          <a:prstGeom prst="rect">
+            <a:avLst/>
+          </a:prstGeom>
+        </p:spPr>
+      </p:pic>
+      <p:sp>
+        <p:nvSpPr>
+          <p:cNvPr id="16" name="TextBox 15"/>
           <p:cNvSpPr txBox="1"/>
           <p:nvPr/>
         </p:nvSpPr>
         <p:spPr>
           <a:xfrm>
-            <a:off x="9372600" y="2907792"/>
-            <a:ext cx="1234440" cy="201168"/>
+            <a:off x="8065007" y="5413248"/>
+            <a:ext cx="3483864" cy="164592"/>
           </a:xfrm>
           <a:prstGeom prst="rect">
             <a:avLst/>
@@ -9468,74 +10648,39 @@
           </a:bodyPr>
           <a:lstStyle/>
           <a:p>
-            <a:pPr algn="l"/>
-            <a:r>
-              <a:rPr sz="1200" b="0">
+            <a:pPr algn="ctr"/>
+            <a:r>
+              <a:rPr sz="1200" b="1">
                 <a:solidFill>
                   <a:srgbClr val="626B76"/>
                 </a:solidFill>
                 <a:latin typeface="Yu Gothic"/>
               </a:rPr>
-              <a:t>Binary F1</a:t>
-            </a:r>
-          </a:p>
-        </p:txBody>
-      </p:sp>
-      <p:sp>
-        <p:nvSpPr>
-          <p:cNvPr id="22" name="TextBox 21"/>
-          <p:cNvSpPr txBox="1"/>
-          <p:nvPr/>
-        </p:nvSpPr>
-        <p:spPr>
-          <a:xfrm>
-            <a:off x="9372600" y="3127248"/>
-            <a:ext cx="1234440" cy="320040"/>
-          </a:xfrm>
-          <a:prstGeom prst="rect">
-            <a:avLst/>
-          </a:prstGeom>
-          <a:noFill/>
-        </p:spPr>
-        <p:txBody>
-          <a:bodyPr wrap="square" lIns="25400" rIns="25400" tIns="12700" bIns="12700">
-            <a:spAutoFit/>
-          </a:bodyPr>
-          <a:lstStyle/>
-          <a:p>
-            <a:pPr algn="l"/>
-            <a:r>
-              <a:rPr sz="2200" b="1">
-                <a:solidFill>
-                  <a:srgbClr val="1F2A34"/>
-                </a:solidFill>
-                <a:latin typeface="Yu Gothic"/>
-              </a:rPr>
-              <a:t>0.889</a:t>
-            </a:r>
-          </a:p>
-        </p:txBody>
-      </p:sp>
-      <p:sp>
-        <p:nvSpPr>
-          <p:cNvPr id="23" name="Rounded Rectangle 22"/>
+              <a:t>3. 結果表示</a:t>
+            </a:r>
+          </a:p>
+        </p:txBody>
+      </p:sp>
+      <p:sp>
+        <p:nvSpPr>
+          <p:cNvPr id="17" name="Rounded Rectangle 16"/>
           <p:cNvSpPr/>
           <p:nvPr/>
         </p:nvSpPr>
         <p:spPr>
           <a:xfrm>
-            <a:off x="7626096" y="3694176"/>
-            <a:ext cx="1508760" cy="749808"/>
+            <a:off x="749808" y="5815584"/>
+            <a:ext cx="10744200" cy="402336"/>
           </a:xfrm>
           <a:prstGeom prst="roundRect">
             <a:avLst/>
           </a:prstGeom>
           <a:solidFill>
-            <a:srgbClr val="FFFFFF"/>
+            <a:srgbClr val="F3EEE5"/>
           </a:solidFill>
           <a:ln w="14604">
             <a:solidFill>
-              <a:srgbClr val="13767A"/>
+              <a:srgbClr val="F3EEE5"/>
             </a:solidFill>
           </a:ln>
         </p:spPr>
@@ -9563,57 +10708,14 @@
       </p:sp>
       <p:sp>
         <p:nvSpPr>
-          <p:cNvPr id="24" name="Rectangle 23"/>
-          <p:cNvSpPr/>
-          <p:nvPr/>
-        </p:nvSpPr>
-        <p:spPr>
-          <a:xfrm>
-            <a:off x="7626096" y="3694176"/>
-            <a:ext cx="1508760" cy="73152"/>
-          </a:xfrm>
-          <a:prstGeom prst="rect">
-            <a:avLst/>
-          </a:prstGeom>
-          <a:solidFill>
-            <a:srgbClr val="13767A"/>
-          </a:solidFill>
-          <a:ln>
-            <a:noFill/>
-          </a:ln>
-        </p:spPr>
-        <p:style>
-          <a:lnRef idx="1">
-            <a:schemeClr val="accent1"/>
-          </a:lnRef>
-          <a:fillRef idx="3">
-            <a:schemeClr val="accent1"/>
-          </a:fillRef>
-          <a:effectRef idx="2">
-            <a:schemeClr val="accent1"/>
-          </a:effectRef>
-          <a:fontRef idx="minor">
-            <a:schemeClr val="lt1"/>
-          </a:fontRef>
-        </p:style>
-        <p:txBody>
-          <a:bodyPr rtlCol="0" anchor="ctr"/>
-          <a:lstStyle/>
-          <a:p>
-            <a:pPr algn="ctr"/>
-          </a:p>
-        </p:txBody>
-      </p:sp>
-      <p:sp>
-        <p:nvSpPr>
-          <p:cNvPr id="25" name="TextBox 24"/>
+          <p:cNvPr id="18" name="TextBox 17"/>
           <p:cNvSpPr txBox="1"/>
           <p:nvPr/>
         </p:nvSpPr>
         <p:spPr>
           <a:xfrm>
-            <a:off x="7763256" y="3858768"/>
-            <a:ext cx="1234440" cy="201168"/>
+            <a:off x="914400" y="5907024"/>
+            <a:ext cx="10241280" cy="164592"/>
           </a:xfrm>
           <a:prstGeom prst="rect">
             <a:avLst/>
@@ -9626,286 +10728,22 @@
           </a:bodyPr>
           <a:lstStyle/>
           <a:p>
-            <a:pPr algn="l"/>
-            <a:r>
-              <a:rPr sz="1200" b="0">
-                <a:solidFill>
-                  <a:srgbClr val="626B76"/>
-                </a:solidFill>
-                <a:latin typeface="Yu Gothic"/>
-              </a:rPr>
-              <a:t>Mismatches</a:t>
-            </a:r>
-          </a:p>
-        </p:txBody>
-      </p:sp>
-      <p:sp>
-        <p:nvSpPr>
-          <p:cNvPr id="26" name="TextBox 25"/>
-          <p:cNvSpPr txBox="1"/>
-          <p:nvPr/>
-        </p:nvSpPr>
-        <p:spPr>
-          <a:xfrm>
-            <a:off x="7763256" y="4078224"/>
-            <a:ext cx="1234440" cy="320040"/>
-          </a:xfrm>
-          <a:prstGeom prst="rect">
-            <a:avLst/>
-          </a:prstGeom>
-          <a:noFill/>
-        </p:spPr>
-        <p:txBody>
-          <a:bodyPr wrap="square" lIns="25400" rIns="25400" tIns="12700" bIns="12700">
-            <a:spAutoFit/>
-          </a:bodyPr>
-          <a:lstStyle/>
-          <a:p>
-            <a:pPr algn="l"/>
-            <a:r>
-              <a:rPr sz="2200" b="1">
+            <a:pPr algn="ctr"/>
+            <a:r>
+              <a:rPr sz="1500" b="0">
                 <a:solidFill>
                   <a:srgbClr val="1F2A34"/>
                 </a:solidFill>
                 <a:latin typeface="Yu Gothic"/>
               </a:rPr>
-              <a:t>63 -&gt; 16</a:t>
-            </a:r>
-          </a:p>
-        </p:txBody>
-      </p:sp>
-      <p:sp>
-        <p:nvSpPr>
-          <p:cNvPr id="27" name="Rounded Rectangle 26"/>
-          <p:cNvSpPr/>
-          <p:nvPr/>
-        </p:nvSpPr>
-        <p:spPr>
-          <a:xfrm>
-            <a:off x="9235440" y="3694176"/>
-            <a:ext cx="1508760" cy="749808"/>
-          </a:xfrm>
-          <a:prstGeom prst="roundRect">
-            <a:avLst/>
-          </a:prstGeom>
-          <a:solidFill>
-            <a:srgbClr val="FFFFFF"/>
-          </a:solidFill>
-          <a:ln w="14604">
-            <a:solidFill>
-              <a:srgbClr val="C96D31"/>
-            </a:solidFill>
-          </a:ln>
-        </p:spPr>
-        <p:style>
-          <a:lnRef idx="1">
-            <a:schemeClr val="accent1"/>
-          </a:lnRef>
-          <a:fillRef idx="3">
-            <a:schemeClr val="accent1"/>
-          </a:fillRef>
-          <a:effectRef idx="2">
-            <a:schemeClr val="accent1"/>
-          </a:effectRef>
-          <a:fontRef idx="minor">
-            <a:schemeClr val="lt1"/>
-          </a:fontRef>
-        </p:style>
-        <p:txBody>
-          <a:bodyPr rtlCol="0" anchor="ctr"/>
-          <a:lstStyle/>
-          <a:p>
-            <a:pPr algn="ctr"/>
-          </a:p>
-        </p:txBody>
-      </p:sp>
-      <p:sp>
-        <p:nvSpPr>
-          <p:cNvPr id="28" name="Rectangle 27"/>
-          <p:cNvSpPr/>
-          <p:nvPr/>
-        </p:nvSpPr>
-        <p:spPr>
-          <a:xfrm>
-            <a:off x="9235440" y="3694176"/>
-            <a:ext cx="1508760" cy="73152"/>
-          </a:xfrm>
-          <a:prstGeom prst="rect">
-            <a:avLst/>
-          </a:prstGeom>
-          <a:solidFill>
-            <a:srgbClr val="C96D31"/>
-          </a:solidFill>
-          <a:ln>
-            <a:noFill/>
-          </a:ln>
-        </p:spPr>
-        <p:style>
-          <a:lnRef idx="1">
-            <a:schemeClr val="accent1"/>
-          </a:lnRef>
-          <a:fillRef idx="3">
-            <a:schemeClr val="accent1"/>
-          </a:fillRef>
-          <a:effectRef idx="2">
-            <a:schemeClr val="accent1"/>
-          </a:effectRef>
-          <a:fontRef idx="minor">
-            <a:schemeClr val="lt1"/>
-          </a:fontRef>
-        </p:style>
-        <p:txBody>
-          <a:bodyPr rtlCol="0" anchor="ctr"/>
-          <a:lstStyle/>
-          <a:p>
-            <a:pPr algn="ctr"/>
-          </a:p>
-        </p:txBody>
-      </p:sp>
-      <p:sp>
-        <p:nvSpPr>
-          <p:cNvPr id="29" name="TextBox 28"/>
-          <p:cNvSpPr txBox="1"/>
-          <p:nvPr/>
-        </p:nvSpPr>
-        <p:spPr>
-          <a:xfrm>
-            <a:off x="9372600" y="3858768"/>
-            <a:ext cx="1234440" cy="201168"/>
-          </a:xfrm>
-          <a:prstGeom prst="rect">
-            <a:avLst/>
-          </a:prstGeom>
-          <a:noFill/>
-        </p:spPr>
-        <p:txBody>
-          <a:bodyPr wrap="square" lIns="25400" rIns="25400" tIns="12700" bIns="12700">
-            <a:spAutoFit/>
-          </a:bodyPr>
-          <a:lstStyle/>
-          <a:p>
-            <a:pPr algn="l"/>
-            <a:r>
-              <a:rPr sz="1200" b="0">
-                <a:solidFill>
-                  <a:srgbClr val="626B76"/>
-                </a:solidFill>
-                <a:latin typeface="Yu Gothic"/>
-              </a:rPr>
-              <a:t>All cases</a:t>
-            </a:r>
-          </a:p>
-        </p:txBody>
-      </p:sp>
-      <p:sp>
-        <p:nvSpPr>
-          <p:cNvPr id="30" name="TextBox 29"/>
-          <p:cNvSpPr txBox="1"/>
-          <p:nvPr/>
-        </p:nvSpPr>
-        <p:spPr>
-          <a:xfrm>
-            <a:off x="9372600" y="4078224"/>
-            <a:ext cx="1234440" cy="320040"/>
-          </a:xfrm>
-          <a:prstGeom prst="rect">
-            <a:avLst/>
-          </a:prstGeom>
-          <a:noFill/>
-        </p:spPr>
-        <p:txBody>
-          <a:bodyPr wrap="square" lIns="25400" rIns="25400" tIns="12700" bIns="12700">
-            <a:spAutoFit/>
-          </a:bodyPr>
-          <a:lstStyle/>
-          <a:p>
-            <a:pPr algn="l"/>
-            <a:r>
-              <a:rPr sz="2200" b="1">
-                <a:solidFill>
-                  <a:srgbClr val="1F2A34"/>
-                </a:solidFill>
-                <a:latin typeface="Yu Gothic"/>
-              </a:rPr>
-              <a:t>100/100</a:t>
-            </a:r>
-          </a:p>
-        </p:txBody>
-      </p:sp>
-      <p:sp>
-        <p:nvSpPr>
-          <p:cNvPr id="31" name="TextBox 30"/>
-          <p:cNvSpPr txBox="1"/>
-          <p:nvPr/>
-        </p:nvSpPr>
-        <p:spPr>
-          <a:xfrm>
-            <a:off x="7571231" y="4663440"/>
-            <a:ext cx="3337560" cy="1051560"/>
-          </a:xfrm>
-          <a:prstGeom prst="rect">
-            <a:avLst/>
-          </a:prstGeom>
-          <a:noFill/>
-        </p:spPr>
-        <p:txBody>
-          <a:bodyPr wrap="square" lIns="50800" rIns="50800">
-            <a:spAutoFit/>
-          </a:bodyPr>
-          <a:lstStyle/>
-          <a:p>
-            <a:pPr algn="l">
-              <a:spcAft>
-                <a:spcPts val="700"/>
-              </a:spcAft>
-            </a:pPr>
-            <a:r>
-              <a:rPr sz="1500">
-                <a:solidFill>
-                  <a:srgbClr val="1F2A34"/>
-                </a:solidFill>
-                <a:latin typeface="Yu Gothic"/>
-              </a:rPr>
-              <a:t>Accuracy は 0.370 から 0.840 まで改善</a:t>
-            </a:r>
-          </a:p>
-          <a:p>
-            <a:pPr algn="l">
-              <a:spcAft>
-                <a:spcPts val="700"/>
-              </a:spcAft>
-            </a:pPr>
-            <a:r>
-              <a:rPr sz="1500">
-                <a:solidFill>
-                  <a:srgbClr val="1F2A34"/>
-                </a:solidFill>
-                <a:latin typeface="Yu Gothic"/>
-              </a:rPr>
-              <a:t>誤り recall も 0.000 から 0.800 へ回復</a:t>
-            </a:r>
-          </a:p>
-          <a:p>
-            <a:pPr algn="l">
-              <a:spcAft>
-                <a:spcPts val="700"/>
-              </a:spcAft>
-            </a:pPr>
-            <a:r>
-              <a:rPr sz="1500">
-                <a:solidFill>
-                  <a:srgbClr val="1F2A34"/>
-                </a:solidFill>
-                <a:latin typeface="Yu Gothic"/>
-              </a:rPr>
-              <a:t>残る課題は『ほぼ正確』境界と誤りの押し切り</a:t>
-            </a:r>
-          </a:p>
-        </p:txBody>
-      </p:sp>
-      <p:sp>
-        <p:nvSpPr>
-          <p:cNvPr id="32" name="TextBox 31"/>
+              <a:t>URL または本文を入力すると、判定中表示を経て、要注意度・5区分の判定・理由が返る。</a:t>
+            </a:r>
+          </a:p>
+        </p:txBody>
+      </p:sp>
+      <p:sp>
+        <p:nvSpPr>
+          <p:cNvPr id="19" name="TextBox 18"/>
           <p:cNvSpPr txBox="1"/>
           <p:nvPr/>
         </p:nvSpPr>
@@ -9994,7 +10832,7 @@
                 </a:solidFill>
                 <a:latin typeface="Yu Gothic"/>
               </a:rPr>
-              <a:t>4. 考察</a:t>
+              <a:t>3. 出力の見方</a:t>
             </a:r>
           </a:p>
         </p:txBody>
@@ -10029,7 +10867,7 @@
                 </a:solidFill>
                 <a:latin typeface="Yu Gothic"/>
               </a:rPr>
-              <a:t>現在の Ver2 はかなり実用的だが、境界ラベルの調整はまだ必要</a:t>
+              <a:t>判定ラベルだけでなく、理由と確認補助情報も返す設計</a:t>
             </a:r>
           </a:p>
         </p:txBody>
@@ -10077,40 +10915,16 @@
           </a:p>
         </p:txBody>
       </p:sp>
-      <p:pic>
-        <p:nvPicPr>
-          <p:cNvPr id="5" name="Picture 4" descr="confusion_matrix.png"/>
-          <p:cNvPicPr>
-            <a:picLocks noChangeAspect="1"/>
-          </p:cNvPicPr>
-          <p:nvPr/>
-        </p:nvPicPr>
-        <p:blipFill>
-          <a:blip r:embed="rId2"/>
-          <a:stretch>
-            <a:fillRect/>
-          </a:stretch>
-        </p:blipFill>
-        <p:spPr>
-          <a:xfrm>
-            <a:off x="685800" y="1771237"/>
-            <a:ext cx="5303520" cy="4165918"/>
-          </a:xfrm>
-          <a:prstGeom prst="rect">
-            <a:avLst/>
-          </a:prstGeom>
-        </p:spPr>
-      </p:pic>
-      <p:sp>
-        <p:nvSpPr>
-          <p:cNvPr id="6" name="Rounded Rectangle 5"/>
+      <p:sp>
+        <p:nvSpPr>
+          <p:cNvPr id="5" name="Rounded Rectangle 4"/>
           <p:cNvSpPr/>
           <p:nvPr/>
         </p:nvSpPr>
         <p:spPr>
           <a:xfrm>
-            <a:off x="6144768" y="1591056"/>
-            <a:ext cx="5074920" cy="4526280"/>
+            <a:off x="621792" y="1426464"/>
+            <a:ext cx="6492240" cy="4882896"/>
           </a:xfrm>
           <a:prstGeom prst="roundRect">
             <a:avLst/>
@@ -10148,14 +10962,152 @@
       </p:sp>
       <p:sp>
         <p:nvSpPr>
-          <p:cNvPr id="7" name="TextBox 6"/>
+          <p:cNvPr id="6" name="Rounded Rectangle 5"/>
+          <p:cNvSpPr/>
+          <p:nvPr/>
+        </p:nvSpPr>
+        <p:spPr>
+          <a:xfrm>
+            <a:off x="7315200" y="1426464"/>
+            <a:ext cx="4224528" cy="2578608"/>
+          </a:xfrm>
+          <a:prstGeom prst="roundRect">
+            <a:avLst/>
+          </a:prstGeom>
+          <a:solidFill>
+            <a:srgbClr val="FFFFFF"/>
+          </a:solidFill>
+          <a:ln w="14604">
+            <a:solidFill>
+              <a:srgbClr val="D9D3CA"/>
+            </a:solidFill>
+          </a:ln>
+        </p:spPr>
+        <p:style>
+          <a:lnRef idx="1">
+            <a:schemeClr val="accent1"/>
+          </a:lnRef>
+          <a:fillRef idx="3">
+            <a:schemeClr val="accent1"/>
+          </a:fillRef>
+          <a:effectRef idx="2">
+            <a:schemeClr val="accent1"/>
+          </a:effectRef>
+          <a:fontRef idx="minor">
+            <a:schemeClr val="lt1"/>
+          </a:fontRef>
+        </p:style>
+        <p:txBody>
+          <a:bodyPr rtlCol="0" anchor="ctr"/>
+          <a:lstStyle/>
+          <a:p>
+            <a:pPr algn="ctr"/>
+          </a:p>
+        </p:txBody>
+      </p:sp>
+      <p:sp>
+        <p:nvSpPr>
+          <p:cNvPr id="7" name="Rounded Rectangle 6"/>
+          <p:cNvSpPr/>
+          <p:nvPr/>
+        </p:nvSpPr>
+        <p:spPr>
+          <a:xfrm>
+            <a:off x="7315200" y="4151376"/>
+            <a:ext cx="4224528" cy="2157984"/>
+          </a:xfrm>
+          <a:prstGeom prst="roundRect">
+            <a:avLst/>
+          </a:prstGeom>
+          <a:solidFill>
+            <a:srgbClr val="EAF3F1"/>
+          </a:solidFill>
+          <a:ln w="14604">
+            <a:solidFill>
+              <a:srgbClr val="D9D3CA"/>
+            </a:solidFill>
+          </a:ln>
+        </p:spPr>
+        <p:style>
+          <a:lnRef idx="1">
+            <a:schemeClr val="accent1"/>
+          </a:lnRef>
+          <a:fillRef idx="3">
+            <a:schemeClr val="accent1"/>
+          </a:fillRef>
+          <a:effectRef idx="2">
+            <a:schemeClr val="accent1"/>
+          </a:effectRef>
+          <a:fontRef idx="minor">
+            <a:schemeClr val="lt1"/>
+          </a:fontRef>
+        </p:style>
+        <p:txBody>
+          <a:bodyPr rtlCol="0" anchor="ctr"/>
+          <a:lstStyle/>
+          <a:p>
+            <a:pPr algn="ctr"/>
+          </a:p>
+        </p:txBody>
+      </p:sp>
+      <p:pic>
+        <p:nvPicPr>
+          <p:cNvPr id="8" name="Picture 7" descr="スクリーンショット (465).png"/>
+          <p:cNvPicPr>
+            <a:picLocks noChangeAspect="1"/>
+          </p:cNvPicPr>
+          <p:nvPr/>
+        </p:nvPicPr>
+        <p:blipFill>
+          <a:blip r:embed="rId2"/>
+          <a:stretch>
+            <a:fillRect/>
+          </a:stretch>
+        </p:blipFill>
+        <p:spPr>
+          <a:xfrm>
+            <a:off x="804672" y="2157984"/>
+            <a:ext cx="6144768" cy="3456432"/>
+          </a:xfrm>
+          <a:prstGeom prst="rect">
+            <a:avLst/>
+          </a:prstGeom>
+        </p:spPr>
+      </p:pic>
+      <p:pic>
+        <p:nvPicPr>
+          <p:cNvPr id="9" name="Picture 8" descr="スクリーンショット 2026-04-11 065005.png"/>
+          <p:cNvPicPr>
+            <a:picLocks noChangeAspect="1"/>
+          </p:cNvPicPr>
+          <p:nvPr/>
+        </p:nvPicPr>
+        <p:blipFill>
+          <a:blip r:embed="rId3"/>
+          <a:stretch>
+            <a:fillRect/>
+          </a:stretch>
+        </p:blipFill>
+        <p:spPr>
+          <a:xfrm>
+            <a:off x="8217679" y="1627632"/>
+            <a:ext cx="2401282" cy="2176272"/>
+          </a:xfrm>
+          <a:prstGeom prst="rect">
+            <a:avLst/>
+          </a:prstGeom>
+        </p:spPr>
+      </p:pic>
+      <p:sp>
+        <p:nvSpPr>
+          <p:cNvPr id="10" name="TextBox 9"/>
           <p:cNvSpPr txBox="1"/>
           <p:nvPr/>
         </p:nvSpPr>
         <p:spPr>
           <a:xfrm>
-            <a:off x="6400800" y="1828800"/>
-            <a:ext cx="2560320" cy="274320"/>
+            <a:off x="7571231" y="4407408"/>
+            <a:ext cx="2011680" cy="256032"/>
           </a:xfrm>
           <a:prstGeom prst="rect">
             <a:avLst/>
@@ -10170,27 +11122,27 @@
           <a:p>
             <a:pPr algn="l"/>
             <a:r>
-              <a:rPr sz="2000" b="1">
-                <a:solidFill>
-                  <a:srgbClr val="C96D31"/>
-                </a:solidFill>
-                <a:latin typeface="Yu Gothic"/>
-              </a:rPr>
-              <a:t>主な誤判定</a:t>
-            </a:r>
-          </a:p>
-        </p:txBody>
-      </p:sp>
-      <p:sp>
-        <p:nvSpPr>
-          <p:cNvPr id="8" name="TextBox 7"/>
+              <a:rPr sz="1800" b="1">
+                <a:solidFill>
+                  <a:srgbClr val="13767A"/>
+                </a:solidFill>
+                <a:latin typeface="Yu Gothic"/>
+              </a:rPr>
+              <a:t>この画面で伝えたいこと</a:t>
+            </a:r>
+          </a:p>
+        </p:txBody>
+      </p:sp>
+      <p:sp>
+        <p:nvSpPr>
+          <p:cNvPr id="11" name="TextBox 10"/>
           <p:cNvSpPr txBox="1"/>
           <p:nvPr/>
         </p:nvSpPr>
         <p:spPr>
           <a:xfrm>
-            <a:off x="6364224" y="2139696"/>
-            <a:ext cx="4434840" cy="1143000"/>
+            <a:off x="7534656" y="4736592"/>
+            <a:ext cx="3566160" cy="1234440"/>
           </a:xfrm>
           <a:prstGeom prst="rect">
             <a:avLst/>
@@ -10209,13 +11161,13 @@
               </a:spcAft>
             </a:pPr>
             <a:r>
-              <a:rPr sz="1700">
+              <a:rPr sz="1500">
                 <a:solidFill>
                   <a:srgbClr val="1F2A34"/>
                 </a:solidFill>
                 <a:latin typeface="Yu Gothic"/>
               </a:rPr>
-              <a:t>ほぼ正確 -&gt; 正確: 6件</a:t>
+              <a:t>要注意度は 0〜100% で直感的に表示する</a:t>
             </a:r>
           </a:p>
           <a:p>
@@ -10225,13 +11177,13 @@
               </a:spcAft>
             </a:pPr>
             <a:r>
-              <a:rPr sz="1700">
+              <a:rPr sz="1500">
                 <a:solidFill>
                   <a:srgbClr val="1F2A34"/>
                 </a:solidFill>
                 <a:latin typeface="Yu Gothic"/>
               </a:rPr>
-              <a:t>正確 -&gt; ほぼ正確: 4件</a:t>
+              <a:t>判定は 5 区分で返し、白黒だけに寄せない</a:t>
             </a:r>
           </a:p>
           <a:p>
@@ -10241,158 +11193,20 @@
               </a:spcAft>
             </a:pPr>
             <a:r>
-              <a:rPr sz="1700">
+              <a:rPr sz="1500">
                 <a:solidFill>
                   <a:srgbClr val="1F2A34"/>
                 </a:solidFill>
                 <a:latin typeface="Yu Gothic"/>
               </a:rPr>
-              <a:t>誤り -&gt; 不正確: 4件</a:t>
-            </a:r>
-          </a:p>
-          <a:p>
-            <a:pPr algn="l">
-              <a:spcAft>
-                <a:spcPts val="700"/>
-              </a:spcAft>
-            </a:pPr>
-            <a:r>
-              <a:rPr sz="1700">
-                <a:solidFill>
-                  <a:srgbClr val="1F2A34"/>
-                </a:solidFill>
-                <a:latin typeface="Yu Gothic"/>
-              </a:rPr>
-              <a:t>ほぼ正確 -&gt; 不正確: 2件</a:t>
-            </a:r>
-          </a:p>
-        </p:txBody>
-      </p:sp>
-      <p:sp>
-        <p:nvSpPr>
-          <p:cNvPr id="9" name="TextBox 8"/>
-          <p:cNvSpPr txBox="1"/>
-          <p:nvPr/>
-        </p:nvSpPr>
-        <p:spPr>
-          <a:xfrm>
-            <a:off x="6400800" y="3657600"/>
-            <a:ext cx="2560320" cy="274320"/>
-          </a:xfrm>
-          <a:prstGeom prst="rect">
-            <a:avLst/>
-          </a:prstGeom>
-          <a:noFill/>
-        </p:spPr>
-        <p:txBody>
-          <a:bodyPr wrap="square" lIns="25400" rIns="25400" tIns="12700" bIns="12700">
-            <a:spAutoFit/>
-          </a:bodyPr>
-          <a:lstStyle/>
-          <a:p>
-            <a:pPr algn="l"/>
-            <a:r>
-              <a:rPr sz="2000" b="1">
-                <a:solidFill>
-                  <a:srgbClr val="13767A"/>
-                </a:solidFill>
-                <a:latin typeface="Yu Gothic"/>
-              </a:rPr>
-              <a:t>代表ケース</a:t>
-            </a:r>
-          </a:p>
-        </p:txBody>
-      </p:sp>
-      <p:sp>
-        <p:nvSpPr>
-          <p:cNvPr id="10" name="TextBox 9"/>
-          <p:cNvSpPr txBox="1"/>
-          <p:nvPr/>
-        </p:nvSpPr>
-        <p:spPr>
-          <a:xfrm>
-            <a:off x="6364224" y="3968496"/>
-            <a:ext cx="4434840" cy="1188720"/>
-          </a:xfrm>
-          <a:prstGeom prst="rect">
-            <a:avLst/>
-          </a:prstGeom>
-          <a:noFill/>
-        </p:spPr>
-        <p:txBody>
-          <a:bodyPr wrap="square" lIns="50800" rIns="50800">
-            <a:spAutoFit/>
-          </a:bodyPr>
-          <a:lstStyle/>
-          <a:p>
-            <a:pPr algn="l">
-              <a:spcAft>
-                <a:spcPts val="700"/>
-              </a:spcAft>
-            </a:pPr>
-            <a:r>
-              <a:rPr sz="1500">
-                <a:solidFill>
-                  <a:srgbClr val="1F2A34"/>
-                </a:solidFill>
-                <a:latin typeface="Yu Gothic"/>
-              </a:rPr>
-              <a:t>正確 -&gt; ほぼ正確: ド・ドドンパ・ジェットコースターは骨折事故発生を受け、営業を終了した。</a:t>
-            </a:r>
-          </a:p>
-          <a:p>
-            <a:pPr algn="l">
-              <a:spcAft>
-                <a:spcPts val="700"/>
-              </a:spcAft>
-            </a:pPr>
-            <a:r>
-              <a:rPr sz="1500">
-                <a:solidFill>
-                  <a:srgbClr val="1F2A34"/>
-                </a:solidFill>
-                <a:latin typeface="Yu Gothic"/>
-              </a:rPr>
-              <a:t>ほぼ正確 -&gt; 正確: マサチューセッツ州の有権者は、100万ドルを超える所得に対する4％の追加税…</a:t>
-            </a:r>
-          </a:p>
-          <a:p>
-            <a:pPr algn="l">
-              <a:spcAft>
-                <a:spcPts val="700"/>
-              </a:spcAft>
-            </a:pPr>
-            <a:r>
-              <a:rPr sz="1500">
-                <a:solidFill>
-                  <a:srgbClr val="1F2A34"/>
-                </a:solidFill>
-                <a:latin typeface="Yu Gothic"/>
-              </a:rPr>
-              <a:t>ほぼ正確 -&gt; 不正確: 世界最高峰のエベレストの標高は8858mである。</a:t>
-            </a:r>
-          </a:p>
-          <a:p>
-            <a:pPr algn="l">
-              <a:spcAft>
-                <a:spcPts val="700"/>
-              </a:spcAft>
-            </a:pPr>
-            <a:r>
-              <a:rPr sz="1500">
-                <a:solidFill>
-                  <a:srgbClr val="1F2A34"/>
-                </a:solidFill>
-                <a:latin typeface="Yu Gothic"/>
-              </a:rPr>
-              <a:t>誤り -&gt; 不正確: 5Gが新型コロナを引き起こす。</a:t>
-            </a:r>
-          </a:p>
-        </p:txBody>
-      </p:sp>
-      <p:sp>
-        <p:nvSpPr>
-          <p:cNvPr id="11" name="TextBox 10"/>
+              <a:t>理由は短い箇条書きで、利用者が次の確認行動を取りやすくする</a:t>
+            </a:r>
+          </a:p>
+        </p:txBody>
+      </p:sp>
+      <p:sp>
+        <p:nvSpPr>
+          <p:cNvPr id="12" name="TextBox 11"/>
           <p:cNvSpPr txBox="1"/>
           <p:nvPr/>
         </p:nvSpPr>
@@ -10481,7 +11295,7 @@
                 </a:solidFill>
                 <a:latin typeface="Yu Gothic"/>
               </a:rPr>
-              <a:t>5. ビジネスインパクト</a:t>
+              <a:t>4. 分析結果</a:t>
             </a:r>
           </a:p>
         </p:txBody>
@@ -10516,7 +11330,7 @@
                 </a:solidFill>
                 <a:latin typeface="Yu Gothic"/>
               </a:rPr>
-              <a:t>最新評価では、説明付き確認支援ツールとしてかなり使える水準に近づいた</a:t>
+              <a:t>2026-04-01 の初期版から、2026-04-11 の最新 rerun で大幅に改善した</a:t>
             </a:r>
           </a:p>
         </p:txBody>
@@ -10564,16 +11378,85 @@
           </a:p>
         </p:txBody>
       </p:sp>
-      <p:sp>
-        <p:nvSpPr>
-          <p:cNvPr id="5" name="Rounded Rectangle 4"/>
+      <p:pic>
+        <p:nvPicPr>
+          <p:cNvPr id="5" name="Picture 4" descr="evaluation_dashboard.png"/>
+          <p:cNvPicPr>
+            <a:picLocks noChangeAspect="1"/>
+          </p:cNvPicPr>
+          <p:nvPr/>
+        </p:nvPicPr>
+        <p:blipFill>
+          <a:blip r:embed="rId2"/>
+          <a:stretch>
+            <a:fillRect/>
+          </a:stretch>
+        </p:blipFill>
+        <p:spPr>
+          <a:xfrm>
+            <a:off x="658368" y="1772107"/>
+            <a:ext cx="6583680" cy="4081881"/>
+          </a:xfrm>
+          <a:prstGeom prst="rect">
+            <a:avLst/>
+          </a:prstGeom>
+        </p:spPr>
+      </p:pic>
+      <p:sp>
+        <p:nvSpPr>
+          <p:cNvPr id="6" name="Rounded Rectangle 5"/>
           <p:cNvSpPr/>
           <p:nvPr/>
         </p:nvSpPr>
         <p:spPr>
           <a:xfrm>
-            <a:off x="804672" y="1664208"/>
-            <a:ext cx="3246120" cy="932688"/>
+            <a:off x="7406640" y="1481328"/>
+            <a:ext cx="3886200" cy="4617720"/>
+          </a:xfrm>
+          <a:prstGeom prst="roundRect">
+            <a:avLst/>
+          </a:prstGeom>
+          <a:solidFill>
+            <a:srgbClr val="F3EEE5"/>
+          </a:solidFill>
+          <a:ln w="14604">
+            <a:solidFill>
+              <a:srgbClr val="D9D3CA"/>
+            </a:solidFill>
+          </a:ln>
+        </p:spPr>
+        <p:style>
+          <a:lnRef idx="1">
+            <a:schemeClr val="accent1"/>
+          </a:lnRef>
+          <a:fillRef idx="3">
+            <a:schemeClr val="accent1"/>
+          </a:fillRef>
+          <a:effectRef idx="2">
+            <a:schemeClr val="accent1"/>
+          </a:effectRef>
+          <a:fontRef idx="minor">
+            <a:schemeClr val="lt1"/>
+          </a:fontRef>
+        </p:style>
+        <p:txBody>
+          <a:bodyPr rtlCol="0" anchor="ctr"/>
+          <a:lstStyle/>
+          <a:p>
+            <a:pPr algn="ctr"/>
+          </a:p>
+        </p:txBody>
+      </p:sp>
+      <p:sp>
+        <p:nvSpPr>
+          <p:cNvPr id="7" name="Rounded Rectangle 6"/>
+          <p:cNvSpPr/>
+          <p:nvPr/>
+        </p:nvSpPr>
+        <p:spPr>
+          <a:xfrm>
+            <a:off x="7626096" y="1792224"/>
+            <a:ext cx="1508760" cy="749808"/>
           </a:xfrm>
           <a:prstGeom prst="roundRect">
             <a:avLst/>
@@ -10611,14 +11494,14 @@
       </p:sp>
       <p:sp>
         <p:nvSpPr>
-          <p:cNvPr id="6" name="Rectangle 5"/>
+          <p:cNvPr id="8" name="Rectangle 7"/>
           <p:cNvSpPr/>
           <p:nvPr/>
         </p:nvSpPr>
         <p:spPr>
           <a:xfrm>
-            <a:off x="804672" y="1664208"/>
-            <a:ext cx="3246120" cy="73152"/>
+            <a:off x="7626096" y="1792224"/>
+            <a:ext cx="1508760" cy="73152"/>
           </a:xfrm>
           <a:prstGeom prst="rect">
             <a:avLst/>
@@ -10654,14 +11537,14 @@
       </p:sp>
       <p:sp>
         <p:nvSpPr>
-          <p:cNvPr id="7" name="TextBox 6"/>
+          <p:cNvPr id="9" name="TextBox 8"/>
           <p:cNvSpPr txBox="1"/>
           <p:nvPr/>
         </p:nvSpPr>
         <p:spPr>
           <a:xfrm>
-            <a:off x="941832" y="1828800"/>
-            <a:ext cx="2971800" cy="201168"/>
+            <a:off x="7763256" y="1956816"/>
+            <a:ext cx="1234440" cy="201168"/>
           </a:xfrm>
           <a:prstGeom prst="rect">
             <a:avLst/>
@@ -10682,21 +11565,21 @@
                 </a:solidFill>
                 <a:latin typeface="Yu Gothic"/>
               </a:rPr>
-              <a:t>個人向け</a:t>
-            </a:r>
-          </a:p>
-        </p:txBody>
-      </p:sp>
-      <p:sp>
-        <p:nvSpPr>
-          <p:cNvPr id="8" name="TextBox 7"/>
+              <a:t>Accuracy</a:t>
+            </a:r>
+          </a:p>
+        </p:txBody>
+      </p:sp>
+      <p:sp>
+        <p:nvSpPr>
+          <p:cNvPr id="10" name="TextBox 9"/>
           <p:cNvSpPr txBox="1"/>
           <p:nvPr/>
         </p:nvSpPr>
         <p:spPr>
           <a:xfrm>
-            <a:off x="941832" y="2048256"/>
-            <a:ext cx="2971800" cy="320040"/>
+            <a:off x="7763256" y="2176272"/>
+            <a:ext cx="1234440" cy="320040"/>
           </a:xfrm>
           <a:prstGeom prst="rect">
             <a:avLst/>
@@ -10717,21 +11600,21 @@
                 </a:solidFill>
                 <a:latin typeface="Yu Gothic"/>
               </a:rPr>
-              <a:t>投稿前セルフチェック</a:t>
-            </a:r>
-          </a:p>
-        </p:txBody>
-      </p:sp>
-      <p:sp>
-        <p:nvSpPr>
-          <p:cNvPr id="9" name="Rounded Rectangle 8"/>
+              <a:t>0.370 -&gt; 0.840</a:t>
+            </a:r>
+          </a:p>
+        </p:txBody>
+      </p:sp>
+      <p:sp>
+        <p:nvSpPr>
+          <p:cNvPr id="11" name="Rounded Rectangle 10"/>
           <p:cNvSpPr/>
           <p:nvPr/>
         </p:nvSpPr>
         <p:spPr>
           <a:xfrm>
-            <a:off x="4462272" y="1664208"/>
-            <a:ext cx="3246120" cy="932688"/>
+            <a:off x="9235440" y="1792224"/>
+            <a:ext cx="1508760" cy="749808"/>
           </a:xfrm>
           <a:prstGeom prst="roundRect">
             <a:avLst/>
@@ -10769,14 +11652,14 @@
       </p:sp>
       <p:sp>
         <p:nvSpPr>
-          <p:cNvPr id="10" name="Rectangle 9"/>
+          <p:cNvPr id="12" name="Rectangle 11"/>
           <p:cNvSpPr/>
           <p:nvPr/>
         </p:nvSpPr>
         <p:spPr>
           <a:xfrm>
-            <a:off x="4462272" y="1664208"/>
-            <a:ext cx="3246120" cy="73152"/>
+            <a:off x="9235440" y="1792224"/>
+            <a:ext cx="1508760" cy="73152"/>
           </a:xfrm>
           <a:prstGeom prst="rect">
             <a:avLst/>
@@ -10812,14 +11695,14 @@
       </p:sp>
       <p:sp>
         <p:nvSpPr>
-          <p:cNvPr id="11" name="TextBox 10"/>
+          <p:cNvPr id="13" name="TextBox 12"/>
           <p:cNvSpPr txBox="1"/>
           <p:nvPr/>
         </p:nvSpPr>
         <p:spPr>
           <a:xfrm>
-            <a:off x="4599432" y="1828800"/>
-            <a:ext cx="2971800" cy="201168"/>
+            <a:off x="9372600" y="1956816"/>
+            <a:ext cx="1234440" cy="201168"/>
           </a:xfrm>
           <a:prstGeom prst="rect">
             <a:avLst/>
@@ -10840,21 +11723,21 @@
                 </a:solidFill>
                 <a:latin typeface="Yu Gothic"/>
               </a:rPr>
-              <a:t>組織向け</a:t>
-            </a:r>
-          </a:p>
-        </p:txBody>
-      </p:sp>
-      <p:sp>
-        <p:nvSpPr>
-          <p:cNvPr id="12" name="TextBox 11"/>
+              <a:t>Macro F1</a:t>
+            </a:r>
+          </a:p>
+        </p:txBody>
+      </p:sp>
+      <p:sp>
+        <p:nvSpPr>
+          <p:cNvPr id="14" name="TextBox 13"/>
           <p:cNvSpPr txBox="1"/>
           <p:nvPr/>
         </p:nvSpPr>
         <p:spPr>
           <a:xfrm>
-            <a:off x="4599432" y="2048256"/>
-            <a:ext cx="2971800" cy="320040"/>
+            <a:off x="9372600" y="2176272"/>
+            <a:ext cx="1234440" cy="320040"/>
           </a:xfrm>
           <a:prstGeom prst="rect">
             <a:avLst/>
@@ -10875,21 +11758,179 @@
                 </a:solidFill>
                 <a:latin typeface="Yu Gothic"/>
               </a:rPr>
-              <a:t>一次仕分けと優先順位付け</a:t>
-            </a:r>
-          </a:p>
-        </p:txBody>
-      </p:sp>
-      <p:sp>
-        <p:nvSpPr>
-          <p:cNvPr id="13" name="Rounded Rectangle 12"/>
+              <a:t>0.266 -&gt; 0.837</a:t>
+            </a:r>
+          </a:p>
+        </p:txBody>
+      </p:sp>
+      <p:sp>
+        <p:nvSpPr>
+          <p:cNvPr id="15" name="Rounded Rectangle 14"/>
           <p:cNvSpPr/>
           <p:nvPr/>
         </p:nvSpPr>
         <p:spPr>
           <a:xfrm>
-            <a:off x="8119872" y="1664208"/>
-            <a:ext cx="3182112" cy="932688"/>
+            <a:off x="7626096" y="2743200"/>
+            <a:ext cx="1508760" cy="749808"/>
+          </a:xfrm>
+          <a:prstGeom prst="roundRect">
+            <a:avLst/>
+          </a:prstGeom>
+          <a:solidFill>
+            <a:srgbClr val="FFFFFF"/>
+          </a:solidFill>
+          <a:ln w="14604">
+            <a:solidFill>
+              <a:srgbClr val="B53D3D"/>
+            </a:solidFill>
+          </a:ln>
+        </p:spPr>
+        <p:style>
+          <a:lnRef idx="1">
+            <a:schemeClr val="accent1"/>
+          </a:lnRef>
+          <a:fillRef idx="3">
+            <a:schemeClr val="accent1"/>
+          </a:fillRef>
+          <a:effectRef idx="2">
+            <a:schemeClr val="accent1"/>
+          </a:effectRef>
+          <a:fontRef idx="minor">
+            <a:schemeClr val="lt1"/>
+          </a:fontRef>
+        </p:style>
+        <p:txBody>
+          <a:bodyPr rtlCol="0" anchor="ctr"/>
+          <a:lstStyle/>
+          <a:p>
+            <a:pPr algn="ctr"/>
+          </a:p>
+        </p:txBody>
+      </p:sp>
+      <p:sp>
+        <p:nvSpPr>
+          <p:cNvPr id="16" name="Rectangle 15"/>
+          <p:cNvSpPr/>
+          <p:nvPr/>
+        </p:nvSpPr>
+        <p:spPr>
+          <a:xfrm>
+            <a:off x="7626096" y="2743200"/>
+            <a:ext cx="1508760" cy="73152"/>
+          </a:xfrm>
+          <a:prstGeom prst="rect">
+            <a:avLst/>
+          </a:prstGeom>
+          <a:solidFill>
+            <a:srgbClr val="B53D3D"/>
+          </a:solidFill>
+          <a:ln>
+            <a:noFill/>
+          </a:ln>
+        </p:spPr>
+        <p:style>
+          <a:lnRef idx="1">
+            <a:schemeClr val="accent1"/>
+          </a:lnRef>
+          <a:fillRef idx="3">
+            <a:schemeClr val="accent1"/>
+          </a:fillRef>
+          <a:effectRef idx="2">
+            <a:schemeClr val="accent1"/>
+          </a:effectRef>
+          <a:fontRef idx="minor">
+            <a:schemeClr val="lt1"/>
+          </a:fontRef>
+        </p:style>
+        <p:txBody>
+          <a:bodyPr rtlCol="0" anchor="ctr"/>
+          <a:lstStyle/>
+          <a:p>
+            <a:pPr algn="ctr"/>
+          </a:p>
+        </p:txBody>
+      </p:sp>
+      <p:sp>
+        <p:nvSpPr>
+          <p:cNvPr id="17" name="TextBox 16"/>
+          <p:cNvSpPr txBox="1"/>
+          <p:nvPr/>
+        </p:nvSpPr>
+        <p:spPr>
+          <a:xfrm>
+            <a:off x="7763256" y="2907792"/>
+            <a:ext cx="1234440" cy="201168"/>
+          </a:xfrm>
+          <a:prstGeom prst="rect">
+            <a:avLst/>
+          </a:prstGeom>
+          <a:noFill/>
+        </p:spPr>
+        <p:txBody>
+          <a:bodyPr wrap="square" lIns="25400" rIns="25400" tIns="12700" bIns="12700">
+            <a:spAutoFit/>
+          </a:bodyPr>
+          <a:lstStyle/>
+          <a:p>
+            <a:pPr algn="l"/>
+            <a:r>
+              <a:rPr sz="1200" b="0">
+                <a:solidFill>
+                  <a:srgbClr val="626B76"/>
+                </a:solidFill>
+                <a:latin typeface="Yu Gothic"/>
+              </a:rPr>
+              <a:t>誤り Recall</a:t>
+            </a:r>
+          </a:p>
+        </p:txBody>
+      </p:sp>
+      <p:sp>
+        <p:nvSpPr>
+          <p:cNvPr id="18" name="TextBox 17"/>
+          <p:cNvSpPr txBox="1"/>
+          <p:nvPr/>
+        </p:nvSpPr>
+        <p:spPr>
+          <a:xfrm>
+            <a:off x="7763256" y="3127248"/>
+            <a:ext cx="1234440" cy="320040"/>
+          </a:xfrm>
+          <a:prstGeom prst="rect">
+            <a:avLst/>
+          </a:prstGeom>
+          <a:noFill/>
+        </p:spPr>
+        <p:txBody>
+          <a:bodyPr wrap="square" lIns="25400" rIns="25400" tIns="12700" bIns="12700">
+            <a:spAutoFit/>
+          </a:bodyPr>
+          <a:lstStyle/>
+          <a:p>
+            <a:pPr algn="l"/>
+            <a:r>
+              <a:rPr sz="2200" b="1">
+                <a:solidFill>
+                  <a:srgbClr val="1F2A34"/>
+                </a:solidFill>
+                <a:latin typeface="Yu Gothic"/>
+              </a:rPr>
+              <a:t>0.000 -&gt; 0.800</a:t>
+            </a:r>
+          </a:p>
+        </p:txBody>
+      </p:sp>
+      <p:sp>
+        <p:nvSpPr>
+          <p:cNvPr id="19" name="Rounded Rectangle 18"/>
+          <p:cNvSpPr/>
+          <p:nvPr/>
+        </p:nvSpPr>
+        <p:spPr>
+          <a:xfrm>
+            <a:off x="9235440" y="2743200"/>
+            <a:ext cx="1508760" cy="749808"/>
           </a:xfrm>
           <a:prstGeom prst="roundRect">
             <a:avLst/>
@@ -10927,14 +11968,14 @@
       </p:sp>
       <p:sp>
         <p:nvSpPr>
-          <p:cNvPr id="14" name="Rectangle 13"/>
+          <p:cNvPr id="20" name="Rectangle 19"/>
           <p:cNvSpPr/>
           <p:nvPr/>
         </p:nvSpPr>
         <p:spPr>
           <a:xfrm>
-            <a:off x="8119872" y="1664208"/>
-            <a:ext cx="3182112" cy="73152"/>
+            <a:off x="9235440" y="2743200"/>
+            <a:ext cx="1508760" cy="73152"/>
           </a:xfrm>
           <a:prstGeom prst="rect">
             <a:avLst/>
@@ -10970,14 +12011,14 @@
       </p:sp>
       <p:sp>
         <p:nvSpPr>
-          <p:cNvPr id="15" name="TextBox 14"/>
+          <p:cNvPr id="21" name="TextBox 20"/>
           <p:cNvSpPr txBox="1"/>
           <p:nvPr/>
         </p:nvSpPr>
         <p:spPr>
           <a:xfrm>
-            <a:off x="8257032" y="1828800"/>
-            <a:ext cx="2907792" cy="201168"/>
+            <a:off x="9372600" y="2907792"/>
+            <a:ext cx="1234440" cy="201168"/>
           </a:xfrm>
           <a:prstGeom prst="rect">
             <a:avLst/>
@@ -10998,21 +12039,21 @@
                 </a:solidFill>
                 <a:latin typeface="Yu Gothic"/>
               </a:rPr>
-              <a:t>教育向け</a:t>
-            </a:r>
-          </a:p>
-        </p:txBody>
-      </p:sp>
-      <p:sp>
-        <p:nvSpPr>
-          <p:cNvPr id="16" name="TextBox 15"/>
+              <a:t>Binary F1</a:t>
+            </a:r>
+          </a:p>
+        </p:txBody>
+      </p:sp>
+      <p:sp>
+        <p:nvSpPr>
+          <p:cNvPr id="22" name="TextBox 21"/>
           <p:cNvSpPr txBox="1"/>
           <p:nvPr/>
         </p:nvSpPr>
         <p:spPr>
           <a:xfrm>
-            <a:off x="8257032" y="2048256"/>
-            <a:ext cx="2907792" cy="320040"/>
+            <a:off x="9372600" y="3127248"/>
+            <a:ext cx="1234440" cy="320040"/>
           </a:xfrm>
           <a:prstGeom prst="rect">
             <a:avLst/>
@@ -11033,31 +12074,31 @@
                 </a:solidFill>
                 <a:latin typeface="Yu Gothic"/>
               </a:rPr>
-              <a:t>メディアリテラシー支援</a:t>
-            </a:r>
-          </a:p>
-        </p:txBody>
-      </p:sp>
-      <p:sp>
-        <p:nvSpPr>
-          <p:cNvPr id="17" name="Rounded Rectangle 16"/>
+              <a:t>0.889</a:t>
+            </a:r>
+          </a:p>
+        </p:txBody>
+      </p:sp>
+      <p:sp>
+        <p:nvSpPr>
+          <p:cNvPr id="23" name="Rounded Rectangle 22"/>
           <p:cNvSpPr/>
           <p:nvPr/>
         </p:nvSpPr>
         <p:spPr>
           <a:xfrm>
-            <a:off x="804672" y="2926080"/>
-            <a:ext cx="10469880" cy="2743200"/>
+            <a:off x="7626096" y="3694176"/>
+            <a:ext cx="1508760" cy="749808"/>
           </a:xfrm>
           <a:prstGeom prst="roundRect">
             <a:avLst/>
           </a:prstGeom>
           <a:solidFill>
-            <a:srgbClr val="F3EEE5"/>
+            <a:srgbClr val="FFFFFF"/>
           </a:solidFill>
           <a:ln w="14604">
             <a:solidFill>
-              <a:srgbClr val="D9D3CA"/>
+              <a:srgbClr val="13767A"/>
             </a:solidFill>
           </a:ln>
         </p:spPr>
@@ -11085,14 +12126,285 @@
       </p:sp>
       <p:sp>
         <p:nvSpPr>
-          <p:cNvPr id="18" name="TextBox 17"/>
+          <p:cNvPr id="24" name="Rectangle 23"/>
+          <p:cNvSpPr/>
+          <p:nvPr/>
+        </p:nvSpPr>
+        <p:spPr>
+          <a:xfrm>
+            <a:off x="7626096" y="3694176"/>
+            <a:ext cx="1508760" cy="73152"/>
+          </a:xfrm>
+          <a:prstGeom prst="rect">
+            <a:avLst/>
+          </a:prstGeom>
+          <a:solidFill>
+            <a:srgbClr val="13767A"/>
+          </a:solidFill>
+          <a:ln>
+            <a:noFill/>
+          </a:ln>
+        </p:spPr>
+        <p:style>
+          <a:lnRef idx="1">
+            <a:schemeClr val="accent1"/>
+          </a:lnRef>
+          <a:fillRef idx="3">
+            <a:schemeClr val="accent1"/>
+          </a:fillRef>
+          <a:effectRef idx="2">
+            <a:schemeClr val="accent1"/>
+          </a:effectRef>
+          <a:fontRef idx="minor">
+            <a:schemeClr val="lt1"/>
+          </a:fontRef>
+        </p:style>
+        <p:txBody>
+          <a:bodyPr rtlCol="0" anchor="ctr"/>
+          <a:lstStyle/>
+          <a:p>
+            <a:pPr algn="ctr"/>
+          </a:p>
+        </p:txBody>
+      </p:sp>
+      <p:sp>
+        <p:nvSpPr>
+          <p:cNvPr id="25" name="TextBox 24"/>
           <p:cNvSpPr txBox="1"/>
           <p:nvPr/>
         </p:nvSpPr>
         <p:spPr>
           <a:xfrm>
-            <a:off x="1051560" y="3200400"/>
-            <a:ext cx="9966960" cy="2011680"/>
+            <a:off x="7763256" y="3858768"/>
+            <a:ext cx="1234440" cy="201168"/>
+          </a:xfrm>
+          <a:prstGeom prst="rect">
+            <a:avLst/>
+          </a:prstGeom>
+          <a:noFill/>
+        </p:spPr>
+        <p:txBody>
+          <a:bodyPr wrap="square" lIns="25400" rIns="25400" tIns="12700" bIns="12700">
+            <a:spAutoFit/>
+          </a:bodyPr>
+          <a:lstStyle/>
+          <a:p>
+            <a:pPr algn="l"/>
+            <a:r>
+              <a:rPr sz="1200" b="0">
+                <a:solidFill>
+                  <a:srgbClr val="626B76"/>
+                </a:solidFill>
+                <a:latin typeface="Yu Gothic"/>
+              </a:rPr>
+              <a:t>Mismatches</a:t>
+            </a:r>
+          </a:p>
+        </p:txBody>
+      </p:sp>
+      <p:sp>
+        <p:nvSpPr>
+          <p:cNvPr id="26" name="TextBox 25"/>
+          <p:cNvSpPr txBox="1"/>
+          <p:nvPr/>
+        </p:nvSpPr>
+        <p:spPr>
+          <a:xfrm>
+            <a:off x="7763256" y="4078224"/>
+            <a:ext cx="1234440" cy="320040"/>
+          </a:xfrm>
+          <a:prstGeom prst="rect">
+            <a:avLst/>
+          </a:prstGeom>
+          <a:noFill/>
+        </p:spPr>
+        <p:txBody>
+          <a:bodyPr wrap="square" lIns="25400" rIns="25400" tIns="12700" bIns="12700">
+            <a:spAutoFit/>
+          </a:bodyPr>
+          <a:lstStyle/>
+          <a:p>
+            <a:pPr algn="l"/>
+            <a:r>
+              <a:rPr sz="2200" b="1">
+                <a:solidFill>
+                  <a:srgbClr val="1F2A34"/>
+                </a:solidFill>
+                <a:latin typeface="Yu Gothic"/>
+              </a:rPr>
+              <a:t>63 -&gt; 16</a:t>
+            </a:r>
+          </a:p>
+        </p:txBody>
+      </p:sp>
+      <p:sp>
+        <p:nvSpPr>
+          <p:cNvPr id="27" name="Rounded Rectangle 26"/>
+          <p:cNvSpPr/>
+          <p:nvPr/>
+        </p:nvSpPr>
+        <p:spPr>
+          <a:xfrm>
+            <a:off x="9235440" y="3694176"/>
+            <a:ext cx="1508760" cy="749808"/>
+          </a:xfrm>
+          <a:prstGeom prst="roundRect">
+            <a:avLst/>
+          </a:prstGeom>
+          <a:solidFill>
+            <a:srgbClr val="FFFFFF"/>
+          </a:solidFill>
+          <a:ln w="14604">
+            <a:solidFill>
+              <a:srgbClr val="C96D31"/>
+            </a:solidFill>
+          </a:ln>
+        </p:spPr>
+        <p:style>
+          <a:lnRef idx="1">
+            <a:schemeClr val="accent1"/>
+          </a:lnRef>
+          <a:fillRef idx="3">
+            <a:schemeClr val="accent1"/>
+          </a:fillRef>
+          <a:effectRef idx="2">
+            <a:schemeClr val="accent1"/>
+          </a:effectRef>
+          <a:fontRef idx="minor">
+            <a:schemeClr val="lt1"/>
+          </a:fontRef>
+        </p:style>
+        <p:txBody>
+          <a:bodyPr rtlCol="0" anchor="ctr"/>
+          <a:lstStyle/>
+          <a:p>
+            <a:pPr algn="ctr"/>
+          </a:p>
+        </p:txBody>
+      </p:sp>
+      <p:sp>
+        <p:nvSpPr>
+          <p:cNvPr id="28" name="Rectangle 27"/>
+          <p:cNvSpPr/>
+          <p:nvPr/>
+        </p:nvSpPr>
+        <p:spPr>
+          <a:xfrm>
+            <a:off x="9235440" y="3694176"/>
+            <a:ext cx="1508760" cy="73152"/>
+          </a:xfrm>
+          <a:prstGeom prst="rect">
+            <a:avLst/>
+          </a:prstGeom>
+          <a:solidFill>
+            <a:srgbClr val="C96D31"/>
+          </a:solidFill>
+          <a:ln>
+            <a:noFill/>
+          </a:ln>
+        </p:spPr>
+        <p:style>
+          <a:lnRef idx="1">
+            <a:schemeClr val="accent1"/>
+          </a:lnRef>
+          <a:fillRef idx="3">
+            <a:schemeClr val="accent1"/>
+          </a:fillRef>
+          <a:effectRef idx="2">
+            <a:schemeClr val="accent1"/>
+          </a:effectRef>
+          <a:fontRef idx="minor">
+            <a:schemeClr val="lt1"/>
+          </a:fontRef>
+        </p:style>
+        <p:txBody>
+          <a:bodyPr rtlCol="0" anchor="ctr"/>
+          <a:lstStyle/>
+          <a:p>
+            <a:pPr algn="ctr"/>
+          </a:p>
+        </p:txBody>
+      </p:sp>
+      <p:sp>
+        <p:nvSpPr>
+          <p:cNvPr id="29" name="TextBox 28"/>
+          <p:cNvSpPr txBox="1"/>
+          <p:nvPr/>
+        </p:nvSpPr>
+        <p:spPr>
+          <a:xfrm>
+            <a:off x="9372600" y="3858768"/>
+            <a:ext cx="1234440" cy="201168"/>
+          </a:xfrm>
+          <a:prstGeom prst="rect">
+            <a:avLst/>
+          </a:prstGeom>
+          <a:noFill/>
+        </p:spPr>
+        <p:txBody>
+          <a:bodyPr wrap="square" lIns="25400" rIns="25400" tIns="12700" bIns="12700">
+            <a:spAutoFit/>
+          </a:bodyPr>
+          <a:lstStyle/>
+          <a:p>
+            <a:pPr algn="l"/>
+            <a:r>
+              <a:rPr sz="1200" b="0">
+                <a:solidFill>
+                  <a:srgbClr val="626B76"/>
+                </a:solidFill>
+                <a:latin typeface="Yu Gothic"/>
+              </a:rPr>
+              <a:t>All cases</a:t>
+            </a:r>
+          </a:p>
+        </p:txBody>
+      </p:sp>
+      <p:sp>
+        <p:nvSpPr>
+          <p:cNvPr id="30" name="TextBox 29"/>
+          <p:cNvSpPr txBox="1"/>
+          <p:nvPr/>
+        </p:nvSpPr>
+        <p:spPr>
+          <a:xfrm>
+            <a:off x="9372600" y="4078224"/>
+            <a:ext cx="1234440" cy="320040"/>
+          </a:xfrm>
+          <a:prstGeom prst="rect">
+            <a:avLst/>
+          </a:prstGeom>
+          <a:noFill/>
+        </p:spPr>
+        <p:txBody>
+          <a:bodyPr wrap="square" lIns="25400" rIns="25400" tIns="12700" bIns="12700">
+            <a:spAutoFit/>
+          </a:bodyPr>
+          <a:lstStyle/>
+          <a:p>
+            <a:pPr algn="l"/>
+            <a:r>
+              <a:rPr sz="2200" b="1">
+                <a:solidFill>
+                  <a:srgbClr val="1F2A34"/>
+                </a:solidFill>
+                <a:latin typeface="Yu Gothic"/>
+              </a:rPr>
+              <a:t>100/100</a:t>
+            </a:r>
+          </a:p>
+        </p:txBody>
+      </p:sp>
+      <p:sp>
+        <p:nvSpPr>
+          <p:cNvPr id="31" name="TextBox 30"/>
+          <p:cNvSpPr txBox="1"/>
+          <p:nvPr/>
+        </p:nvSpPr>
+        <p:spPr>
+          <a:xfrm>
+            <a:off x="7571231" y="4663440"/>
+            <a:ext cx="3337560" cy="1051560"/>
           </a:xfrm>
           <a:prstGeom prst="rect">
             <a:avLst/>
@@ -11111,13 +12423,13 @@
               </a:spcAft>
             </a:pPr>
             <a:r>
-              <a:rPr sz="1800">
+              <a:rPr sz="1500">
                 <a:solidFill>
                   <a:srgbClr val="1F2A34"/>
                 </a:solidFill>
                 <a:latin typeface="Yu Gothic"/>
               </a:rPr>
-              <a:t>最新 rerun では Accuracy 84.0%、Binary F1 0.889 まで到達し、『全く使えない』段階は抜けた</a:t>
+              <a:t>Accuracy は 0.370 から 0.840 まで改善</a:t>
             </a:r>
           </a:p>
           <a:p>
@@ -11127,13 +12439,13 @@
               </a:spcAft>
             </a:pPr>
             <a:r>
-              <a:rPr sz="1800">
+              <a:rPr sz="1500">
                 <a:solidFill>
                   <a:srgbClr val="1F2A34"/>
                 </a:solidFill>
                 <a:latin typeface="Yu Gothic"/>
               </a:rPr>
-              <a:t>5区分 verdict に加え、理由・確認リンク・attention score を返すので、利用者が次の確認行動を取りやすい</a:t>
+              <a:t>誤り recall も 0.000 から 0.800 へ回復</a:t>
             </a:r>
           </a:p>
           <a:p>
@@ -11143,36 +12455,20 @@
               </a:spcAft>
             </a:pPr>
             <a:r>
-              <a:rPr sz="1800">
+              <a:rPr sz="1500">
                 <a:solidFill>
                   <a:srgbClr val="1F2A34"/>
                 </a:solidFill>
                 <a:latin typeface="Yu Gothic"/>
               </a:rPr>
-              <a:t>自治体、学校、メディア運用では『まず人が見るべき候補』を絞る補助として使える</a:t>
-            </a:r>
-          </a:p>
-          <a:p>
-            <a:pPr algn="l">
-              <a:spcAft>
-                <a:spcPts val="700"/>
-              </a:spcAft>
-            </a:pPr>
-            <a:r>
-              <a:rPr sz="1800">
-                <a:solidFill>
-                  <a:srgbClr val="1F2A34"/>
-                </a:solidFill>
-                <a:latin typeface="Yu Gothic"/>
-              </a:rPr>
-              <a:t>ただし最終断定を完全自動化するには、ほぼ正確境界と誤り recall をもう一段伸ばす必要がある</a:t>
-            </a:r>
-          </a:p>
-        </p:txBody>
-      </p:sp>
-      <p:sp>
-        <p:nvSpPr>
-          <p:cNvPr id="19" name="TextBox 18"/>
+              <a:t>残る課題は『ほぼ正確』境界と誤りの押し切り</a:t>
+            </a:r>
+          </a:p>
+        </p:txBody>
+      </p:sp>
+      <p:sp>
+        <p:nvSpPr>
+          <p:cNvPr id="32" name="TextBox 31"/>
           <p:cNvSpPr txBox="1"/>
           <p:nvPr/>
         </p:nvSpPr>
@@ -11261,7 +12557,7 @@
                 </a:solidFill>
                 <a:latin typeface="Yu Gothic"/>
               </a:rPr>
-              <a:t>6. 工夫点</a:t>
+              <a:t>4. 考察</a:t>
             </a:r>
           </a:p>
         </p:txBody>
@@ -11296,7 +12592,7 @@
                 </a:solidFill>
                 <a:latin typeface="Yu Gothic"/>
               </a:rPr>
-              <a:t>評価可能な形に落とし込み、レビューしやすい運用まで整えた</a:t>
+              <a:t>現在の Ver2 はかなり実用的だが、境界ラベルの調整はまだ必要</a:t>
             </a:r>
           </a:p>
         </p:txBody>
@@ -11344,16 +12640,40 @@
           </a:p>
         </p:txBody>
       </p:sp>
-      <p:sp>
-        <p:nvSpPr>
-          <p:cNvPr id="5" name="Rounded Rectangle 4"/>
+      <p:pic>
+        <p:nvPicPr>
+          <p:cNvPr id="5" name="Picture 4" descr="confusion_matrix.png"/>
+          <p:cNvPicPr>
+            <a:picLocks noChangeAspect="1"/>
+          </p:cNvPicPr>
+          <p:nvPr/>
+        </p:nvPicPr>
+        <p:blipFill>
+          <a:blip r:embed="rId2"/>
+          <a:stretch>
+            <a:fillRect/>
+          </a:stretch>
+        </p:blipFill>
+        <p:spPr>
+          <a:xfrm>
+            <a:off x="685800" y="1771237"/>
+            <a:ext cx="5303520" cy="4165918"/>
+          </a:xfrm>
+          <a:prstGeom prst="rect">
+            <a:avLst/>
+          </a:prstGeom>
+        </p:spPr>
+      </p:pic>
+      <p:sp>
+        <p:nvSpPr>
+          <p:cNvPr id="6" name="Rounded Rectangle 5"/>
           <p:cNvSpPr/>
           <p:nvPr/>
         </p:nvSpPr>
         <p:spPr>
           <a:xfrm>
-            <a:off x="676656" y="1481328"/>
-            <a:ext cx="5394960" cy="4526280"/>
+            <a:off x="6144768" y="1591056"/>
+            <a:ext cx="5074920" cy="4526280"/>
           </a:xfrm>
           <a:prstGeom prst="roundRect">
             <a:avLst/>
@@ -11391,59 +12711,14 @@
       </p:sp>
       <p:sp>
         <p:nvSpPr>
-          <p:cNvPr id="6" name="Rounded Rectangle 5"/>
-          <p:cNvSpPr/>
-          <p:nvPr/>
-        </p:nvSpPr>
-        <p:spPr>
-          <a:xfrm>
-            <a:off x="6272784" y="1481328"/>
-            <a:ext cx="5212080" cy="4526280"/>
-          </a:xfrm>
-          <a:prstGeom prst="roundRect">
-            <a:avLst/>
-          </a:prstGeom>
-          <a:solidFill>
-            <a:srgbClr val="EAF3F1"/>
-          </a:solidFill>
-          <a:ln w="14604">
-            <a:solidFill>
-              <a:srgbClr val="D9D3CA"/>
-            </a:solidFill>
-          </a:ln>
-        </p:spPr>
-        <p:style>
-          <a:lnRef idx="1">
-            <a:schemeClr val="accent1"/>
-          </a:lnRef>
-          <a:fillRef idx="3">
-            <a:schemeClr val="accent1"/>
-          </a:fillRef>
-          <a:effectRef idx="2">
-            <a:schemeClr val="accent1"/>
-          </a:effectRef>
-          <a:fontRef idx="minor">
-            <a:schemeClr val="lt1"/>
-          </a:fontRef>
-        </p:style>
-        <p:txBody>
-          <a:bodyPr rtlCol="0" anchor="ctr"/>
-          <a:lstStyle/>
-          <a:p>
-            <a:pPr algn="ctr"/>
-          </a:p>
-        </p:txBody>
-      </p:sp>
-      <p:sp>
-        <p:nvSpPr>
           <p:cNvPr id="7" name="TextBox 6"/>
           <p:cNvSpPr txBox="1"/>
           <p:nvPr/>
         </p:nvSpPr>
         <p:spPr>
           <a:xfrm>
-            <a:off x="914400" y="1755648"/>
-            <a:ext cx="2011680" cy="274320"/>
+            <a:off x="6400800" y="1828800"/>
+            <a:ext cx="2560320" cy="274320"/>
           </a:xfrm>
           <a:prstGeom prst="rect">
             <a:avLst/>
@@ -11460,11 +12735,11 @@
             <a:r>
               <a:rPr sz="2000" b="1">
                 <a:solidFill>
-                  <a:srgbClr val="13767A"/>
-                </a:solidFill>
-                <a:latin typeface="Yu Gothic"/>
-              </a:rPr>
-              <a:t>設計面の工夫</a:t>
+                  <a:srgbClr val="C96D31"/>
+                </a:solidFill>
+                <a:latin typeface="Yu Gothic"/>
+              </a:rPr>
+              <a:t>主な誤判定</a:t>
             </a:r>
           </a:p>
         </p:txBody>
@@ -11477,8 +12752,8 @@
         </p:nvSpPr>
         <p:spPr>
           <a:xfrm>
-            <a:off x="896112" y="2066543"/>
-            <a:ext cx="4663440" cy="1965960"/>
+            <a:off x="6364224" y="2139696"/>
+            <a:ext cx="4434840" cy="1143000"/>
           </a:xfrm>
           <a:prstGeom prst="rect">
             <a:avLst/>
@@ -11503,7 +12778,7 @@
                 </a:solidFill>
                 <a:latin typeface="Yu Gothic"/>
               </a:rPr>
-              <a:t>真偽判定と書き振り評価を分離し、煽り表現だけで真偽を決めない設計にした</a:t>
+              <a:t>ほぼ正確 -&gt; 正確: 6件</a:t>
             </a:r>
           </a:p>
           <a:p>
@@ -11519,7 +12794,7 @@
                 </a:solidFill>
                 <a:latin typeface="Yu Gothic"/>
               </a:rPr>
-              <a:t>dataset_runner / evaluation / plot をつなぎ、同じ dataset で改善前後を比較できるようにした</a:t>
+              <a:t>正確 -&gt; ほぼ正確: 4件</a:t>
             </a:r>
           </a:p>
           <a:p>
@@ -11535,67 +12810,9 @@
                 </a:solidFill>
                 <a:latin typeface="Yu Gothic"/>
               </a:rPr>
-              <a:t>shared testdata を repo root に集約し、Ver2 / Ver3 / Ver4 で同じデータを参照できるようにした</a:t>
-            </a:r>
-          </a:p>
-        </p:txBody>
-      </p:sp>
-      <p:sp>
-        <p:nvSpPr>
-          <p:cNvPr id="9" name="TextBox 8"/>
-          <p:cNvSpPr txBox="1"/>
-          <p:nvPr/>
-        </p:nvSpPr>
-        <p:spPr>
-          <a:xfrm>
-            <a:off x="914400" y="4370832"/>
-            <a:ext cx="2560320" cy="274320"/>
-          </a:xfrm>
-          <a:prstGeom prst="rect">
-            <a:avLst/>
-          </a:prstGeom>
-          <a:noFill/>
-        </p:spPr>
-        <p:txBody>
-          <a:bodyPr wrap="square" lIns="25400" rIns="25400" tIns="12700" bIns="12700">
-            <a:spAutoFit/>
-          </a:bodyPr>
-          <a:lstStyle/>
-          <a:p>
-            <a:pPr algn="l"/>
-            <a:r>
-              <a:rPr sz="2000" b="1">
-                <a:solidFill>
-                  <a:srgbClr val="C96D31"/>
-                </a:solidFill>
-                <a:latin typeface="Yu Gothic"/>
-              </a:rPr>
-              <a:t>運用面の工夫</a:t>
-            </a:r>
-          </a:p>
-        </p:txBody>
-      </p:sp>
-      <p:sp>
-        <p:nvSpPr>
-          <p:cNvPr id="10" name="TextBox 9"/>
-          <p:cNvSpPr txBox="1"/>
-          <p:nvPr/>
-        </p:nvSpPr>
-        <p:spPr>
-          <a:xfrm>
-            <a:off x="896112" y="4663440"/>
-            <a:ext cx="4617720" cy="914400"/>
-          </a:xfrm>
-          <a:prstGeom prst="rect">
-            <a:avLst/>
-          </a:prstGeom>
-          <a:noFill/>
-        </p:spPr>
-        <p:txBody>
-          <a:bodyPr wrap="square" lIns="50800" rIns="50800">
-            <a:spAutoFit/>
-          </a:bodyPr>
-          <a:lstStyle/>
+              <a:t>誤り -&gt; 不正確: 4件</a:t>
+            </a:r>
+          </a:p>
           <a:p>
             <a:pPr algn="l">
               <a:spcAft>
@@ -11609,9 +12826,67 @@
                 </a:solidFill>
                 <a:latin typeface="Yu Gothic"/>
               </a:rPr>
-              <a:t>evaluation_outputs では 5 plots を必須で出す運用にした</a:t>
-            </a:r>
-          </a:p>
+              <a:t>ほぼ正確 -&gt; 不正確: 2件</a:t>
+            </a:r>
+          </a:p>
+        </p:txBody>
+      </p:sp>
+      <p:sp>
+        <p:nvSpPr>
+          <p:cNvPr id="9" name="TextBox 8"/>
+          <p:cNvSpPr txBox="1"/>
+          <p:nvPr/>
+        </p:nvSpPr>
+        <p:spPr>
+          <a:xfrm>
+            <a:off x="6400800" y="3657600"/>
+            <a:ext cx="2560320" cy="274320"/>
+          </a:xfrm>
+          <a:prstGeom prst="rect">
+            <a:avLst/>
+          </a:prstGeom>
+          <a:noFill/>
+        </p:spPr>
+        <p:txBody>
+          <a:bodyPr wrap="square" lIns="25400" rIns="25400" tIns="12700" bIns="12700">
+            <a:spAutoFit/>
+          </a:bodyPr>
+          <a:lstStyle/>
+          <a:p>
+            <a:pPr algn="l"/>
+            <a:r>
+              <a:rPr sz="2000" b="1">
+                <a:solidFill>
+                  <a:srgbClr val="13767A"/>
+                </a:solidFill>
+                <a:latin typeface="Yu Gothic"/>
+              </a:rPr>
+              <a:t>代表ケース</a:t>
+            </a:r>
+          </a:p>
+        </p:txBody>
+      </p:sp>
+      <p:sp>
+        <p:nvSpPr>
+          <p:cNvPr id="10" name="TextBox 9"/>
+          <p:cNvSpPr txBox="1"/>
+          <p:nvPr/>
+        </p:nvSpPr>
+        <p:spPr>
+          <a:xfrm>
+            <a:off x="6364224" y="3968496"/>
+            <a:ext cx="4434840" cy="1188720"/>
+          </a:xfrm>
+          <a:prstGeom prst="rect">
+            <a:avLst/>
+          </a:prstGeom>
+          <a:noFill/>
+        </p:spPr>
+        <p:txBody>
+          <a:bodyPr wrap="square" lIns="50800" rIns="50800">
+            <a:spAutoFit/>
+          </a:bodyPr>
+          <a:lstStyle/>
           <a:p>
             <a:pPr algn="l">
               <a:spcAft>
@@ -11619,13 +12894,13 @@
               </a:spcAft>
             </a:pPr>
             <a:r>
-              <a:rPr sz="1700">
+              <a:rPr sz="1500">
                 <a:solidFill>
                   <a:srgbClr val="1F2A34"/>
                 </a:solidFill>
                 <a:latin typeface="Yu Gothic"/>
               </a:rPr>
-              <a:t>predictions JSON / eval JSON / plots / CSV / XLSX を同じ timestamp フォルダへまとめた</a:t>
+              <a:t>正確 -&gt; ほぼ正確: ド・ドドンパ・ジェットコースターは骨折事故発生を受け、営業を終了した。</a:t>
             </a:r>
           </a:p>
           <a:p>
@@ -11635,471 +12910,52 @@
               </a:spcAft>
             </a:pPr>
             <a:r>
-              <a:rPr sz="1700">
+              <a:rPr sz="1500">
                 <a:solidFill>
                   <a:srgbClr val="1F2A34"/>
                 </a:solidFill>
                 <a:latin typeface="Yu Gothic"/>
               </a:rPr>
-              <a:t>プレゼン資料もスクリプトで再生成し、最新 rerun をすぐ反映できるようにした</a:t>
-            </a:r>
-          </a:p>
-        </p:txBody>
-      </p:sp>
-      <p:sp>
-        <p:nvSpPr>
-          <p:cNvPr id="11" name="Rounded Rectangle 10"/>
-          <p:cNvSpPr/>
-          <p:nvPr/>
-        </p:nvSpPr>
-        <p:spPr>
-          <a:xfrm>
-            <a:off x="6473952" y="1783080"/>
-            <a:ext cx="2011680" cy="1417320"/>
-          </a:xfrm>
-          <a:prstGeom prst="roundRect">
-            <a:avLst/>
-          </a:prstGeom>
-          <a:solidFill>
-            <a:srgbClr val="FFFFFF"/>
-          </a:solidFill>
-          <a:ln w="14604">
-            <a:solidFill>
-              <a:srgbClr val="D9D3CA"/>
-            </a:solidFill>
-          </a:ln>
-        </p:spPr>
-        <p:style>
-          <a:lnRef idx="1">
-            <a:schemeClr val="accent1"/>
-          </a:lnRef>
-          <a:fillRef idx="3">
-            <a:schemeClr val="accent1"/>
-          </a:fillRef>
-          <a:effectRef idx="2">
-            <a:schemeClr val="accent1"/>
-          </a:effectRef>
-          <a:fontRef idx="minor">
-            <a:schemeClr val="lt1"/>
-          </a:fontRef>
-        </p:style>
-        <p:txBody>
-          <a:bodyPr rtlCol="0" anchor="ctr"/>
-          <a:lstStyle/>
-          <a:p>
-            <a:pPr algn="ctr"/>
-          </a:p>
-        </p:txBody>
-      </p:sp>
-      <p:pic>
-        <p:nvPicPr>
-          <p:cNvPr id="12" name="Picture 11" descr="evaluation_dashboard.png"/>
-          <p:cNvPicPr>
-            <a:picLocks noChangeAspect="1"/>
-          </p:cNvPicPr>
-          <p:nvPr/>
-        </p:nvPicPr>
-        <p:blipFill>
-          <a:blip r:embed="rId2"/>
-          <a:stretch>
-            <a:fillRect/>
-          </a:stretch>
-        </p:blipFill>
-        <p:spPr>
-          <a:xfrm>
-            <a:off x="6547104" y="1856232"/>
-            <a:ext cx="1865376" cy="1033272"/>
-          </a:xfrm>
-          <a:prstGeom prst="rect">
-            <a:avLst/>
-          </a:prstGeom>
-        </p:spPr>
-      </p:pic>
-      <p:sp>
-        <p:nvSpPr>
-          <p:cNvPr id="13" name="TextBox 12"/>
-          <p:cNvSpPr txBox="1"/>
-          <p:nvPr/>
-        </p:nvSpPr>
-        <p:spPr>
-          <a:xfrm>
-            <a:off x="6565392" y="2953512"/>
-            <a:ext cx="1828800" cy="137160"/>
-          </a:xfrm>
-          <a:prstGeom prst="rect">
-            <a:avLst/>
-          </a:prstGeom>
-          <a:noFill/>
-        </p:spPr>
-        <p:txBody>
-          <a:bodyPr wrap="square" lIns="25400" rIns="25400" tIns="12700" bIns="12700">
-            <a:spAutoFit/>
-          </a:bodyPr>
-          <a:lstStyle/>
-          <a:p>
-            <a:pPr algn="ctr"/>
-            <a:r>
-              <a:rPr sz="1000" b="1">
-                <a:solidFill>
-                  <a:srgbClr val="626B76"/>
-                </a:solidFill>
-                <a:latin typeface="Yu Gothic"/>
-              </a:rPr>
-              <a:t>evaluation_dashboard.png</a:t>
-            </a:r>
-          </a:p>
-        </p:txBody>
-      </p:sp>
-      <p:sp>
-        <p:nvSpPr>
-          <p:cNvPr id="14" name="Rounded Rectangle 13"/>
-          <p:cNvSpPr/>
-          <p:nvPr/>
-        </p:nvSpPr>
-        <p:spPr>
-          <a:xfrm>
-            <a:off x="8650224" y="1783080"/>
-            <a:ext cx="2011680" cy="1417320"/>
-          </a:xfrm>
-          <a:prstGeom prst="roundRect">
-            <a:avLst/>
-          </a:prstGeom>
-          <a:solidFill>
-            <a:srgbClr val="FFFFFF"/>
-          </a:solidFill>
-          <a:ln w="14604">
-            <a:solidFill>
-              <a:srgbClr val="D9D3CA"/>
-            </a:solidFill>
-          </a:ln>
-        </p:spPr>
-        <p:style>
-          <a:lnRef idx="1">
-            <a:schemeClr val="accent1"/>
-          </a:lnRef>
-          <a:fillRef idx="3">
-            <a:schemeClr val="accent1"/>
-          </a:fillRef>
-          <a:effectRef idx="2">
-            <a:schemeClr val="accent1"/>
-          </a:effectRef>
-          <a:fontRef idx="minor">
-            <a:schemeClr val="lt1"/>
-          </a:fontRef>
-        </p:style>
-        <p:txBody>
-          <a:bodyPr rtlCol="0" anchor="ctr"/>
-          <a:lstStyle/>
-          <a:p>
-            <a:pPr algn="ctr"/>
-          </a:p>
-        </p:txBody>
-      </p:sp>
-      <p:pic>
-        <p:nvPicPr>
-          <p:cNvPr id="15" name="Picture 14" descr="confusion_matrix.png"/>
-          <p:cNvPicPr>
-            <a:picLocks noChangeAspect="1"/>
-          </p:cNvPicPr>
-          <p:nvPr/>
-        </p:nvPicPr>
-        <p:blipFill>
-          <a:blip r:embed="rId3"/>
-          <a:stretch>
-            <a:fillRect/>
-          </a:stretch>
-        </p:blipFill>
-        <p:spPr>
-          <a:xfrm>
-            <a:off x="8723376" y="1856232"/>
-            <a:ext cx="1865376" cy="1033272"/>
-          </a:xfrm>
-          <a:prstGeom prst="rect">
-            <a:avLst/>
-          </a:prstGeom>
-        </p:spPr>
-      </p:pic>
-      <p:sp>
-        <p:nvSpPr>
-          <p:cNvPr id="16" name="TextBox 15"/>
-          <p:cNvSpPr txBox="1"/>
-          <p:nvPr/>
-        </p:nvSpPr>
-        <p:spPr>
-          <a:xfrm>
-            <a:off x="8741664" y="2953512"/>
-            <a:ext cx="1828800" cy="137160"/>
-          </a:xfrm>
-          <a:prstGeom prst="rect">
-            <a:avLst/>
-          </a:prstGeom>
-          <a:noFill/>
-        </p:spPr>
-        <p:txBody>
-          <a:bodyPr wrap="square" lIns="25400" rIns="25400" tIns="12700" bIns="12700">
-            <a:spAutoFit/>
-          </a:bodyPr>
-          <a:lstStyle/>
-          <a:p>
-            <a:pPr algn="ctr"/>
-            <a:r>
-              <a:rPr sz="1000" b="1">
-                <a:solidFill>
-                  <a:srgbClr val="626B76"/>
-                </a:solidFill>
-                <a:latin typeface="Yu Gothic"/>
-              </a:rPr>
-              <a:t>confusion_matrix.png</a:t>
-            </a:r>
-          </a:p>
-        </p:txBody>
-      </p:sp>
-      <p:sp>
-        <p:nvSpPr>
-          <p:cNvPr id="17" name="Rounded Rectangle 16"/>
-          <p:cNvSpPr/>
-          <p:nvPr/>
-        </p:nvSpPr>
-        <p:spPr>
-          <a:xfrm>
-            <a:off x="6473952" y="3401568"/>
-            <a:ext cx="2011680" cy="1417320"/>
-          </a:xfrm>
-          <a:prstGeom prst="roundRect">
-            <a:avLst/>
-          </a:prstGeom>
-          <a:solidFill>
-            <a:srgbClr val="FFFFFF"/>
-          </a:solidFill>
-          <a:ln w="14604">
-            <a:solidFill>
-              <a:srgbClr val="D9D3CA"/>
-            </a:solidFill>
-          </a:ln>
-        </p:spPr>
-        <p:style>
-          <a:lnRef idx="1">
-            <a:schemeClr val="accent1"/>
-          </a:lnRef>
-          <a:fillRef idx="3">
-            <a:schemeClr val="accent1"/>
-          </a:fillRef>
-          <a:effectRef idx="2">
-            <a:schemeClr val="accent1"/>
-          </a:effectRef>
-          <a:fontRef idx="minor">
-            <a:schemeClr val="lt1"/>
-          </a:fontRef>
-        </p:style>
-        <p:txBody>
-          <a:bodyPr rtlCol="0" anchor="ctr"/>
-          <a:lstStyle/>
-          <a:p>
-            <a:pPr algn="ctr"/>
-          </a:p>
-        </p:txBody>
-      </p:sp>
-      <p:pic>
-        <p:nvPicPr>
-          <p:cNvPr id="18" name="Picture 17" descr="summary_metrics.png"/>
-          <p:cNvPicPr>
-            <a:picLocks noChangeAspect="1"/>
-          </p:cNvPicPr>
-          <p:nvPr/>
-        </p:nvPicPr>
-        <p:blipFill>
-          <a:blip r:embed="rId4"/>
-          <a:stretch>
-            <a:fillRect/>
-          </a:stretch>
-        </p:blipFill>
-        <p:spPr>
-          <a:xfrm>
-            <a:off x="6547104" y="3474720"/>
-            <a:ext cx="1865376" cy="1033272"/>
-          </a:xfrm>
-          <a:prstGeom prst="rect">
-            <a:avLst/>
-          </a:prstGeom>
-        </p:spPr>
-      </p:pic>
-      <p:sp>
-        <p:nvSpPr>
-          <p:cNvPr id="19" name="TextBox 18"/>
-          <p:cNvSpPr txBox="1"/>
-          <p:nvPr/>
-        </p:nvSpPr>
-        <p:spPr>
-          <a:xfrm>
-            <a:off x="6565392" y="4572000"/>
-            <a:ext cx="1828800" cy="137160"/>
-          </a:xfrm>
-          <a:prstGeom prst="rect">
-            <a:avLst/>
-          </a:prstGeom>
-          <a:noFill/>
-        </p:spPr>
-        <p:txBody>
-          <a:bodyPr wrap="square" lIns="25400" rIns="25400" tIns="12700" bIns="12700">
-            <a:spAutoFit/>
-          </a:bodyPr>
-          <a:lstStyle/>
-          <a:p>
-            <a:pPr algn="ctr"/>
-            <a:r>
-              <a:rPr sz="1000" b="1">
-                <a:solidFill>
-                  <a:srgbClr val="626B76"/>
-                </a:solidFill>
-                <a:latin typeface="Yu Gothic"/>
-              </a:rPr>
-              <a:t>summary_metrics.png</a:t>
-            </a:r>
-          </a:p>
-        </p:txBody>
-      </p:sp>
-      <p:sp>
-        <p:nvSpPr>
-          <p:cNvPr id="20" name="Rounded Rectangle 19"/>
-          <p:cNvSpPr/>
-          <p:nvPr/>
-        </p:nvSpPr>
-        <p:spPr>
-          <a:xfrm>
-            <a:off x="8650224" y="3401568"/>
-            <a:ext cx="2011680" cy="1417320"/>
-          </a:xfrm>
-          <a:prstGeom prst="roundRect">
-            <a:avLst/>
-          </a:prstGeom>
-          <a:solidFill>
-            <a:srgbClr val="FFFFFF"/>
-          </a:solidFill>
-          <a:ln w="14604">
-            <a:solidFill>
-              <a:srgbClr val="D9D3CA"/>
-            </a:solidFill>
-          </a:ln>
-        </p:spPr>
-        <p:style>
-          <a:lnRef idx="1">
-            <a:schemeClr val="accent1"/>
-          </a:lnRef>
-          <a:fillRef idx="3">
-            <a:schemeClr val="accent1"/>
-          </a:fillRef>
-          <a:effectRef idx="2">
-            <a:schemeClr val="accent1"/>
-          </a:effectRef>
-          <a:fontRef idx="minor">
-            <a:schemeClr val="lt1"/>
-          </a:fontRef>
-        </p:style>
-        <p:txBody>
-          <a:bodyPr rtlCol="0" anchor="ctr"/>
-          <a:lstStyle/>
-          <a:p>
-            <a:pPr algn="ctr"/>
-          </a:p>
-        </p:txBody>
-      </p:sp>
-      <p:pic>
-        <p:nvPicPr>
-          <p:cNvPr id="21" name="Picture 20" descr="per_class_metrics.png"/>
-          <p:cNvPicPr>
-            <a:picLocks noChangeAspect="1"/>
-          </p:cNvPicPr>
-          <p:nvPr/>
-        </p:nvPicPr>
-        <p:blipFill>
-          <a:blip r:embed="rId5"/>
-          <a:stretch>
-            <a:fillRect/>
-          </a:stretch>
-        </p:blipFill>
-        <p:spPr>
-          <a:xfrm>
-            <a:off x="8723376" y="3474720"/>
-            <a:ext cx="1865376" cy="1033272"/>
-          </a:xfrm>
-          <a:prstGeom prst="rect">
-            <a:avLst/>
-          </a:prstGeom>
-        </p:spPr>
-      </p:pic>
-      <p:sp>
-        <p:nvSpPr>
-          <p:cNvPr id="22" name="TextBox 21"/>
-          <p:cNvSpPr txBox="1"/>
-          <p:nvPr/>
-        </p:nvSpPr>
-        <p:spPr>
-          <a:xfrm>
-            <a:off x="8741664" y="4572000"/>
-            <a:ext cx="1828800" cy="137160"/>
-          </a:xfrm>
-          <a:prstGeom prst="rect">
-            <a:avLst/>
-          </a:prstGeom>
-          <a:noFill/>
-        </p:spPr>
-        <p:txBody>
-          <a:bodyPr wrap="square" lIns="25400" rIns="25400" tIns="12700" bIns="12700">
-            <a:spAutoFit/>
-          </a:bodyPr>
-          <a:lstStyle/>
-          <a:p>
-            <a:pPr algn="ctr"/>
-            <a:r>
-              <a:rPr sz="1000" b="1">
-                <a:solidFill>
-                  <a:srgbClr val="626B76"/>
-                </a:solidFill>
-                <a:latin typeface="Yu Gothic"/>
-              </a:rPr>
-              <a:t>per_class_metrics.png</a:t>
-            </a:r>
-          </a:p>
-        </p:txBody>
-      </p:sp>
-      <p:sp>
-        <p:nvSpPr>
-          <p:cNvPr id="23" name="TextBox 22"/>
-          <p:cNvSpPr txBox="1"/>
-          <p:nvPr/>
-        </p:nvSpPr>
-        <p:spPr>
-          <a:xfrm>
-            <a:off x="6492240" y="5029200"/>
-            <a:ext cx="3840480" cy="237744"/>
-          </a:xfrm>
-          <a:prstGeom prst="rect">
-            <a:avLst/>
-          </a:prstGeom>
-          <a:noFill/>
-        </p:spPr>
-        <p:txBody>
-          <a:bodyPr wrap="square" lIns="25400" rIns="25400" tIns="12700" bIns="12700">
-            <a:spAutoFit/>
-          </a:bodyPr>
-          <a:lstStyle/>
-          <a:p>
-            <a:pPr algn="l"/>
-            <a:r>
-              <a:rPr sz="1200" b="1">
-                <a:solidFill>
-                  <a:srgbClr val="626B76"/>
-                </a:solidFill>
-                <a:latin typeface="Yu Gothic"/>
-              </a:rPr>
-              <a:t>evaluation_overview.png も同じ bundle に保存</a:t>
-            </a:r>
-          </a:p>
-        </p:txBody>
-      </p:sp>
-      <p:sp>
-        <p:nvSpPr>
-          <p:cNvPr id="24" name="TextBox 23"/>
+              <a:t>ほぼ正確 -&gt; 正確: マサチューセッツ州の有権者は、100万ドルを超える所得に対する4％の追加税…</a:t>
+            </a:r>
+          </a:p>
+          <a:p>
+            <a:pPr algn="l">
+              <a:spcAft>
+                <a:spcPts val="700"/>
+              </a:spcAft>
+            </a:pPr>
+            <a:r>
+              <a:rPr sz="1500">
+                <a:solidFill>
+                  <a:srgbClr val="1F2A34"/>
+                </a:solidFill>
+                <a:latin typeface="Yu Gothic"/>
+              </a:rPr>
+              <a:t>ほぼ正確 -&gt; 不正確: 世界最高峰のエベレストの標高は8858mである。</a:t>
+            </a:r>
+          </a:p>
+          <a:p>
+            <a:pPr algn="l">
+              <a:spcAft>
+                <a:spcPts val="700"/>
+              </a:spcAft>
+            </a:pPr>
+            <a:r>
+              <a:rPr sz="1500">
+                <a:solidFill>
+                  <a:srgbClr val="1F2A34"/>
+                </a:solidFill>
+                <a:latin typeface="Yu Gothic"/>
+              </a:rPr>
+              <a:t>誤り -&gt; 不正確: 5Gが新型コロナを引き起こす。</a:t>
+            </a:r>
+          </a:p>
+        </p:txBody>
+      </p:sp>
+      <p:sp>
+        <p:nvSpPr>
+          <p:cNvPr id="11" name="TextBox 10"/>
           <p:cNvSpPr txBox="1"/>
           <p:nvPr/>
         </p:nvSpPr>
@@ -12188,7 +13044,7 @@
                 </a:solidFill>
                 <a:latin typeface="Yu Gothic"/>
               </a:rPr>
-              <a:t>6. 今後さらに実施してみたいこと</a:t>
+              <a:t>5. ビジネスインパクト</a:t>
             </a:r>
           </a:p>
         </p:txBody>
@@ -12223,7 +13079,7 @@
                 </a:solidFill>
                 <a:latin typeface="Yu Gothic"/>
               </a:rPr>
-              <a:t>最新評価を踏まえると、次の焦点はかなり明確になった</a:t>
+              <a:t>最新評価では、説明付き確認支援ツールとしてかなり使える水準に近づいた</a:t>
             </a:r>
           </a:p>
         </p:txBody>
@@ -12279,14 +13135,488 @@
         </p:nvSpPr>
         <p:spPr>
           <a:xfrm>
-            <a:off x="694944" y="1572768"/>
-            <a:ext cx="5321808" cy="4498848"/>
+            <a:off x="804672" y="1664208"/>
+            <a:ext cx="3246120" cy="932688"/>
           </a:xfrm>
           <a:prstGeom prst="roundRect">
             <a:avLst/>
           </a:prstGeom>
           <a:solidFill>
             <a:srgbClr val="FFFFFF"/>
+          </a:solidFill>
+          <a:ln w="14604">
+            <a:solidFill>
+              <a:srgbClr val="13767A"/>
+            </a:solidFill>
+          </a:ln>
+        </p:spPr>
+        <p:style>
+          <a:lnRef idx="1">
+            <a:schemeClr val="accent1"/>
+          </a:lnRef>
+          <a:fillRef idx="3">
+            <a:schemeClr val="accent1"/>
+          </a:fillRef>
+          <a:effectRef idx="2">
+            <a:schemeClr val="accent1"/>
+          </a:effectRef>
+          <a:fontRef idx="minor">
+            <a:schemeClr val="lt1"/>
+          </a:fontRef>
+        </p:style>
+        <p:txBody>
+          <a:bodyPr rtlCol="0" anchor="ctr"/>
+          <a:lstStyle/>
+          <a:p>
+            <a:pPr algn="ctr"/>
+          </a:p>
+        </p:txBody>
+      </p:sp>
+      <p:sp>
+        <p:nvSpPr>
+          <p:cNvPr id="6" name="Rectangle 5"/>
+          <p:cNvSpPr/>
+          <p:nvPr/>
+        </p:nvSpPr>
+        <p:spPr>
+          <a:xfrm>
+            <a:off x="804672" y="1664208"/>
+            <a:ext cx="3246120" cy="73152"/>
+          </a:xfrm>
+          <a:prstGeom prst="rect">
+            <a:avLst/>
+          </a:prstGeom>
+          <a:solidFill>
+            <a:srgbClr val="13767A"/>
+          </a:solidFill>
+          <a:ln>
+            <a:noFill/>
+          </a:ln>
+        </p:spPr>
+        <p:style>
+          <a:lnRef idx="1">
+            <a:schemeClr val="accent1"/>
+          </a:lnRef>
+          <a:fillRef idx="3">
+            <a:schemeClr val="accent1"/>
+          </a:fillRef>
+          <a:effectRef idx="2">
+            <a:schemeClr val="accent1"/>
+          </a:effectRef>
+          <a:fontRef idx="minor">
+            <a:schemeClr val="lt1"/>
+          </a:fontRef>
+        </p:style>
+        <p:txBody>
+          <a:bodyPr rtlCol="0" anchor="ctr"/>
+          <a:lstStyle/>
+          <a:p>
+            <a:pPr algn="ctr"/>
+          </a:p>
+        </p:txBody>
+      </p:sp>
+      <p:sp>
+        <p:nvSpPr>
+          <p:cNvPr id="7" name="TextBox 6"/>
+          <p:cNvSpPr txBox="1"/>
+          <p:nvPr/>
+        </p:nvSpPr>
+        <p:spPr>
+          <a:xfrm>
+            <a:off x="941832" y="1828800"/>
+            <a:ext cx="2971800" cy="201168"/>
+          </a:xfrm>
+          <a:prstGeom prst="rect">
+            <a:avLst/>
+          </a:prstGeom>
+          <a:noFill/>
+        </p:spPr>
+        <p:txBody>
+          <a:bodyPr wrap="square" lIns="25400" rIns="25400" tIns="12700" bIns="12700">
+            <a:spAutoFit/>
+          </a:bodyPr>
+          <a:lstStyle/>
+          <a:p>
+            <a:pPr algn="l"/>
+            <a:r>
+              <a:rPr sz="1200" b="0">
+                <a:solidFill>
+                  <a:srgbClr val="626B76"/>
+                </a:solidFill>
+                <a:latin typeface="Yu Gothic"/>
+              </a:rPr>
+              <a:t>個人向け</a:t>
+            </a:r>
+          </a:p>
+        </p:txBody>
+      </p:sp>
+      <p:sp>
+        <p:nvSpPr>
+          <p:cNvPr id="8" name="TextBox 7"/>
+          <p:cNvSpPr txBox="1"/>
+          <p:nvPr/>
+        </p:nvSpPr>
+        <p:spPr>
+          <a:xfrm>
+            <a:off x="941832" y="2048256"/>
+            <a:ext cx="2971800" cy="320040"/>
+          </a:xfrm>
+          <a:prstGeom prst="rect">
+            <a:avLst/>
+          </a:prstGeom>
+          <a:noFill/>
+        </p:spPr>
+        <p:txBody>
+          <a:bodyPr wrap="square" lIns="25400" rIns="25400" tIns="12700" bIns="12700">
+            <a:spAutoFit/>
+          </a:bodyPr>
+          <a:lstStyle/>
+          <a:p>
+            <a:pPr algn="l"/>
+            <a:r>
+              <a:rPr sz="2200" b="1">
+                <a:solidFill>
+                  <a:srgbClr val="1F2A34"/>
+                </a:solidFill>
+                <a:latin typeface="Yu Gothic"/>
+              </a:rPr>
+              <a:t>投稿前セルフチェック</a:t>
+            </a:r>
+          </a:p>
+        </p:txBody>
+      </p:sp>
+      <p:sp>
+        <p:nvSpPr>
+          <p:cNvPr id="9" name="Rounded Rectangle 8"/>
+          <p:cNvSpPr/>
+          <p:nvPr/>
+        </p:nvSpPr>
+        <p:spPr>
+          <a:xfrm>
+            <a:off x="4462272" y="1664208"/>
+            <a:ext cx="3246120" cy="932688"/>
+          </a:xfrm>
+          <a:prstGeom prst="roundRect">
+            <a:avLst/>
+          </a:prstGeom>
+          <a:solidFill>
+            <a:srgbClr val="FFFFFF"/>
+          </a:solidFill>
+          <a:ln w="14604">
+            <a:solidFill>
+              <a:srgbClr val="C96D31"/>
+            </a:solidFill>
+          </a:ln>
+        </p:spPr>
+        <p:style>
+          <a:lnRef idx="1">
+            <a:schemeClr val="accent1"/>
+          </a:lnRef>
+          <a:fillRef idx="3">
+            <a:schemeClr val="accent1"/>
+          </a:fillRef>
+          <a:effectRef idx="2">
+            <a:schemeClr val="accent1"/>
+          </a:effectRef>
+          <a:fontRef idx="minor">
+            <a:schemeClr val="lt1"/>
+          </a:fontRef>
+        </p:style>
+        <p:txBody>
+          <a:bodyPr rtlCol="0" anchor="ctr"/>
+          <a:lstStyle/>
+          <a:p>
+            <a:pPr algn="ctr"/>
+          </a:p>
+        </p:txBody>
+      </p:sp>
+      <p:sp>
+        <p:nvSpPr>
+          <p:cNvPr id="10" name="Rectangle 9"/>
+          <p:cNvSpPr/>
+          <p:nvPr/>
+        </p:nvSpPr>
+        <p:spPr>
+          <a:xfrm>
+            <a:off x="4462272" y="1664208"/>
+            <a:ext cx="3246120" cy="73152"/>
+          </a:xfrm>
+          <a:prstGeom prst="rect">
+            <a:avLst/>
+          </a:prstGeom>
+          <a:solidFill>
+            <a:srgbClr val="C96D31"/>
+          </a:solidFill>
+          <a:ln>
+            <a:noFill/>
+          </a:ln>
+        </p:spPr>
+        <p:style>
+          <a:lnRef idx="1">
+            <a:schemeClr val="accent1"/>
+          </a:lnRef>
+          <a:fillRef idx="3">
+            <a:schemeClr val="accent1"/>
+          </a:fillRef>
+          <a:effectRef idx="2">
+            <a:schemeClr val="accent1"/>
+          </a:effectRef>
+          <a:fontRef idx="minor">
+            <a:schemeClr val="lt1"/>
+          </a:fontRef>
+        </p:style>
+        <p:txBody>
+          <a:bodyPr rtlCol="0" anchor="ctr"/>
+          <a:lstStyle/>
+          <a:p>
+            <a:pPr algn="ctr"/>
+          </a:p>
+        </p:txBody>
+      </p:sp>
+      <p:sp>
+        <p:nvSpPr>
+          <p:cNvPr id="11" name="TextBox 10"/>
+          <p:cNvSpPr txBox="1"/>
+          <p:nvPr/>
+        </p:nvSpPr>
+        <p:spPr>
+          <a:xfrm>
+            <a:off x="4599432" y="1828800"/>
+            <a:ext cx="2971800" cy="201168"/>
+          </a:xfrm>
+          <a:prstGeom prst="rect">
+            <a:avLst/>
+          </a:prstGeom>
+          <a:noFill/>
+        </p:spPr>
+        <p:txBody>
+          <a:bodyPr wrap="square" lIns="25400" rIns="25400" tIns="12700" bIns="12700">
+            <a:spAutoFit/>
+          </a:bodyPr>
+          <a:lstStyle/>
+          <a:p>
+            <a:pPr algn="l"/>
+            <a:r>
+              <a:rPr sz="1200" b="0">
+                <a:solidFill>
+                  <a:srgbClr val="626B76"/>
+                </a:solidFill>
+                <a:latin typeface="Yu Gothic"/>
+              </a:rPr>
+              <a:t>組織向け</a:t>
+            </a:r>
+          </a:p>
+        </p:txBody>
+      </p:sp>
+      <p:sp>
+        <p:nvSpPr>
+          <p:cNvPr id="12" name="TextBox 11"/>
+          <p:cNvSpPr txBox="1"/>
+          <p:nvPr/>
+        </p:nvSpPr>
+        <p:spPr>
+          <a:xfrm>
+            <a:off x="4599432" y="2048256"/>
+            <a:ext cx="2971800" cy="320040"/>
+          </a:xfrm>
+          <a:prstGeom prst="rect">
+            <a:avLst/>
+          </a:prstGeom>
+          <a:noFill/>
+        </p:spPr>
+        <p:txBody>
+          <a:bodyPr wrap="square" lIns="25400" rIns="25400" tIns="12700" bIns="12700">
+            <a:spAutoFit/>
+          </a:bodyPr>
+          <a:lstStyle/>
+          <a:p>
+            <a:pPr algn="l"/>
+            <a:r>
+              <a:rPr sz="2200" b="1">
+                <a:solidFill>
+                  <a:srgbClr val="1F2A34"/>
+                </a:solidFill>
+                <a:latin typeface="Yu Gothic"/>
+              </a:rPr>
+              <a:t>一次仕分けと優先順位付け</a:t>
+            </a:r>
+          </a:p>
+        </p:txBody>
+      </p:sp>
+      <p:sp>
+        <p:nvSpPr>
+          <p:cNvPr id="13" name="Rounded Rectangle 12"/>
+          <p:cNvSpPr/>
+          <p:nvPr/>
+        </p:nvSpPr>
+        <p:spPr>
+          <a:xfrm>
+            <a:off x="8119872" y="1664208"/>
+            <a:ext cx="3182112" cy="932688"/>
+          </a:xfrm>
+          <a:prstGeom prst="roundRect">
+            <a:avLst/>
+          </a:prstGeom>
+          <a:solidFill>
+            <a:srgbClr val="FFFFFF"/>
+          </a:solidFill>
+          <a:ln w="14604">
+            <a:solidFill>
+              <a:srgbClr val="458E5F"/>
+            </a:solidFill>
+          </a:ln>
+        </p:spPr>
+        <p:style>
+          <a:lnRef idx="1">
+            <a:schemeClr val="accent1"/>
+          </a:lnRef>
+          <a:fillRef idx="3">
+            <a:schemeClr val="accent1"/>
+          </a:fillRef>
+          <a:effectRef idx="2">
+            <a:schemeClr val="accent1"/>
+          </a:effectRef>
+          <a:fontRef idx="minor">
+            <a:schemeClr val="lt1"/>
+          </a:fontRef>
+        </p:style>
+        <p:txBody>
+          <a:bodyPr rtlCol="0" anchor="ctr"/>
+          <a:lstStyle/>
+          <a:p>
+            <a:pPr algn="ctr"/>
+          </a:p>
+        </p:txBody>
+      </p:sp>
+      <p:sp>
+        <p:nvSpPr>
+          <p:cNvPr id="14" name="Rectangle 13"/>
+          <p:cNvSpPr/>
+          <p:nvPr/>
+        </p:nvSpPr>
+        <p:spPr>
+          <a:xfrm>
+            <a:off x="8119872" y="1664208"/>
+            <a:ext cx="3182112" cy="73152"/>
+          </a:xfrm>
+          <a:prstGeom prst="rect">
+            <a:avLst/>
+          </a:prstGeom>
+          <a:solidFill>
+            <a:srgbClr val="458E5F"/>
+          </a:solidFill>
+          <a:ln>
+            <a:noFill/>
+          </a:ln>
+        </p:spPr>
+        <p:style>
+          <a:lnRef idx="1">
+            <a:schemeClr val="accent1"/>
+          </a:lnRef>
+          <a:fillRef idx="3">
+            <a:schemeClr val="accent1"/>
+          </a:fillRef>
+          <a:effectRef idx="2">
+            <a:schemeClr val="accent1"/>
+          </a:effectRef>
+          <a:fontRef idx="minor">
+            <a:schemeClr val="lt1"/>
+          </a:fontRef>
+        </p:style>
+        <p:txBody>
+          <a:bodyPr rtlCol="0" anchor="ctr"/>
+          <a:lstStyle/>
+          <a:p>
+            <a:pPr algn="ctr"/>
+          </a:p>
+        </p:txBody>
+      </p:sp>
+      <p:sp>
+        <p:nvSpPr>
+          <p:cNvPr id="15" name="TextBox 14"/>
+          <p:cNvSpPr txBox="1"/>
+          <p:nvPr/>
+        </p:nvSpPr>
+        <p:spPr>
+          <a:xfrm>
+            <a:off x="8257032" y="1828800"/>
+            <a:ext cx="2907792" cy="201168"/>
+          </a:xfrm>
+          <a:prstGeom prst="rect">
+            <a:avLst/>
+          </a:prstGeom>
+          <a:noFill/>
+        </p:spPr>
+        <p:txBody>
+          <a:bodyPr wrap="square" lIns="25400" rIns="25400" tIns="12700" bIns="12700">
+            <a:spAutoFit/>
+          </a:bodyPr>
+          <a:lstStyle/>
+          <a:p>
+            <a:pPr algn="l"/>
+            <a:r>
+              <a:rPr sz="1200" b="0">
+                <a:solidFill>
+                  <a:srgbClr val="626B76"/>
+                </a:solidFill>
+                <a:latin typeface="Yu Gothic"/>
+              </a:rPr>
+              <a:t>教育向け</a:t>
+            </a:r>
+          </a:p>
+        </p:txBody>
+      </p:sp>
+      <p:sp>
+        <p:nvSpPr>
+          <p:cNvPr id="16" name="TextBox 15"/>
+          <p:cNvSpPr txBox="1"/>
+          <p:nvPr/>
+        </p:nvSpPr>
+        <p:spPr>
+          <a:xfrm>
+            <a:off x="8257032" y="2048256"/>
+            <a:ext cx="2907792" cy="320040"/>
+          </a:xfrm>
+          <a:prstGeom prst="rect">
+            <a:avLst/>
+          </a:prstGeom>
+          <a:noFill/>
+        </p:spPr>
+        <p:txBody>
+          <a:bodyPr wrap="square" lIns="25400" rIns="25400" tIns="12700" bIns="12700">
+            <a:spAutoFit/>
+          </a:bodyPr>
+          <a:lstStyle/>
+          <a:p>
+            <a:pPr algn="l"/>
+            <a:r>
+              <a:rPr sz="2200" b="1">
+                <a:solidFill>
+                  <a:srgbClr val="1F2A34"/>
+                </a:solidFill>
+                <a:latin typeface="Yu Gothic"/>
+              </a:rPr>
+              <a:t>メディアリテラシー支援</a:t>
+            </a:r>
+          </a:p>
+        </p:txBody>
+      </p:sp>
+      <p:sp>
+        <p:nvSpPr>
+          <p:cNvPr id="17" name="Rounded Rectangle 16"/>
+          <p:cNvSpPr/>
+          <p:nvPr/>
+        </p:nvSpPr>
+        <p:spPr>
+          <a:xfrm>
+            <a:off x="804672" y="2926080"/>
+            <a:ext cx="10469880" cy="2743200"/>
+          </a:xfrm>
+          <a:prstGeom prst="roundRect">
+            <a:avLst/>
+          </a:prstGeom>
+          <a:solidFill>
+            <a:srgbClr val="F3EEE5"/>
           </a:solidFill>
           <a:ln w="14604">
             <a:solidFill>
@@ -12318,94 +13648,14 @@
       </p:sp>
       <p:sp>
         <p:nvSpPr>
-          <p:cNvPr id="6" name="Rounded Rectangle 5"/>
-          <p:cNvSpPr/>
-          <p:nvPr/>
-        </p:nvSpPr>
-        <p:spPr>
-          <a:xfrm>
-            <a:off x="6236208" y="1572768"/>
-            <a:ext cx="5321808" cy="4498848"/>
-          </a:xfrm>
-          <a:prstGeom prst="roundRect">
-            <a:avLst/>
-          </a:prstGeom>
-          <a:solidFill>
-            <a:srgbClr val="EAF3F1"/>
-          </a:solidFill>
-          <a:ln w="14604">
-            <a:solidFill>
-              <a:srgbClr val="D9D3CA"/>
-            </a:solidFill>
-          </a:ln>
-        </p:spPr>
-        <p:style>
-          <a:lnRef idx="1">
-            <a:schemeClr val="accent1"/>
-          </a:lnRef>
-          <a:fillRef idx="3">
-            <a:schemeClr val="accent1"/>
-          </a:fillRef>
-          <a:effectRef idx="2">
-            <a:schemeClr val="accent1"/>
-          </a:effectRef>
-          <a:fontRef idx="minor">
-            <a:schemeClr val="lt1"/>
-          </a:fontRef>
-        </p:style>
-        <p:txBody>
-          <a:bodyPr rtlCol="0" anchor="ctr"/>
-          <a:lstStyle/>
-          <a:p>
-            <a:pPr algn="ctr"/>
-          </a:p>
-        </p:txBody>
-      </p:sp>
-      <p:sp>
-        <p:nvSpPr>
-          <p:cNvPr id="7" name="TextBox 6"/>
+          <p:cNvPr id="18" name="TextBox 17"/>
           <p:cNvSpPr txBox="1"/>
           <p:nvPr/>
         </p:nvSpPr>
         <p:spPr>
           <a:xfrm>
-            <a:off x="932688" y="1847088"/>
-            <a:ext cx="2560320" cy="274320"/>
-          </a:xfrm>
-          <a:prstGeom prst="rect">
-            <a:avLst/>
-          </a:prstGeom>
-          <a:noFill/>
-        </p:spPr>
-        <p:txBody>
-          <a:bodyPr wrap="square" lIns="25400" rIns="25400" tIns="12700" bIns="12700">
-            <a:spAutoFit/>
-          </a:bodyPr>
-          <a:lstStyle/>
-          <a:p>
-            <a:pPr algn="l"/>
-            <a:r>
-              <a:rPr sz="2000" b="1">
-                <a:solidFill>
-                  <a:srgbClr val="13767A"/>
-                </a:solidFill>
-                <a:latin typeface="Yu Gothic"/>
-              </a:rPr>
-              <a:t>モデル改善</a:t>
-            </a:r>
-          </a:p>
-        </p:txBody>
-      </p:sp>
-      <p:sp>
-        <p:nvSpPr>
-          <p:cNvPr id="8" name="TextBox 7"/>
-          <p:cNvSpPr txBox="1"/>
-          <p:nvPr/>
-        </p:nvSpPr>
-        <p:spPr>
-          <a:xfrm>
-            <a:off x="914400" y="2139696"/>
-            <a:ext cx="4617720" cy="3108960"/>
+            <a:off x="1051560" y="3200400"/>
+            <a:ext cx="9966960" cy="2011680"/>
           </a:xfrm>
           <a:prstGeom prst="rect">
             <a:avLst/>
@@ -12424,13 +13674,13 @@
               </a:spcAft>
             </a:pPr>
             <a:r>
-              <a:rPr sz="1700">
+              <a:rPr sz="1800">
                 <a:solidFill>
                   <a:srgbClr val="1F2A34"/>
                 </a:solidFill>
                 <a:latin typeface="Yu Gothic"/>
               </a:rPr>
-              <a:t>誤り -&gt; 不正確 の 4 件を優先して潰し、誤り recall をもう一段引き上げる</a:t>
+              <a:t>最新 rerun では Accuracy 84.0%、Binary F1 0.889 まで到達し、『全く使えない』段階は抜けた</a:t>
             </a:r>
           </a:p>
           <a:p>
@@ -12440,13 +13690,13 @@
               </a:spcAft>
             </a:pPr>
             <a:r>
-              <a:rPr sz="1700">
+              <a:rPr sz="1800">
                 <a:solidFill>
                   <a:srgbClr val="1F2A34"/>
                 </a:solidFill>
                 <a:latin typeface="Yu Gothic"/>
               </a:rPr>
-              <a:t>ほぼ正確 -&gt; 正確 6 件、ほぼ正確 -&gt; 不正確 2 件を材料に、境界ルールを整理する</a:t>
+              <a:t>5区分 verdict に加え、理由・確認リンク・attention score を返すので、利用者が次の確認行動を取りやすい</a:t>
             </a:r>
           </a:p>
           <a:p>
@@ -12456,73 +13706,15 @@
               </a:spcAft>
             </a:pPr>
             <a:r>
-              <a:rPr sz="1700">
+              <a:rPr sz="1800">
                 <a:solidFill>
                   <a:srgbClr val="1F2A34"/>
                 </a:solidFill>
                 <a:latin typeface="Yu Gothic"/>
               </a:rPr>
-              <a:t>Ver4 を主軸に改善しつつ、安全な修正は Ver2 / Ver3 に追従させる</a:t>
-            </a:r>
-          </a:p>
-        </p:txBody>
-      </p:sp>
-      <p:sp>
-        <p:nvSpPr>
-          <p:cNvPr id="9" name="TextBox 8"/>
-          <p:cNvSpPr txBox="1"/>
-          <p:nvPr/>
-        </p:nvSpPr>
-        <p:spPr>
-          <a:xfrm>
-            <a:off x="6473952" y="1847088"/>
-            <a:ext cx="3291840" cy="274320"/>
-          </a:xfrm>
-          <a:prstGeom prst="rect">
-            <a:avLst/>
-          </a:prstGeom>
-          <a:noFill/>
-        </p:spPr>
-        <p:txBody>
-          <a:bodyPr wrap="square" lIns="25400" rIns="25400" tIns="12700" bIns="12700">
-            <a:spAutoFit/>
-          </a:bodyPr>
-          <a:lstStyle/>
-          <a:p>
-            <a:pPr algn="l"/>
-            <a:r>
-              <a:rPr sz="2000" b="1">
-                <a:solidFill>
-                  <a:srgbClr val="C96D31"/>
-                </a:solidFill>
-                <a:latin typeface="Yu Gothic"/>
-              </a:rPr>
-              <a:t>データと運用の拡張</a:t>
-            </a:r>
-          </a:p>
-        </p:txBody>
-      </p:sp>
-      <p:sp>
-        <p:nvSpPr>
-          <p:cNvPr id="10" name="TextBox 9"/>
-          <p:cNvSpPr txBox="1"/>
-          <p:nvPr/>
-        </p:nvSpPr>
-        <p:spPr>
-          <a:xfrm>
-            <a:off x="6446520" y="2139696"/>
-            <a:ext cx="4617720" cy="3108960"/>
-          </a:xfrm>
-          <a:prstGeom prst="rect">
-            <a:avLst/>
-          </a:prstGeom>
-          <a:noFill/>
-        </p:spPr>
-        <p:txBody>
-          <a:bodyPr wrap="square" lIns="50800" rIns="50800">
-            <a:spAutoFit/>
-          </a:bodyPr>
-          <a:lstStyle/>
+              <a:t>自治体、学校、メディア運用では『まず人が見るべき候補』を絞る補助として使える</a:t>
+            </a:r>
+          </a:p>
           <a:p>
             <a:pPr algn="l">
               <a:spcAft>
@@ -12530,52 +13722,20 @@
               </a:spcAft>
             </a:pPr>
             <a:r>
-              <a:rPr sz="1700">
+              <a:rPr sz="1800">
                 <a:solidFill>
                   <a:srgbClr val="1F2A34"/>
                 </a:solidFill>
                 <a:latin typeface="Yu Gothic"/>
               </a:rPr>
-              <a:t>CSV / XLSX を使って誤判定をケース単位で見直し、ルール修正の根拠を増やす</a:t>
-            </a:r>
-          </a:p>
-          <a:p>
-            <a:pPr algn="l">
-              <a:spcAft>
-                <a:spcPts val="700"/>
-              </a:spcAft>
-            </a:pPr>
-            <a:r>
-              <a:rPr sz="1700">
-                <a:solidFill>
-                  <a:srgbClr val="1F2A34"/>
-                </a:solidFill>
-                <a:latin typeface="Yu Gothic"/>
-              </a:rPr>
-              <a:t>時事性の高いケースや SNS 投稿に近いデータを追加し、実運用に近い評価へ広げる</a:t>
-            </a:r>
-          </a:p>
-          <a:p>
-            <a:pPr algn="l">
-              <a:spcAft>
-                <a:spcPts val="700"/>
-              </a:spcAft>
-            </a:pPr>
-            <a:r>
-              <a:rPr sz="1700">
-                <a:solidFill>
-                  <a:srgbClr val="1F2A34"/>
-                </a:solidFill>
-                <a:latin typeface="Yu Gothic"/>
-              </a:rPr>
-              <a:t>発表では『今できていること』と『まだできていないこと』を分けて伝える</a:t>
-            </a:r>
-          </a:p>
-        </p:txBody>
-      </p:sp>
-      <p:sp>
-        <p:nvSpPr>
-          <p:cNvPr id="11" name="TextBox 10"/>
+              <a:t>ただし最終断定を完全自動化するには、ほぼ正確境界と誤り recall をもう一段伸ばす必要がある</a:t>
+            </a:r>
+          </a:p>
+        </p:txBody>
+      </p:sp>
+      <p:sp>
+        <p:nvSpPr>
+          <p:cNvPr id="19" name="TextBox 18"/>
           <p:cNvSpPr txBox="1"/>
           <p:nvPr/>
         </p:nvSpPr>
